--- a/L02_conosci_il_dataset/slide_complete.pptx
+++ b/L02_conosci_il_dataset/slide_complete.pptx
@@ -23,9 +23,10 @@
     <p:sldId id="271" r:id="rId17"/>
     <p:sldId id="272" r:id="rId18"/>
     <p:sldId id="273" r:id="rId19"/>
+    <p:sldId id="274" r:id="rId20"/>
   </p:sldIdLst>
   <p:notesMasterIdLst>
-    <p:notesMasterId r:id="rId20"/>
+    <p:notesMasterId r:id="rId21"/>
   </p:notesMasterIdLst>
   <p:sldSz cx="12192000" cy="6858000"/>
   <p:notesSz cx="6858000" cy="12192000"/>
@@ -124,13 +125,13 @@
   <p:extLst>
     <p:ext uri="{521415D9-36F7-43E2-AB2F-B90AF26B5E84}">
       <p14:sectionLst xmlns:p14="http://schemas.microsoft.com/office/powerpoint/2010/main">
-        <p14:section name="Apertura" id="{1e53a7e7-5b3a-f781-6e64-618f7725cfac}">
+        <p14:section name="Apertura" id="{ffa0a288-c9ab-7dec-69fa-0972b26fb171}">
           <p14:sldIdLst>
             <p14:sldId id="256"/>
             <p14:sldId id="257"/>
           </p14:sldIdLst>
         </p14:section>
-        <p14:section name="Spiegazione" id="{cdb871e0-6cd7-a8f0-f4f6-bf0dd4d4d2c5}">
+        <p14:section name="Spiegazione" id="{9f570319-bba4-5be0-22dc-21a99c46e000}">
           <p14:sldIdLst>
             <p14:sldId id="258"/>
             <p14:sldId id="259"/>
@@ -141,25 +142,26 @@
             <p14:sldId id="264"/>
             <p14:sldId id="265"/>
             <p14:sldId id="266"/>
-          </p14:sldIdLst>
-        </p14:section>
-        <p14:section name="Task" id="{abc88de7-1187-cea8-bbb8-9a4aa1b3b2f1}">
-          <p14:sldIdLst>
             <p14:sldId id="267"/>
           </p14:sldIdLst>
         </p14:section>
-        <p14:section name="Debrief" id="{47c2ffe2-edcb-795f-a16a-06725b2d137c}">
+        <p14:section name="Task" id="{393cbcac-07b1-ac06-b38b-49f60c3a06e7}">
           <p14:sldIdLst>
             <p14:sldId id="268"/>
+          </p14:sldIdLst>
+        </p14:section>
+        <p14:section name="Debrief" id="{392fc6ec-b699-50be-d7cc-e45e579be821}">
+          <p14:sldIdLst>
             <p14:sldId id="269"/>
             <p14:sldId id="270"/>
             <p14:sldId id="271"/>
             <p14:sldId id="272"/>
+            <p14:sldId id="273"/>
           </p14:sldIdLst>
         </p14:section>
-        <p14:section name="Chiusura" id="{14b90a6a-44cb-6299-52c0-71b89d1e6eea}">
+        <p14:section name="Chiusura" id="{5a3de7f2-f75d-a972-2052-e1d01158e8d6}">
           <p14:sldIdLst>
-            <p14:sldId id="273"/>
+            <p14:sldId id="274"/>
           </p14:sldIdLst>
         </p14:section>
       </p14:sectionLst>
@@ -654,7 +656,7 @@
           <a:p>
             <a:r>
               <a:rPr lang="en-US" dirty="0"/>
-              <a:t>DEMO: aprire la pagina della documentazione dei DataFrame, mostrare l'elenco dei metodi, cliccarne uno (head) e far vedere la struttura: parametri, cosa restituisce, esempi in fondo. Gli esempi in fondo sono la parte più utile.</a:t>
+              <a:t>Concetto astratto, tenerlo leggero. In Colab: scrivere df. e premere Tab per vedere tutto quello che si può chiedere.</a:t>
             </a:r>
             <a:endParaRPr lang="en-US" dirty="0"/>
           </a:p>
@@ -742,7 +744,7 @@
           <a:p>
             <a:r>
               <a:rPr lang="en-US" dirty="0"/>
-              <a:t>Non serve memorizzare i comandi: serve ricordarsi le domande. I comandi si cercano.</a:t>
+              <a:t>DEMO: aprire la pagina della documentazione dei DataFrame, mostrare l'elenco dei metodi, cliccarne uno (head) e far vedere la struttura: parametri, cosa restituisce, esempi in fondo. Gli esempi in fondo sono la parte più utile.</a:t>
             </a:r>
             <a:endParaRPr lang="en-US" dirty="0"/>
           </a:p>
@@ -830,7 +832,7 @@
           <a:p>
             <a:r>
               <a:rPr lang="en-US" dirty="0"/>
-              <a:t>Durante il task: segnarsi chi trova i problemi e come. Molti al passo 7 vedranno 'n.d.' come massimo e non si faranno domande: è il punto del debrief.</a:t>
+              <a:t>Non serve memorizzare i comandi: serve ricordarsi le domande. I comandi si cercano.</a:t>
             </a:r>
             <a:endParaRPr lang="en-US" dirty="0"/>
           </a:p>
@@ -918,7 +920,7 @@
           <a:p>
             <a:r>
               <a:rPr lang="en-US" dirty="0"/>
-              <a:t>Partire dalla domanda finale: far dire alla classe le tre cose che non convincono.</a:t>
+              <a:t>Durante il task: segnarsi chi trova i problemi e come. Molti al passo 7 vedranno 'n.d.' come massimo e non si faranno domande: è il punto del debrief.</a:t>
             </a:r>
             <a:endParaRPr lang="en-US" dirty="0"/>
           </a:p>
@@ -1006,7 +1008,7 @@
           <a:p>
             <a:r>
               <a:rPr lang="en-US" dirty="0"/>
-              <a:t>Il messaggio: il primo strumento di verifica è il buon senso. Sapere quanti dati ti aspetti.</a:t>
+              <a:t>Partire dalla domanda finale: far dire alla classe le tre cose che non convincono.</a:t>
             </a:r>
             <a:endParaRPr lang="en-US" dirty="0"/>
           </a:p>
@@ -1094,7 +1096,7 @@
           <a:p>
             <a:r>
               <a:rPr lang="en-US" dirty="0"/>
-              <a:t>Il messaggio di errore esatto cambia con la versione di pandas: in Colab può dire 'Could not convert ... to numeric'. Mostrare quello che hanno ottenuto loro.</a:t>
+              <a:t>Il messaggio: il primo strumento di verifica è il buon senso. Sapere quanti dati ti aspetti.</a:t>
             </a:r>
             <a:endParaRPr lang="en-US" dirty="0"/>
           </a:p>
@@ -1182,7 +1184,7 @@
           <a:p>
             <a:r>
               <a:rPr lang="en-US" dirty="0"/>
-              <a:t>Chiedere: quante imprese lombarde ci sono davvero? Non lo sappiamo finché non puliamo. Anticipa L3 e L5 (merge).</a:t>
+              <a:t>Il messaggio di errore esatto cambia con la versione di pandas: in Colab può dire 'Could not convert ... to numeric'. Mostrare quello che hanno ottenuto loro.</a:t>
             </a:r>
             <a:endParaRPr lang="en-US" dirty="0"/>
           </a:p>
@@ -1270,7 +1272,7 @@
           <a:p>
             <a:r>
               <a:rPr lang="en-US" dirty="0"/>
-              <a:t>Ci sono anche valori mancanti e date in due formati: se qualcuno li ha notati, bene; altrimenti li scopriamo nella L3.</a:t>
+              <a:t>Chiedere: quante imprese lombarde ci sono davvero? Non lo sappiamo finché non puliamo. Anticipa L3 e L5 (merge).</a:t>
             </a:r>
             <a:endParaRPr lang="en-US" dirty="0"/>
           </a:p>
@@ -1358,7 +1360,7 @@
           <a:p>
             <a:r>
               <a:rPr lang="en-US" dirty="0"/>
-              <a:t>Le lezioni Kaggle: Creating, Reading and Writing; Indexing, Selecting &amp; Assigning.</a:t>
+              <a:t>Ci sono anche valori mancanti e date in due formati: se qualcuno li ha notati, bene; altrimenti li scopriamo nella L3.</a:t>
             </a:r>
             <a:endParaRPr lang="en-US" dirty="0"/>
           </a:p>
@@ -1382,6 +1384,94 @@
             <a:fld id="{F7021451-1387-4CA6-816F-3879F97B5CBC}" type="slidenum">
               <a:rPr lang="en-US"/>
               <a:t>18</a:t>
+            </a:fld>
+            <a:endParaRPr lang="en-US"/>
+          </a:p>
+        </p:txBody>
+      </p:sp>
+    </p:spTree>
+    <p:extLst>
+      <p:ext uri="{BB962C8B-B14F-4D97-AF65-F5344CB8AC3E}">
+        <p14:creationId xmlns:p14="http://schemas.microsoft.com/office/powerpoint/2010/main" val="1024086991"/>
+      </p:ext>
+    </p:extLst>
+  </p:cSld>
+  <p:clrMapOvr>
+    <a:masterClrMapping/>
+  </p:clrMapOvr>
+</p:notes>
+</file>
+
+<file path=ppt/notesSlides/notesSlide19.xml><?xml version="1.0" encoding="utf-8"?>
+<p:notes xmlns:a="http://schemas.openxmlformats.org/drawingml/2006/main" xmlns:r="http://schemas.openxmlformats.org/officeDocument/2006/relationships" xmlns:p="http://schemas.openxmlformats.org/presentationml/2006/main">
+  <p:cSld>
+    <p:spTree>
+      <p:nvGrpSpPr>
+        <p:cNvPr id="1" name=""/>
+        <p:cNvGrpSpPr/>
+        <p:nvPr/>
+      </p:nvGrpSpPr>
+      <p:grpSpPr>
+        <a:xfrm>
+          <a:off x="0" y="0"/>
+          <a:ext cx="0" cy="0"/>
+          <a:chOff x="0" y="0"/>
+          <a:chExt cx="0" cy="0"/>
+        </a:xfrm>
+      </p:grpSpPr>
+      <p:sp>
+        <p:nvSpPr>
+          <p:cNvPr id="2" name="Slide Image Placeholder 1"/>
+          <p:cNvSpPr>
+            <a:spLocks noGrp="1" noRot="1" noChangeAspect="1"/>
+          </p:cNvSpPr>
+          <p:nvPr>
+            <p:ph type="sldImg"/>
+          </p:nvPr>
+        </p:nvSpPr>
+        <p:spPr/>
+      </p:sp>
+      <p:sp>
+        <p:nvSpPr>
+          <p:cNvPr id="3" name="Notes Placeholder 2"/>
+          <p:cNvSpPr>
+            <a:spLocks noGrp="1"/>
+          </p:cNvSpPr>
+          <p:nvPr>
+            <p:ph type="body" idx="1"/>
+          </p:nvPr>
+        </p:nvSpPr>
+        <p:spPr/>
+        <p:txBody>
+          <a:bodyPr/>
+          <a:lstStyle/>
+          <a:p>
+            <a:r>
+              <a:rPr lang="en-US" dirty="0"/>
+              <a:t>Le lezioni Kaggle: Creating, Reading and Writing; Indexing, Selecting &amp; Assigning.</a:t>
+            </a:r>
+            <a:endParaRPr lang="en-US" dirty="0"/>
+          </a:p>
+        </p:txBody>
+      </p:sp>
+      <p:sp>
+        <p:nvSpPr>
+          <p:cNvPr id="4" name="Slide Number Placeholder 3"/>
+          <p:cNvSpPr>
+            <a:spLocks noGrp="1"/>
+          </p:cNvSpPr>
+          <p:nvPr>
+            <p:ph type="sldNum" sz="quarter" idx="10"/>
+          </p:nvPr>
+        </p:nvSpPr>
+        <p:spPr/>
+        <p:txBody>
+          <a:bodyPr/>
+          <a:lstStyle/>
+          <a:p>
+            <a:fld id="{F7021451-1387-4CA6-816F-3879F97B5CBC}" type="slidenum">
+              <a:rPr lang="en-US"/>
+              <a:t>19</a:t>
             </a:fld>
             <a:endParaRPr lang="en-US"/>
           </a:p>
@@ -1974,7 +2064,7 @@
           <a:p>
             <a:r>
               <a:rPr lang="en-US" dirty="0"/>
-              <a:t>La tabella nella slide è semplificata (colonne scelte per chiarezza). Dal vivo: aprire imprese.xlsx in Excel o Google Sheets accanto a Colab, selezionare A2:C6, poi eseguire df.iloc[0:5, 0:3]: sono le stesse celle. Con i tagli della slide precedente: il taglio 0 sta sotto l'intestazione, il taglio 5 dopo la quinta riga di dati.</a:t>
+              <a:t>Il passo serve raramente con i DataFrame (df.iloc[::100] per vedere una riga ogni 100 è il caso tipico), ma [::-1] per invertire è un classico che troveranno ovunque.</a:t>
             </a:r>
             <a:endParaRPr lang="en-US" dirty="0"/>
           </a:p>
@@ -2062,7 +2152,7 @@
           <a:p>
             <a:r>
               <a:rPr lang="en-US" dirty="0"/>
-              <a:t>Concetto astratto, tenerlo leggero. In Colab: scrivere df. e premere Tab per vedere tutto quello che si può chiedere.</a:t>
+              <a:t>La tabella nella slide è semplificata (colonne scelte per chiarezza). Dal vivo: aprire imprese.xlsx in Excel o Google Sheets accanto a Colab, selezionare A2:C6, poi eseguire df.iloc[0:5, 0:3]: sono le stesse celle. Con i tagli della slide precedente: il taglio 0 sta sotto l'intestazione, il taglio 5 dopo la quinta riga di dati.</a:t>
             </a:r>
             <a:endParaRPr lang="en-US" dirty="0"/>
           </a:p>
@@ -2981,7 +3071,7 @@
                   <a:srgbClr val="0F4C5C"/>
                 </a:solidFill>
               </a:rPr>
-              <a:t>Come scoprire cosa sa fare un oggetto</a:t>
+              <a:t>Fare domande a un oggetto</a:t>
             </a:r>
             <a:endParaRPr lang="en-US" sz="3600" dirty="0"/>
           </a:p>
@@ -2989,18 +3079,187 @@
       </p:sp>
       <p:sp>
         <p:nvSpPr>
-          <p:cNvPr id="3" name="Shape 1"/>
+          <p:cNvPr id="3" name="Text 1"/>
+          <p:cNvSpPr txBox="1"/>
+          <p:nvPr/>
+        </p:nvSpPr>
+        <p:spPr>
+          <a:xfrm>
+            <a:off x="548640" y="1645920"/>
+            <a:ext cx="5349240" cy="457200"/>
+          </a:xfrm>
+          <a:prstGeom prst="rect">
+            <a:avLst/>
+          </a:prstGeom>
+          <a:noFill/>
+          <a:ln/>
+        </p:spPr>
+        <p:txBody>
+          <a:bodyPr wrap="square" lIns="0" tIns="0" rIns="0" bIns="0" rtlCol="0" anchor="ctr"/>
+          <a:lstStyle/>
+          <a:p>
+            <a:pPr indent="0" marL="0">
+              <a:buNone/>
+            </a:pPr>
+            <a:r>
+              <a:rPr lang="en-US" sz="2600" b="1" dirty="0">
+                <a:solidFill>
+                  <a:srgbClr val="0F4C5C"/>
+                </a:solidFill>
+              </a:rPr>
+              <a:t>Metodo</a:t>
+            </a:r>
+            <a:endParaRPr lang="en-US" sz="2600" dirty="0"/>
+          </a:p>
+        </p:txBody>
+      </p:sp>
+      <p:sp>
+        <p:nvSpPr>
+          <p:cNvPr id="4" name="Text 2"/>
+          <p:cNvSpPr txBox="1"/>
+          <p:nvPr/>
+        </p:nvSpPr>
+        <p:spPr>
+          <a:xfrm>
+            <a:off x="548640" y="2103120"/>
+            <a:ext cx="5349240" cy="411480"/>
+          </a:xfrm>
+          <a:prstGeom prst="rect">
+            <a:avLst/>
+          </a:prstGeom>
+          <a:noFill/>
+          <a:ln/>
+        </p:spPr>
+        <p:txBody>
+          <a:bodyPr wrap="square" lIns="0" tIns="0" rIns="0" bIns="0" rtlCol="0" anchor="ctr"/>
+          <a:lstStyle/>
+          <a:p>
+            <a:pPr indent="0" marL="0">
+              <a:buNone/>
+            </a:pPr>
+            <a:r>
+              <a:rPr lang="en-US" sz="1800" dirty="0">
+                <a:solidFill>
+                  <a:srgbClr val="5C6F7B"/>
+                </a:solidFill>
+              </a:rPr>
+              <a:t>un'azione: ha le parentesi</a:t>
+            </a:r>
+            <a:endParaRPr lang="en-US" sz="1800" dirty="0"/>
+          </a:p>
+        </p:txBody>
+      </p:sp>
+      <p:sp>
+        <p:nvSpPr>
+          <p:cNvPr id="5" name="card-code"/>
           <p:cNvSpPr/>
           <p:nvPr/>
         </p:nvSpPr>
         <p:spPr>
           <a:xfrm>
-            <a:off x="548640" y="1737360"/>
-            <a:ext cx="3474720" cy="3108960"/>
+            <a:off x="548640" y="2697480"/>
+            <a:ext cx="5349240" cy="1188720"/>
           </a:xfrm>
           <a:prstGeom prst="roundRect">
             <a:avLst>
-              <a:gd name="adj" fmla="val 3529"/>
+              <a:gd name="adj" fmla="val 9231"/>
+            </a:avLst>
+          </a:prstGeom>
+          <a:solidFill>
+            <a:srgbClr val="1F2A30"/>
+          </a:solidFill>
+          <a:ln/>
+        </p:spPr>
+      </p:sp>
+      <p:sp>
+        <p:nvSpPr>
+          <p:cNvPr id="6" name="Text 4"/>
+          <p:cNvSpPr txBox="1"/>
+          <p:nvPr/>
+        </p:nvSpPr>
+        <p:spPr>
+          <a:xfrm>
+            <a:off x="777240" y="2834640"/>
+            <a:ext cx="1828800" cy="274320"/>
+          </a:xfrm>
+          <a:prstGeom prst="rect">
+            <a:avLst/>
+          </a:prstGeom>
+          <a:noFill/>
+          <a:ln/>
+        </p:spPr>
+        <p:txBody>
+          <a:bodyPr wrap="square" lIns="0" tIns="0" rIns="0" bIns="0" rtlCol="0" anchor="ctr"/>
+          <a:lstStyle/>
+          <a:p>
+            <a:pPr indent="0" marL="0">
+              <a:buNone/>
+            </a:pPr>
+            <a:r>
+              <a:rPr lang="en-US" sz="1100" b="1" spc="200" kern="0" dirty="0">
+                <a:solidFill>
+                  <a:srgbClr val="E09F3E"/>
+                </a:solidFill>
+              </a:rPr>
+              <a:t>PYTHON</a:t>
+            </a:r>
+            <a:endParaRPr lang="en-US" sz="1100" dirty="0"/>
+          </a:p>
+        </p:txBody>
+      </p:sp>
+      <p:sp>
+        <p:nvSpPr>
+          <p:cNvPr id="7" name="Text 5"/>
+          <p:cNvSpPr txBox="1"/>
+          <p:nvPr/>
+        </p:nvSpPr>
+        <p:spPr>
+          <a:xfrm>
+            <a:off x="777240" y="3154680"/>
+            <a:ext cx="4892040" cy="594360"/>
+          </a:xfrm>
+          <a:prstGeom prst="rect">
+            <a:avLst/>
+          </a:prstGeom>
+          <a:noFill/>
+          <a:ln/>
+        </p:spPr>
+        <p:txBody>
+          <a:bodyPr wrap="square" lIns="0" tIns="0" rIns="0" bIns="0" rtlCol="0" anchor="t"/>
+          <a:lstStyle/>
+          <a:p>
+            <a:pPr indent="0" marL="0">
+              <a:buNone/>
+            </a:pPr>
+            <a:r>
+              <a:rPr lang="en-US" sz="2200" dirty="0">
+                <a:solidFill>
+                  <a:srgbClr val="FFFFFF"/>
+                </a:solidFill>
+                <a:latin typeface="Courier New" pitchFamily="34" charset="0"/>
+                <a:ea typeface="Courier New" pitchFamily="34" charset="-122"/>
+                <a:cs typeface="Courier New" pitchFamily="34" charset="-120"/>
+              </a:rPr>
+              <a:t>df.head(3)</a:t>
+            </a:r>
+            <a:endParaRPr lang="en-US" sz="2200" dirty="0"/>
+          </a:p>
+        </p:txBody>
+      </p:sp>
+      <p:sp>
+        <p:nvSpPr>
+          <p:cNvPr id="8" name="card-out"/>
+          <p:cNvSpPr/>
+          <p:nvPr/>
+        </p:nvSpPr>
+        <p:spPr>
+          <a:xfrm>
+            <a:off x="548640" y="4069080"/>
+            <a:ext cx="5349240" cy="1188720"/>
+          </a:xfrm>
+          <a:prstGeom prst="roundRect">
+            <a:avLst>
+              <a:gd name="adj" fmla="val 9231"/>
             </a:avLst>
           </a:prstGeom>
           <a:solidFill>
@@ -3011,58 +3270,14 @@
       </p:sp>
       <p:sp>
         <p:nvSpPr>
-          <p:cNvPr id="4" name="Shape 2"/>
-          <p:cNvSpPr/>
-          <p:nvPr/>
-        </p:nvSpPr>
-        <p:spPr>
-          <a:xfrm>
-            <a:off x="868680" y="2057400"/>
-            <a:ext cx="914400" cy="914400"/>
-          </a:xfrm>
-          <a:prstGeom prst="ellipse">
-            <a:avLst/>
-          </a:prstGeom>
-          <a:solidFill>
-            <a:srgbClr val="FFFFFF"/>
-          </a:solidFill>
-          <a:ln/>
-        </p:spPr>
-      </p:sp>
-      <p:pic>
-        <p:nvPicPr>
-          <p:cNvPr id="5" name="Image 0" descr="preencoded.png">    </p:cNvPr>
-          <p:cNvPicPr>
-            <a:picLocks noChangeAspect="1"/>
-          </p:cNvPicPr>
-          <p:nvPr/>
-        </p:nvPicPr>
-        <p:blipFill>
-          <a:blip r:embed="rId1"/>
-          <a:stretch>
-            <a:fillRect/>
-          </a:stretch>
-        </p:blipFill>
-        <p:spPr>
-          <a:xfrm>
-            <a:off x="1115568" y="2304288"/>
-            <a:ext cx="420624" cy="420624"/>
-          </a:xfrm>
-          <a:prstGeom prst="rect">
-            <a:avLst/>
-          </a:prstGeom>
-        </p:spPr>
-      </p:pic>
-      <p:sp>
-        <p:nvSpPr>
-          <p:cNvPr id="6" name="Text 3"/>
-          <p:cNvSpPr txBox="1"/>
-          <p:nvPr/>
-        </p:nvSpPr>
-        <p:spPr>
-          <a:xfrm>
-            <a:off x="868680" y="3200400"/>
-            <a:ext cx="2834640" cy="502920"/>
+          <p:cNvPr id="9" name="Text 7"/>
+          <p:cNvSpPr txBox="1"/>
+          <p:nvPr/>
+        </p:nvSpPr>
+        <p:spPr>
+          <a:xfrm>
+            <a:off x="777240" y="4206240"/>
+            <a:ext cx="1828800" cy="274320"/>
           </a:xfrm>
           <a:prstGeom prst="rect">
             <a:avLst/>
@@ -3078,7 +3293,43 @@
               <a:buNone/>
             </a:pPr>
             <a:r>
-              <a:rPr lang="en-US" sz="2200" b="1" dirty="0">
+              <a:rPr lang="en-US" sz="1100" b="1" spc="200" kern="0" dirty="0">
+                <a:solidFill>
+                  <a:srgbClr val="5C6F7B"/>
+                </a:solidFill>
+              </a:rPr>
+              <a:t>OUTPUT</a:t>
+            </a:r>
+            <a:endParaRPr lang="en-US" sz="1100" dirty="0"/>
+          </a:p>
+        </p:txBody>
+      </p:sp>
+      <p:sp>
+        <p:nvSpPr>
+          <p:cNvPr id="10" name="Text 8"/>
+          <p:cNvSpPr txBox="1"/>
+          <p:nvPr/>
+        </p:nvSpPr>
+        <p:spPr>
+          <a:xfrm>
+            <a:off x="777240" y="4526280"/>
+            <a:ext cx="4892040" cy="594360"/>
+          </a:xfrm>
+          <a:prstGeom prst="rect">
+            <a:avLst/>
+          </a:prstGeom>
+          <a:noFill/>
+          <a:ln/>
+        </p:spPr>
+        <p:txBody>
+          <a:bodyPr wrap="square" lIns="0" tIns="0" rIns="0" bIns="0" rtlCol="0" anchor="t"/>
+          <a:lstStyle/>
+          <a:p>
+            <a:pPr indent="0" marL="0">
+              <a:buNone/>
+            </a:pPr>
+            <a:r>
+              <a:rPr lang="en-US" sz="2000" dirty="0">
                 <a:solidFill>
                   <a:srgbClr val="1F2A30"/>
                 </a:solidFill>
@@ -3086,62 +3337,195 @@
                 <a:ea typeface="Courier New" pitchFamily="34" charset="-122"/>
                 <a:cs typeface="Courier New" pitchFamily="34" charset="-120"/>
               </a:rPr>
-              <a:t>df. + Tab</a:t>
-            </a:r>
-            <a:endParaRPr lang="en-US" sz="2200" dirty="0"/>
-          </a:p>
-        </p:txBody>
-      </p:sp>
-      <p:sp>
-        <p:nvSpPr>
-          <p:cNvPr id="7" name="Text 4"/>
-          <p:cNvSpPr txBox="1"/>
-          <p:nvPr/>
-        </p:nvSpPr>
-        <p:spPr>
-          <a:xfrm>
-            <a:off x="868680" y="3749040"/>
-            <a:ext cx="2834640" cy="914400"/>
-          </a:xfrm>
-          <a:prstGeom prst="rect">
-            <a:avLst/>
-          </a:prstGeom>
-          <a:noFill/>
-          <a:ln/>
-        </p:spPr>
-        <p:txBody>
-          <a:bodyPr wrap="square" lIns="0" tIns="0" rIns="0" bIns="0" rtlCol="0" anchor="t"/>
+              <a:t>le prime 3 righe</a:t>
+            </a:r>
+            <a:endParaRPr lang="en-US" sz="2000" dirty="0"/>
+          </a:p>
+        </p:txBody>
+      </p:sp>
+      <p:sp>
+        <p:nvSpPr>
+          <p:cNvPr id="11" name="Text 9"/>
+          <p:cNvSpPr txBox="1"/>
+          <p:nvPr/>
+        </p:nvSpPr>
+        <p:spPr>
+          <a:xfrm>
+            <a:off x="6263640" y="1645920"/>
+            <a:ext cx="5349240" cy="457200"/>
+          </a:xfrm>
+          <a:prstGeom prst="rect">
+            <a:avLst/>
+          </a:prstGeom>
+          <a:noFill/>
+          <a:ln/>
+        </p:spPr>
+        <p:txBody>
+          <a:bodyPr wrap="square" lIns="0" tIns="0" rIns="0" bIns="0" rtlCol="0" anchor="ctr"/>
           <a:lstStyle/>
           <a:p>
             <a:pPr indent="0" marL="0">
               <a:buNone/>
             </a:pPr>
             <a:r>
-              <a:rPr lang="en-US" sz="1600" dirty="0">
+              <a:rPr lang="en-US" sz="2600" b="1" dirty="0">
+                <a:solidFill>
+                  <a:srgbClr val="0F4C5C"/>
+                </a:solidFill>
+              </a:rPr>
+              <a:t>Attributo</a:t>
+            </a:r>
+            <a:endParaRPr lang="en-US" sz="2600" dirty="0"/>
+          </a:p>
+        </p:txBody>
+      </p:sp>
+      <p:sp>
+        <p:nvSpPr>
+          <p:cNvPr id="12" name="Text 10"/>
+          <p:cNvSpPr txBox="1"/>
+          <p:nvPr/>
+        </p:nvSpPr>
+        <p:spPr>
+          <a:xfrm>
+            <a:off x="6263640" y="2103120"/>
+            <a:ext cx="5349240" cy="411480"/>
+          </a:xfrm>
+          <a:prstGeom prst="rect">
+            <a:avLst/>
+          </a:prstGeom>
+          <a:noFill/>
+          <a:ln/>
+        </p:spPr>
+        <p:txBody>
+          <a:bodyPr wrap="square" lIns="0" tIns="0" rIns="0" bIns="0" rtlCol="0" anchor="ctr"/>
+          <a:lstStyle/>
+          <a:p>
+            <a:pPr indent="0" marL="0">
+              <a:buNone/>
+            </a:pPr>
+            <a:r>
+              <a:rPr lang="en-US" sz="1800" dirty="0">
                 <a:solidFill>
                   <a:srgbClr val="5C6F7B"/>
                 </a:solidFill>
               </a:rPr>
-              <a:t>In Colab: l'elenco di tutto quello che puoi chiedere</a:t>
-            </a:r>
-            <a:endParaRPr lang="en-US" sz="1600" dirty="0"/>
-          </a:p>
-        </p:txBody>
-      </p:sp>
-      <p:sp>
-        <p:nvSpPr>
-          <p:cNvPr id="8" name="Shape 5"/>
+              <a:t>un'informazione: niente parentesi</a:t>
+            </a:r>
+            <a:endParaRPr lang="en-US" sz="1800" dirty="0"/>
+          </a:p>
+        </p:txBody>
+      </p:sp>
+      <p:sp>
+        <p:nvSpPr>
+          <p:cNvPr id="13" name="card-code"/>
           <p:cNvSpPr/>
           <p:nvPr/>
         </p:nvSpPr>
         <p:spPr>
           <a:xfrm>
-            <a:off x="4343400" y="1737360"/>
-            <a:ext cx="3474720" cy="3108960"/>
+            <a:off x="6263640" y="2697480"/>
+            <a:ext cx="5349240" cy="1188720"/>
           </a:xfrm>
           <a:prstGeom prst="roundRect">
             <a:avLst>
-              <a:gd name="adj" fmla="val 3529"/>
+              <a:gd name="adj" fmla="val 9231"/>
+            </a:avLst>
+          </a:prstGeom>
+          <a:solidFill>
+            <a:srgbClr val="1F2A30"/>
+          </a:solidFill>
+          <a:ln/>
+        </p:spPr>
+      </p:sp>
+      <p:sp>
+        <p:nvSpPr>
+          <p:cNvPr id="14" name="Text 12"/>
+          <p:cNvSpPr txBox="1"/>
+          <p:nvPr/>
+        </p:nvSpPr>
+        <p:spPr>
+          <a:xfrm>
+            <a:off x="6492240" y="2834640"/>
+            <a:ext cx="1828800" cy="274320"/>
+          </a:xfrm>
+          <a:prstGeom prst="rect">
+            <a:avLst/>
+          </a:prstGeom>
+          <a:noFill/>
+          <a:ln/>
+        </p:spPr>
+        <p:txBody>
+          <a:bodyPr wrap="square" lIns="0" tIns="0" rIns="0" bIns="0" rtlCol="0" anchor="ctr"/>
+          <a:lstStyle/>
+          <a:p>
+            <a:pPr indent="0" marL="0">
+              <a:buNone/>
+            </a:pPr>
+            <a:r>
+              <a:rPr lang="en-US" sz="1100" b="1" spc="200" kern="0" dirty="0">
+                <a:solidFill>
+                  <a:srgbClr val="E09F3E"/>
+                </a:solidFill>
+              </a:rPr>
+              <a:t>PYTHON</a:t>
+            </a:r>
+            <a:endParaRPr lang="en-US" sz="1100" dirty="0"/>
+          </a:p>
+        </p:txBody>
+      </p:sp>
+      <p:sp>
+        <p:nvSpPr>
+          <p:cNvPr id="15" name="Text 13"/>
+          <p:cNvSpPr txBox="1"/>
+          <p:nvPr/>
+        </p:nvSpPr>
+        <p:spPr>
+          <a:xfrm>
+            <a:off x="6492240" y="3154680"/>
+            <a:ext cx="4892040" cy="594360"/>
+          </a:xfrm>
+          <a:prstGeom prst="rect">
+            <a:avLst/>
+          </a:prstGeom>
+          <a:noFill/>
+          <a:ln/>
+        </p:spPr>
+        <p:txBody>
+          <a:bodyPr wrap="square" lIns="0" tIns="0" rIns="0" bIns="0" rtlCol="0" anchor="t"/>
+          <a:lstStyle/>
+          <a:p>
+            <a:pPr indent="0" marL="0">
+              <a:buNone/>
+            </a:pPr>
+            <a:r>
+              <a:rPr lang="en-US" sz="2200" dirty="0">
+                <a:solidFill>
+                  <a:srgbClr val="FFFFFF"/>
+                </a:solidFill>
+                <a:latin typeface="Courier New" pitchFamily="34" charset="0"/>
+                <a:ea typeface="Courier New" pitchFamily="34" charset="-122"/>
+                <a:cs typeface="Courier New" pitchFamily="34" charset="-120"/>
+              </a:rPr>
+              <a:t>df.shape</a:t>
+            </a:r>
+            <a:endParaRPr lang="en-US" sz="2200" dirty="0"/>
+          </a:p>
+        </p:txBody>
+      </p:sp>
+      <p:sp>
+        <p:nvSpPr>
+          <p:cNvPr id="16" name="card-out"/>
+          <p:cNvSpPr/>
+          <p:nvPr/>
+        </p:nvSpPr>
+        <p:spPr>
+          <a:xfrm>
+            <a:off x="6263640" y="4069080"/>
+            <a:ext cx="5349240" cy="1188720"/>
+          </a:xfrm>
+          <a:prstGeom prst="roundRect">
+            <a:avLst>
+              <a:gd name="adj" fmla="val 9231"/>
             </a:avLst>
           </a:prstGeom>
           <a:solidFill>
@@ -3152,58 +3536,14 @@
       </p:sp>
       <p:sp>
         <p:nvSpPr>
-          <p:cNvPr id="9" name="Shape 6"/>
-          <p:cNvSpPr/>
-          <p:nvPr/>
-        </p:nvSpPr>
-        <p:spPr>
-          <a:xfrm>
-            <a:off x="4663440" y="2057400"/>
-            <a:ext cx="914400" cy="914400"/>
-          </a:xfrm>
-          <a:prstGeom prst="ellipse">
-            <a:avLst/>
-          </a:prstGeom>
-          <a:solidFill>
-            <a:srgbClr val="FFFFFF"/>
-          </a:solidFill>
-          <a:ln/>
-        </p:spPr>
-      </p:sp>
-      <p:pic>
-        <p:nvPicPr>
-          <p:cNvPr id="10" name="Image 1" descr="preencoded.png">    </p:cNvPr>
-          <p:cNvPicPr>
-            <a:picLocks noChangeAspect="1"/>
-          </p:cNvPicPr>
-          <p:nvPr/>
-        </p:nvPicPr>
-        <p:blipFill>
-          <a:blip r:embed="rId2"/>
-          <a:stretch>
-            <a:fillRect/>
-          </a:stretch>
-        </p:blipFill>
-        <p:spPr>
-          <a:xfrm>
-            <a:off x="4910328" y="2304288"/>
-            <a:ext cx="420624" cy="420624"/>
-          </a:xfrm>
-          <a:prstGeom prst="rect">
-            <a:avLst/>
-          </a:prstGeom>
-        </p:spPr>
-      </p:pic>
-      <p:sp>
-        <p:nvSpPr>
-          <p:cNvPr id="11" name="Text 7"/>
-          <p:cNvSpPr txBox="1"/>
-          <p:nvPr/>
-        </p:nvSpPr>
-        <p:spPr>
-          <a:xfrm>
-            <a:off x="4663440" y="3200400"/>
-            <a:ext cx="2834640" cy="502920"/>
+          <p:cNvPr id="17" name="Text 15"/>
+          <p:cNvSpPr txBox="1"/>
+          <p:nvPr/>
+        </p:nvSpPr>
+        <p:spPr>
+          <a:xfrm>
+            <a:off x="6492240" y="4206240"/>
+            <a:ext cx="1828800" cy="274320"/>
           </a:xfrm>
           <a:prstGeom prst="rect">
             <a:avLst/>
@@ -3219,7 +3559,43 @@
               <a:buNone/>
             </a:pPr>
             <a:r>
-              <a:rPr lang="en-US" sz="2200" b="1" dirty="0">
+              <a:rPr lang="en-US" sz="1100" b="1" spc="200" kern="0" dirty="0">
+                <a:solidFill>
+                  <a:srgbClr val="5C6F7B"/>
+                </a:solidFill>
+              </a:rPr>
+              <a:t>OUTPUT</a:t>
+            </a:r>
+            <a:endParaRPr lang="en-US" sz="1100" dirty="0"/>
+          </a:p>
+        </p:txBody>
+      </p:sp>
+      <p:sp>
+        <p:nvSpPr>
+          <p:cNvPr id="18" name="Text 16"/>
+          <p:cNvSpPr txBox="1"/>
+          <p:nvPr/>
+        </p:nvSpPr>
+        <p:spPr>
+          <a:xfrm>
+            <a:off x="6492240" y="4526280"/>
+            <a:ext cx="4892040" cy="594360"/>
+          </a:xfrm>
+          <a:prstGeom prst="rect">
+            <a:avLst/>
+          </a:prstGeom>
+          <a:noFill/>
+          <a:ln/>
+        </p:spPr>
+        <p:txBody>
+          <a:bodyPr wrap="square" lIns="0" tIns="0" rIns="0" bIns="0" rtlCol="0" anchor="t"/>
+          <a:lstStyle/>
+          <a:p>
+            <a:pPr indent="0" marL="0">
+              <a:buNone/>
+            </a:pPr>
+            <a:r>
+              <a:rPr lang="en-US" sz="2000" dirty="0">
                 <a:solidFill>
                   <a:srgbClr val="1F2A30"/>
                 </a:solidFill>
@@ -3227,217 +3603,43 @@
                 <a:ea typeface="Courier New" pitchFamily="34" charset="-122"/>
                 <a:cs typeface="Courier New" pitchFamily="34" charset="-120"/>
               </a:rPr>
-              <a:t>help(df.head)</a:t>
-            </a:r>
-            <a:endParaRPr lang="en-US" sz="2200" dirty="0"/>
-          </a:p>
-        </p:txBody>
-      </p:sp>
-      <p:sp>
-        <p:nvSpPr>
-          <p:cNvPr id="12" name="Text 8"/>
-          <p:cNvSpPr txBox="1"/>
-          <p:nvPr/>
-        </p:nvSpPr>
-        <p:spPr>
-          <a:xfrm>
-            <a:off x="4663440" y="3749040"/>
-            <a:ext cx="2834640" cy="914400"/>
-          </a:xfrm>
-          <a:prstGeom prst="rect">
-            <a:avLst/>
-          </a:prstGeom>
-          <a:noFill/>
-          <a:ln/>
-        </p:spPr>
-        <p:txBody>
-          <a:bodyPr wrap="square" lIns="0" tIns="0" rIns="0" bIns="0" rtlCol="0" anchor="t"/>
+              <a:t>(2515, 9)</a:t>
+            </a:r>
+            <a:endParaRPr lang="en-US" sz="2000" dirty="0"/>
+          </a:p>
+        </p:txBody>
+      </p:sp>
+      <p:sp>
+        <p:nvSpPr>
+          <p:cNvPr id="19" name="Text 17"/>
+          <p:cNvSpPr txBox="1"/>
+          <p:nvPr/>
+        </p:nvSpPr>
+        <p:spPr>
+          <a:xfrm>
+            <a:off x="548640" y="5532120"/>
+            <a:ext cx="11064240" cy="457200"/>
+          </a:xfrm>
+          <a:prstGeom prst="rect">
+            <a:avLst/>
+          </a:prstGeom>
+          <a:noFill/>
+          <a:ln/>
+        </p:spPr>
+        <p:txBody>
+          <a:bodyPr wrap="square" lIns="0" tIns="0" rIns="0" bIns="0" rtlCol="0" anchor="ctr"/>
           <a:lstStyle/>
           <a:p>
             <a:pPr indent="0" marL="0">
               <a:buNone/>
             </a:pPr>
             <a:r>
-              <a:rPr lang="en-US" sz="1600" dirty="0">
-                <a:solidFill>
-                  <a:srgbClr val="5C6F7B"/>
-                </a:solidFill>
-              </a:rPr>
-              <a:t>La spiegazione di un metodo, con esempi</a:t>
-            </a:r>
-            <a:endParaRPr lang="en-US" sz="1600" dirty="0"/>
-          </a:p>
-        </p:txBody>
-      </p:sp>
-      <p:sp>
-        <p:nvSpPr>
-          <p:cNvPr id="13" name="Shape 9"/>
-          <p:cNvSpPr/>
-          <p:nvPr/>
-        </p:nvSpPr>
-        <p:spPr>
-          <a:xfrm>
-            <a:off x="8138160" y="1737360"/>
-            <a:ext cx="3474720" cy="3108960"/>
-          </a:xfrm>
-          <a:prstGeom prst="roundRect">
-            <a:avLst>
-              <a:gd name="adj" fmla="val 3529"/>
-            </a:avLst>
-          </a:prstGeom>
-          <a:solidFill>
-            <a:srgbClr val="EEF3F4"/>
-          </a:solidFill>
-          <a:ln/>
-        </p:spPr>
-      </p:sp>
-      <p:sp>
-        <p:nvSpPr>
-          <p:cNvPr id="14" name="Shape 10"/>
-          <p:cNvSpPr/>
-          <p:nvPr/>
-        </p:nvSpPr>
-        <p:spPr>
-          <a:xfrm>
-            <a:off x="8458200" y="2057400"/>
-            <a:ext cx="914400" cy="914400"/>
-          </a:xfrm>
-          <a:prstGeom prst="ellipse">
-            <a:avLst/>
-          </a:prstGeom>
-          <a:solidFill>
-            <a:srgbClr val="FFFFFF"/>
-          </a:solidFill>
-          <a:ln/>
-        </p:spPr>
-      </p:sp>
-      <p:pic>
-        <p:nvPicPr>
-          <p:cNvPr id="15" name="Image 2" descr="preencoded.png">    </p:cNvPr>
-          <p:cNvPicPr>
-            <a:picLocks noChangeAspect="1"/>
-          </p:cNvPicPr>
-          <p:nvPr/>
-        </p:nvPicPr>
-        <p:blipFill>
-          <a:blip r:embed="rId3"/>
-          <a:stretch>
-            <a:fillRect/>
-          </a:stretch>
-        </p:blipFill>
-        <p:spPr>
-          <a:xfrm>
-            <a:off x="8705088" y="2304288"/>
-            <a:ext cx="420624" cy="420624"/>
-          </a:xfrm>
-          <a:prstGeom prst="rect">
-            <a:avLst/>
-          </a:prstGeom>
-        </p:spPr>
-      </p:pic>
-      <p:sp>
-        <p:nvSpPr>
-          <p:cNvPr id="16" name="Text 11"/>
-          <p:cNvSpPr txBox="1"/>
-          <p:nvPr/>
-        </p:nvSpPr>
-        <p:spPr>
-          <a:xfrm>
-            <a:off x="8458200" y="3200400"/>
-            <a:ext cx="2834640" cy="502920"/>
-          </a:xfrm>
-          <a:prstGeom prst="rect">
-            <a:avLst/>
-          </a:prstGeom>
-          <a:noFill/>
-          <a:ln/>
-        </p:spPr>
-        <p:txBody>
-          <a:bodyPr wrap="square" lIns="0" tIns="0" rIns="0" bIns="0" rtlCol="0" anchor="ctr"/>
-          <a:lstStyle/>
-          <a:p>
-            <a:pPr indent="0" marL="0">
-              <a:buNone/>
-            </a:pPr>
-            <a:r>
-              <a:rPr lang="en-US" sz="2200" b="1" dirty="0">
-                <a:solidFill>
-                  <a:srgbClr val="1F2A30"/>
-                </a:solidFill>
-              </a:rPr>
-              <a:t>La documentazione</a:t>
-            </a:r>
-            <a:endParaRPr lang="en-US" sz="2200" dirty="0"/>
-          </a:p>
-        </p:txBody>
-      </p:sp>
-      <p:sp>
-        <p:nvSpPr>
-          <p:cNvPr id="17" name="Text 12"/>
-          <p:cNvSpPr txBox="1"/>
-          <p:nvPr/>
-        </p:nvSpPr>
-        <p:spPr>
-          <a:xfrm>
-            <a:off x="8458200" y="3749040"/>
-            <a:ext cx="2834640" cy="914400"/>
-          </a:xfrm>
-          <a:prstGeom prst="rect">
-            <a:avLst/>
-          </a:prstGeom>
-          <a:noFill/>
-          <a:ln/>
-        </p:spPr>
-        <p:txBody>
-          <a:bodyPr wrap="square" lIns="0" tIns="0" rIns="0" bIns="0" rtlCol="0" anchor="t"/>
-          <a:lstStyle/>
-          <a:p>
-            <a:pPr indent="0" marL="0">
-              <a:buNone/>
-            </a:pPr>
-            <a:r>
-              <a:rPr lang="en-US" sz="1600" dirty="0">
-                <a:solidFill>
-                  <a:srgbClr val="5C6F7B"/>
-                </a:solidFill>
-              </a:rPr>
-              <a:t>pandas.pydata.org → API reference → DataFrame</a:t>
-            </a:r>
-            <a:endParaRPr lang="en-US" sz="1600" dirty="0"/>
-          </a:p>
-        </p:txBody>
-      </p:sp>
-      <p:sp>
-        <p:nvSpPr>
-          <p:cNvPr id="18" name="Text 13"/>
-          <p:cNvSpPr txBox="1"/>
-          <p:nvPr/>
-        </p:nvSpPr>
-        <p:spPr>
-          <a:xfrm>
-            <a:off x="548640" y="5257800"/>
-            <a:ext cx="11064240" cy="457200"/>
-          </a:xfrm>
-          <a:prstGeom prst="rect">
-            <a:avLst/>
-          </a:prstGeom>
-          <a:noFill/>
-          <a:ln/>
-        </p:spPr>
-        <p:txBody>
-          <a:bodyPr wrap="square" lIns="0" tIns="0" rIns="0" bIns="0" rtlCol="0" anchor="ctr"/>
-          <a:lstStyle/>
-          <a:p>
-            <a:pPr indent="0" marL="0">
-              <a:buNone/>
-            </a:pPr>
-            <a:r>
               <a:rPr lang="en-US" sz="1800" i="1" dirty="0">
                 <a:solidFill>
                   <a:srgbClr val="0F4C5C"/>
                 </a:solidFill>
               </a:rPr>
-              <a:t>Nessuno conosce tutti i metodi. Si cercano, ogni giorno, anche dopo anni.</a:t>
+              <a:t>df è un oggetto: dati, più tutte le cose che puoi chiedergli. Il punto le collega.</a:t>
             </a:r>
             <a:endParaRPr lang="en-US" sz="1800" dirty="0"/>
           </a:p>
@@ -3545,7 +3747,7 @@
                   <a:srgbClr val="0F4C5C"/>
                 </a:solidFill>
               </a:rPr>
-              <a:t>Le domande da fare sempre a un dataset</a:t>
+              <a:t>Come scoprire cosa sa fare un oggetto</a:t>
             </a:r>
             <a:endParaRPr lang="en-US" sz="3600" dirty="0"/>
           </a:p>
@@ -3560,11 +3762,11 @@
         <p:spPr>
           <a:xfrm>
             <a:off x="548640" y="1737360"/>
-            <a:ext cx="5440680" cy="1645920"/>
+            <a:ext cx="3474720" cy="3108960"/>
           </a:xfrm>
           <a:prstGeom prst="roundRect">
             <a:avLst>
-              <a:gd name="adj" fmla="val 6667"/>
+              <a:gd name="adj" fmla="val 3529"/>
             </a:avLst>
           </a:prstGeom>
           <a:solidFill>
@@ -3581,8 +3783,8 @@
         </p:nvSpPr>
         <p:spPr>
           <a:xfrm>
-            <a:off x="822960" y="2194560"/>
-            <a:ext cx="731520" cy="731520"/>
+            <a:off x="868680" y="2057400"/>
+            <a:ext cx="914400" cy="914400"/>
           </a:xfrm>
           <a:prstGeom prst="ellipse">
             <a:avLst/>
@@ -3593,52 +3795,40 @@
           <a:ln/>
         </p:spPr>
       </p:sp>
-      <p:sp>
-        <p:nvSpPr>
-          <p:cNvPr id="5" name="Text 3"/>
-          <p:cNvSpPr txBox="1"/>
-          <p:nvPr/>
-        </p:nvSpPr>
-        <p:spPr>
-          <a:xfrm>
-            <a:off x="822960" y="2194560"/>
-            <a:ext cx="731520" cy="731520"/>
-          </a:xfrm>
-          <a:prstGeom prst="rect">
-            <a:avLst/>
-          </a:prstGeom>
-          <a:noFill/>
-          <a:ln/>
-        </p:spPr>
-        <p:txBody>
-          <a:bodyPr wrap="square" lIns="0" tIns="0" rIns="0" bIns="0" rtlCol="0" anchor="ctr"/>
-          <a:lstStyle/>
-          <a:p>
-            <a:pPr algn="ctr" indent="0" marL="0">
-              <a:buNone/>
-            </a:pPr>
-            <a:r>
-              <a:rPr lang="en-US" sz="2080" b="1" dirty="0">
-                <a:solidFill>
-                  <a:srgbClr val="0F4C5C"/>
-                </a:solidFill>
-              </a:rPr>
-              <a:t>1</a:t>
-            </a:r>
-            <a:endParaRPr lang="en-US" sz="2080" dirty="0"/>
-          </a:p>
-        </p:txBody>
-      </p:sp>
-      <p:sp>
-        <p:nvSpPr>
-          <p:cNvPr id="6" name="Text 4"/>
-          <p:cNvSpPr txBox="1"/>
-          <p:nvPr/>
-        </p:nvSpPr>
-        <p:spPr>
-          <a:xfrm>
-            <a:off x="1828800" y="2057400"/>
-            <a:ext cx="3931920" cy="502920"/>
+      <p:pic>
+        <p:nvPicPr>
+          <p:cNvPr id="5" name="Image 0" descr="preencoded.png">    </p:cNvPr>
+          <p:cNvPicPr>
+            <a:picLocks noChangeAspect="1"/>
+          </p:cNvPicPr>
+          <p:nvPr/>
+        </p:nvPicPr>
+        <p:blipFill>
+          <a:blip r:embed="rId1"/>
+          <a:stretch>
+            <a:fillRect/>
+          </a:stretch>
+        </p:blipFill>
+        <p:spPr>
+          <a:xfrm>
+            <a:off x="1115568" y="2304288"/>
+            <a:ext cx="420624" cy="420624"/>
+          </a:xfrm>
+          <a:prstGeom prst="rect">
+            <a:avLst/>
+          </a:prstGeom>
+        </p:spPr>
+      </p:pic>
+      <p:sp>
+        <p:nvSpPr>
+          <p:cNvPr id="6" name="Text 3"/>
+          <p:cNvSpPr txBox="1"/>
+          <p:nvPr/>
+        </p:nvSpPr>
+        <p:spPr>
+          <a:xfrm>
+            <a:off x="868680" y="3200400"/>
+            <a:ext cx="2834640" cy="502920"/>
           </a:xfrm>
           <a:prstGeom prst="rect">
             <a:avLst/>
@@ -3654,70 +3844,70 @@
               <a:buNone/>
             </a:pPr>
             <a:r>
-              <a:rPr lang="en-US" sz="2100" b="1" dirty="0">
+              <a:rPr lang="en-US" sz="2200" b="1" dirty="0">
                 <a:solidFill>
                   <a:srgbClr val="1F2A30"/>
-                </a:solidFill>
-              </a:rPr>
-              <a:t>Quanto è grande?</a:t>
-            </a:r>
-            <a:endParaRPr lang="en-US" sz="2100" dirty="0"/>
-          </a:p>
-        </p:txBody>
-      </p:sp>
-      <p:sp>
-        <p:nvSpPr>
-          <p:cNvPr id="7" name="Text 5"/>
-          <p:cNvSpPr txBox="1"/>
-          <p:nvPr/>
-        </p:nvSpPr>
-        <p:spPr>
-          <a:xfrm>
-            <a:off x="1828800" y="2606040"/>
-            <a:ext cx="3931920" cy="457200"/>
-          </a:xfrm>
-          <a:prstGeom prst="rect">
-            <a:avLst/>
-          </a:prstGeom>
-          <a:noFill/>
-          <a:ln/>
-        </p:spPr>
-        <p:txBody>
-          <a:bodyPr wrap="square" lIns="0" tIns="0" rIns="0" bIns="0" rtlCol="0" anchor="ctr"/>
-          <a:lstStyle/>
-          <a:p>
-            <a:pPr indent="0" marL="0">
-              <a:buNone/>
-            </a:pPr>
-            <a:r>
-              <a:rPr lang="en-US" sz="1700" dirty="0">
-                <a:solidFill>
-                  <a:srgbClr val="0F4C5C"/>
                 </a:solidFill>
                 <a:latin typeface="Courier New" pitchFamily="34" charset="0"/>
                 <a:ea typeface="Courier New" pitchFamily="34" charset="-122"/>
                 <a:cs typeface="Courier New" pitchFamily="34" charset="-120"/>
               </a:rPr>
-              <a:t>df.shape</a:t>
-            </a:r>
-            <a:endParaRPr lang="en-US" sz="1700" dirty="0"/>
-          </a:p>
-        </p:txBody>
-      </p:sp>
-      <p:sp>
-        <p:nvSpPr>
-          <p:cNvPr id="8" name="Shape 6"/>
+              <a:t>df. + Tab</a:t>
+            </a:r>
+            <a:endParaRPr lang="en-US" sz="2200" dirty="0"/>
+          </a:p>
+        </p:txBody>
+      </p:sp>
+      <p:sp>
+        <p:nvSpPr>
+          <p:cNvPr id="7" name="Text 4"/>
+          <p:cNvSpPr txBox="1"/>
+          <p:nvPr/>
+        </p:nvSpPr>
+        <p:spPr>
+          <a:xfrm>
+            <a:off x="868680" y="3749040"/>
+            <a:ext cx="2834640" cy="914400"/>
+          </a:xfrm>
+          <a:prstGeom prst="rect">
+            <a:avLst/>
+          </a:prstGeom>
+          <a:noFill/>
+          <a:ln/>
+        </p:spPr>
+        <p:txBody>
+          <a:bodyPr wrap="square" lIns="0" tIns="0" rIns="0" bIns="0" rtlCol="0" anchor="t"/>
+          <a:lstStyle/>
+          <a:p>
+            <a:pPr indent="0" marL="0">
+              <a:buNone/>
+            </a:pPr>
+            <a:r>
+              <a:rPr lang="en-US" sz="1600" dirty="0">
+                <a:solidFill>
+                  <a:srgbClr val="5C6F7B"/>
+                </a:solidFill>
+              </a:rPr>
+              <a:t>In Colab: l'elenco di tutto quello che puoi chiedere</a:t>
+            </a:r>
+            <a:endParaRPr lang="en-US" sz="1600" dirty="0"/>
+          </a:p>
+        </p:txBody>
+      </p:sp>
+      <p:sp>
+        <p:nvSpPr>
+          <p:cNvPr id="8" name="Shape 5"/>
           <p:cNvSpPr/>
           <p:nvPr/>
         </p:nvSpPr>
         <p:spPr>
           <a:xfrm>
-            <a:off x="6172200" y="1737360"/>
-            <a:ext cx="5440680" cy="1645920"/>
+            <a:off x="4343400" y="1737360"/>
+            <a:ext cx="3474720" cy="3108960"/>
           </a:xfrm>
           <a:prstGeom prst="roundRect">
             <a:avLst>
-              <a:gd name="adj" fmla="val 6667"/>
+              <a:gd name="adj" fmla="val 3529"/>
             </a:avLst>
           </a:prstGeom>
           <a:solidFill>
@@ -3728,14 +3918,14 @@
       </p:sp>
       <p:sp>
         <p:nvSpPr>
-          <p:cNvPr id="9" name="Shape 7"/>
+          <p:cNvPr id="9" name="Shape 6"/>
           <p:cNvSpPr/>
           <p:nvPr/>
         </p:nvSpPr>
         <p:spPr>
           <a:xfrm>
-            <a:off x="6446520" y="2194560"/>
-            <a:ext cx="731520" cy="731520"/>
+            <a:off x="4663440" y="2057400"/>
+            <a:ext cx="914400" cy="914400"/>
           </a:xfrm>
           <a:prstGeom prst="ellipse">
             <a:avLst/>
@@ -3746,52 +3936,40 @@
           <a:ln/>
         </p:spPr>
       </p:sp>
-      <p:sp>
-        <p:nvSpPr>
-          <p:cNvPr id="10" name="Text 8"/>
-          <p:cNvSpPr txBox="1"/>
-          <p:nvPr/>
-        </p:nvSpPr>
-        <p:spPr>
-          <a:xfrm>
-            <a:off x="6446520" y="2194560"/>
-            <a:ext cx="731520" cy="731520"/>
-          </a:xfrm>
-          <a:prstGeom prst="rect">
-            <a:avLst/>
-          </a:prstGeom>
-          <a:noFill/>
-          <a:ln/>
-        </p:spPr>
-        <p:txBody>
-          <a:bodyPr wrap="square" lIns="0" tIns="0" rIns="0" bIns="0" rtlCol="0" anchor="ctr"/>
-          <a:lstStyle/>
-          <a:p>
-            <a:pPr algn="ctr" indent="0" marL="0">
-              <a:buNone/>
-            </a:pPr>
-            <a:r>
-              <a:rPr lang="en-US" sz="2080" b="1" dirty="0">
-                <a:solidFill>
-                  <a:srgbClr val="0F4C5C"/>
-                </a:solidFill>
-              </a:rPr>
-              <a:t>2</a:t>
-            </a:r>
-            <a:endParaRPr lang="en-US" sz="2080" dirty="0"/>
-          </a:p>
-        </p:txBody>
-      </p:sp>
-      <p:sp>
-        <p:nvSpPr>
-          <p:cNvPr id="11" name="Text 9"/>
-          <p:cNvSpPr txBox="1"/>
-          <p:nvPr/>
-        </p:nvSpPr>
-        <p:spPr>
-          <a:xfrm>
-            <a:off x="7452360" y="2057400"/>
-            <a:ext cx="3931920" cy="502920"/>
+      <p:pic>
+        <p:nvPicPr>
+          <p:cNvPr id="10" name="Image 1" descr="preencoded.png">    </p:cNvPr>
+          <p:cNvPicPr>
+            <a:picLocks noChangeAspect="1"/>
+          </p:cNvPicPr>
+          <p:nvPr/>
+        </p:nvPicPr>
+        <p:blipFill>
+          <a:blip r:embed="rId2"/>
+          <a:stretch>
+            <a:fillRect/>
+          </a:stretch>
+        </p:blipFill>
+        <p:spPr>
+          <a:xfrm>
+            <a:off x="4910328" y="2304288"/>
+            <a:ext cx="420624" cy="420624"/>
+          </a:xfrm>
+          <a:prstGeom prst="rect">
+            <a:avLst/>
+          </a:prstGeom>
+        </p:spPr>
+      </p:pic>
+      <p:sp>
+        <p:nvSpPr>
+          <p:cNvPr id="11" name="Text 7"/>
+          <p:cNvSpPr txBox="1"/>
+          <p:nvPr/>
+        </p:nvSpPr>
+        <p:spPr>
+          <a:xfrm>
+            <a:off x="4663440" y="3200400"/>
+            <a:ext cx="2834640" cy="502920"/>
           </a:xfrm>
           <a:prstGeom prst="rect">
             <a:avLst/>
@@ -3807,70 +3985,70 @@
               <a:buNone/>
             </a:pPr>
             <a:r>
-              <a:rPr lang="en-US" sz="2100" b="1" dirty="0">
+              <a:rPr lang="en-US" sz="2200" b="1" dirty="0">
                 <a:solidFill>
                   <a:srgbClr val="1F2A30"/>
-                </a:solidFill>
-              </a:rPr>
-              <a:t>Di che tipo sono le colonne?</a:t>
-            </a:r>
-            <a:endParaRPr lang="en-US" sz="2100" dirty="0"/>
-          </a:p>
-        </p:txBody>
-      </p:sp>
-      <p:sp>
-        <p:nvSpPr>
-          <p:cNvPr id="12" name="Text 10"/>
-          <p:cNvSpPr txBox="1"/>
-          <p:nvPr/>
-        </p:nvSpPr>
-        <p:spPr>
-          <a:xfrm>
-            <a:off x="7452360" y="2606040"/>
-            <a:ext cx="3931920" cy="457200"/>
-          </a:xfrm>
-          <a:prstGeom prst="rect">
-            <a:avLst/>
-          </a:prstGeom>
-          <a:noFill/>
-          <a:ln/>
-        </p:spPr>
-        <p:txBody>
-          <a:bodyPr wrap="square" lIns="0" tIns="0" rIns="0" bIns="0" rtlCol="0" anchor="ctr"/>
-          <a:lstStyle/>
-          <a:p>
-            <a:pPr indent="0" marL="0">
-              <a:buNone/>
-            </a:pPr>
-            <a:r>
-              <a:rPr lang="en-US" sz="1700" dirty="0">
-                <a:solidFill>
-                  <a:srgbClr val="0F4C5C"/>
                 </a:solidFill>
                 <a:latin typeface="Courier New" pitchFamily="34" charset="0"/>
                 <a:ea typeface="Courier New" pitchFamily="34" charset="-122"/>
                 <a:cs typeface="Courier New" pitchFamily="34" charset="-120"/>
               </a:rPr>
-              <a:t>df.dtypes</a:t>
-            </a:r>
-            <a:endParaRPr lang="en-US" sz="1700" dirty="0"/>
-          </a:p>
-        </p:txBody>
-      </p:sp>
-      <p:sp>
-        <p:nvSpPr>
-          <p:cNvPr id="13" name="Shape 11"/>
+              <a:t>help(df.head)</a:t>
+            </a:r>
+            <a:endParaRPr lang="en-US" sz="2200" dirty="0"/>
+          </a:p>
+        </p:txBody>
+      </p:sp>
+      <p:sp>
+        <p:nvSpPr>
+          <p:cNvPr id="12" name="Text 8"/>
+          <p:cNvSpPr txBox="1"/>
+          <p:nvPr/>
+        </p:nvSpPr>
+        <p:spPr>
+          <a:xfrm>
+            <a:off x="4663440" y="3749040"/>
+            <a:ext cx="2834640" cy="914400"/>
+          </a:xfrm>
+          <a:prstGeom prst="rect">
+            <a:avLst/>
+          </a:prstGeom>
+          <a:noFill/>
+          <a:ln/>
+        </p:spPr>
+        <p:txBody>
+          <a:bodyPr wrap="square" lIns="0" tIns="0" rIns="0" bIns="0" rtlCol="0" anchor="t"/>
+          <a:lstStyle/>
+          <a:p>
+            <a:pPr indent="0" marL="0">
+              <a:buNone/>
+            </a:pPr>
+            <a:r>
+              <a:rPr lang="en-US" sz="1600" dirty="0">
+                <a:solidFill>
+                  <a:srgbClr val="5C6F7B"/>
+                </a:solidFill>
+              </a:rPr>
+              <a:t>La spiegazione di un metodo, con esempi</a:t>
+            </a:r>
+            <a:endParaRPr lang="en-US" sz="1600" dirty="0"/>
+          </a:p>
+        </p:txBody>
+      </p:sp>
+      <p:sp>
+        <p:nvSpPr>
+          <p:cNvPr id="13" name="Shape 9"/>
           <p:cNvSpPr/>
           <p:nvPr/>
         </p:nvSpPr>
         <p:spPr>
           <a:xfrm>
-            <a:off x="548640" y="3657600"/>
-            <a:ext cx="5440680" cy="1645920"/>
+            <a:off x="8138160" y="1737360"/>
+            <a:ext cx="3474720" cy="3108960"/>
           </a:xfrm>
           <a:prstGeom prst="roundRect">
             <a:avLst>
-              <a:gd name="adj" fmla="val 6667"/>
+              <a:gd name="adj" fmla="val 3529"/>
             </a:avLst>
           </a:prstGeom>
           <a:solidFill>
@@ -3881,14 +4059,14 @@
       </p:sp>
       <p:sp>
         <p:nvSpPr>
-          <p:cNvPr id="14" name="Shape 12"/>
+          <p:cNvPr id="14" name="Shape 10"/>
           <p:cNvSpPr/>
           <p:nvPr/>
         </p:nvSpPr>
         <p:spPr>
           <a:xfrm>
-            <a:off x="822960" y="4114800"/>
-            <a:ext cx="731520" cy="731520"/>
+            <a:off x="8458200" y="2057400"/>
+            <a:ext cx="914400" cy="914400"/>
           </a:xfrm>
           <a:prstGeom prst="ellipse">
             <a:avLst/>
@@ -3899,301 +4077,133 @@
           <a:ln/>
         </p:spPr>
       </p:sp>
-      <p:sp>
-        <p:nvSpPr>
-          <p:cNvPr id="15" name="Text 13"/>
-          <p:cNvSpPr txBox="1"/>
-          <p:nvPr/>
-        </p:nvSpPr>
-        <p:spPr>
-          <a:xfrm>
-            <a:off x="822960" y="4114800"/>
-            <a:ext cx="731520" cy="731520"/>
-          </a:xfrm>
-          <a:prstGeom prst="rect">
-            <a:avLst/>
-          </a:prstGeom>
-          <a:noFill/>
-          <a:ln/>
-        </p:spPr>
-        <p:txBody>
-          <a:bodyPr wrap="square" lIns="0" tIns="0" rIns="0" bIns="0" rtlCol="0" anchor="ctr"/>
-          <a:lstStyle/>
-          <a:p>
-            <a:pPr algn="ctr" indent="0" marL="0">
-              <a:buNone/>
-            </a:pPr>
-            <a:r>
-              <a:rPr lang="en-US" sz="2080" b="1" dirty="0">
+      <p:pic>
+        <p:nvPicPr>
+          <p:cNvPr id="15" name="Image 2" descr="preencoded.png">    </p:cNvPr>
+          <p:cNvPicPr>
+            <a:picLocks noChangeAspect="1"/>
+          </p:cNvPicPr>
+          <p:nvPr/>
+        </p:nvPicPr>
+        <p:blipFill>
+          <a:blip r:embed="rId3"/>
+          <a:stretch>
+            <a:fillRect/>
+          </a:stretch>
+        </p:blipFill>
+        <p:spPr>
+          <a:xfrm>
+            <a:off x="8705088" y="2304288"/>
+            <a:ext cx="420624" cy="420624"/>
+          </a:xfrm>
+          <a:prstGeom prst="rect">
+            <a:avLst/>
+          </a:prstGeom>
+        </p:spPr>
+      </p:pic>
+      <p:sp>
+        <p:nvSpPr>
+          <p:cNvPr id="16" name="Text 11"/>
+          <p:cNvSpPr txBox="1"/>
+          <p:nvPr/>
+        </p:nvSpPr>
+        <p:spPr>
+          <a:xfrm>
+            <a:off x="8458200" y="3200400"/>
+            <a:ext cx="2834640" cy="502920"/>
+          </a:xfrm>
+          <a:prstGeom prst="rect">
+            <a:avLst/>
+          </a:prstGeom>
+          <a:noFill/>
+          <a:ln/>
+        </p:spPr>
+        <p:txBody>
+          <a:bodyPr wrap="square" lIns="0" tIns="0" rIns="0" bIns="0" rtlCol="0" anchor="ctr"/>
+          <a:lstStyle/>
+          <a:p>
+            <a:pPr indent="0" marL="0">
+              <a:buNone/>
+            </a:pPr>
+            <a:r>
+              <a:rPr lang="en-US" sz="2200" b="1" dirty="0">
+                <a:solidFill>
+                  <a:srgbClr val="1F2A30"/>
+                </a:solidFill>
+              </a:rPr>
+              <a:t>La documentazione</a:t>
+            </a:r>
+            <a:endParaRPr lang="en-US" sz="2200" dirty="0"/>
+          </a:p>
+        </p:txBody>
+      </p:sp>
+      <p:sp>
+        <p:nvSpPr>
+          <p:cNvPr id="17" name="Text 12"/>
+          <p:cNvSpPr txBox="1"/>
+          <p:nvPr/>
+        </p:nvSpPr>
+        <p:spPr>
+          <a:xfrm>
+            <a:off x="8458200" y="3749040"/>
+            <a:ext cx="2834640" cy="914400"/>
+          </a:xfrm>
+          <a:prstGeom prst="rect">
+            <a:avLst/>
+          </a:prstGeom>
+          <a:noFill/>
+          <a:ln/>
+        </p:spPr>
+        <p:txBody>
+          <a:bodyPr wrap="square" lIns="0" tIns="0" rIns="0" bIns="0" rtlCol="0" anchor="t"/>
+          <a:lstStyle/>
+          <a:p>
+            <a:pPr indent="0" marL="0">
+              <a:buNone/>
+            </a:pPr>
+            <a:r>
+              <a:rPr lang="en-US" sz="1600" dirty="0">
+                <a:solidFill>
+                  <a:srgbClr val="5C6F7B"/>
+                </a:solidFill>
+              </a:rPr>
+              <a:t>pandas.pydata.org → API reference → DataFrame</a:t>
+            </a:r>
+            <a:endParaRPr lang="en-US" sz="1600" dirty="0"/>
+          </a:p>
+        </p:txBody>
+      </p:sp>
+      <p:sp>
+        <p:nvSpPr>
+          <p:cNvPr id="18" name="Text 13"/>
+          <p:cNvSpPr txBox="1"/>
+          <p:nvPr/>
+        </p:nvSpPr>
+        <p:spPr>
+          <a:xfrm>
+            <a:off x="548640" y="5257800"/>
+            <a:ext cx="11064240" cy="457200"/>
+          </a:xfrm>
+          <a:prstGeom prst="rect">
+            <a:avLst/>
+          </a:prstGeom>
+          <a:noFill/>
+          <a:ln/>
+        </p:spPr>
+        <p:txBody>
+          <a:bodyPr wrap="square" lIns="0" tIns="0" rIns="0" bIns="0" rtlCol="0" anchor="ctr"/>
+          <a:lstStyle/>
+          <a:p>
+            <a:pPr indent="0" marL="0">
+              <a:buNone/>
+            </a:pPr>
+            <a:r>
+              <a:rPr lang="en-US" sz="1800" i="1" dirty="0">
                 <a:solidFill>
                   <a:srgbClr val="0F4C5C"/>
                 </a:solidFill>
               </a:rPr>
-              <a:t>3</a:t>
-            </a:r>
-            <a:endParaRPr lang="en-US" sz="2080" dirty="0"/>
-          </a:p>
-        </p:txBody>
-      </p:sp>
-      <p:sp>
-        <p:nvSpPr>
-          <p:cNvPr id="16" name="Text 14"/>
-          <p:cNvSpPr txBox="1"/>
-          <p:nvPr/>
-        </p:nvSpPr>
-        <p:spPr>
-          <a:xfrm>
-            <a:off x="1828800" y="3977640"/>
-            <a:ext cx="3931920" cy="502920"/>
-          </a:xfrm>
-          <a:prstGeom prst="rect">
-            <a:avLst/>
-          </a:prstGeom>
-          <a:noFill/>
-          <a:ln/>
-        </p:spPr>
-        <p:txBody>
-          <a:bodyPr wrap="square" lIns="0" tIns="0" rIns="0" bIns="0" rtlCol="0" anchor="ctr"/>
-          <a:lstStyle/>
-          <a:p>
-            <a:pPr indent="0" marL="0">
-              <a:buNone/>
-            </a:pPr>
-            <a:r>
-              <a:rPr lang="en-US" sz="2100" b="1" dirty="0">
-                <a:solidFill>
-                  <a:srgbClr val="1F2A30"/>
-                </a:solidFill>
-              </a:rPr>
-              <a:t>Quanti valori diversi?</a:t>
-            </a:r>
-            <a:endParaRPr lang="en-US" sz="2100" dirty="0"/>
-          </a:p>
-        </p:txBody>
-      </p:sp>
-      <p:sp>
-        <p:nvSpPr>
-          <p:cNvPr id="17" name="Text 15"/>
-          <p:cNvSpPr txBox="1"/>
-          <p:nvPr/>
-        </p:nvSpPr>
-        <p:spPr>
-          <a:xfrm>
-            <a:off x="1828800" y="4526280"/>
-            <a:ext cx="3931920" cy="457200"/>
-          </a:xfrm>
-          <a:prstGeom prst="rect">
-            <a:avLst/>
-          </a:prstGeom>
-          <a:noFill/>
-          <a:ln/>
-        </p:spPr>
-        <p:txBody>
-          <a:bodyPr wrap="square" lIns="0" tIns="0" rIns="0" bIns="0" rtlCol="0" anchor="ctr"/>
-          <a:lstStyle/>
-          <a:p>
-            <a:pPr indent="0" marL="0">
-              <a:buNone/>
-            </a:pPr>
-            <a:r>
-              <a:rPr lang="en-US" sz="1700" dirty="0">
-                <a:solidFill>
-                  <a:srgbClr val="0F4C5C"/>
-                </a:solidFill>
-                <a:latin typeface="Courier New" pitchFamily="34" charset="0"/>
-                <a:ea typeface="Courier New" pitchFamily="34" charset="-122"/>
-                <a:cs typeface="Courier New" pitchFamily="34" charset="-120"/>
-              </a:rPr>
-              <a:t>df["col"].nunique()</a:t>
-            </a:r>
-            <a:endParaRPr lang="en-US" sz="1700" dirty="0"/>
-          </a:p>
-        </p:txBody>
-      </p:sp>
-      <p:sp>
-        <p:nvSpPr>
-          <p:cNvPr id="18" name="Shape 16"/>
-          <p:cNvSpPr/>
-          <p:nvPr/>
-        </p:nvSpPr>
-        <p:spPr>
-          <a:xfrm>
-            <a:off x="6172200" y="3657600"/>
-            <a:ext cx="5440680" cy="1645920"/>
-          </a:xfrm>
-          <a:prstGeom prst="roundRect">
-            <a:avLst>
-              <a:gd name="adj" fmla="val 6667"/>
-            </a:avLst>
-          </a:prstGeom>
-          <a:solidFill>
-            <a:srgbClr val="EEF3F4"/>
-          </a:solidFill>
-          <a:ln/>
-        </p:spPr>
-      </p:sp>
-      <p:sp>
-        <p:nvSpPr>
-          <p:cNvPr id="19" name="Shape 17"/>
-          <p:cNvSpPr/>
-          <p:nvPr/>
-        </p:nvSpPr>
-        <p:spPr>
-          <a:xfrm>
-            <a:off x="6446520" y="4114800"/>
-            <a:ext cx="731520" cy="731520"/>
-          </a:xfrm>
-          <a:prstGeom prst="ellipse">
-            <a:avLst/>
-          </a:prstGeom>
-          <a:solidFill>
-            <a:srgbClr val="FFFFFF"/>
-          </a:solidFill>
-          <a:ln/>
-        </p:spPr>
-      </p:sp>
-      <p:sp>
-        <p:nvSpPr>
-          <p:cNvPr id="20" name="Text 18"/>
-          <p:cNvSpPr txBox="1"/>
-          <p:nvPr/>
-        </p:nvSpPr>
-        <p:spPr>
-          <a:xfrm>
-            <a:off x="6446520" y="4114800"/>
-            <a:ext cx="731520" cy="731520"/>
-          </a:xfrm>
-          <a:prstGeom prst="rect">
-            <a:avLst/>
-          </a:prstGeom>
-          <a:noFill/>
-          <a:ln/>
-        </p:spPr>
-        <p:txBody>
-          <a:bodyPr wrap="square" lIns="0" tIns="0" rIns="0" bIns="0" rtlCol="0" anchor="ctr"/>
-          <a:lstStyle/>
-          <a:p>
-            <a:pPr algn="ctr" indent="0" marL="0">
-              <a:buNone/>
-            </a:pPr>
-            <a:r>
-              <a:rPr lang="en-US" sz="2080" b="1" dirty="0">
-                <a:solidFill>
-                  <a:srgbClr val="0F4C5C"/>
-                </a:solidFill>
-              </a:rPr>
-              <a:t>4</a:t>
-            </a:r>
-            <a:endParaRPr lang="en-US" sz="2080" dirty="0"/>
-          </a:p>
-        </p:txBody>
-      </p:sp>
-      <p:sp>
-        <p:nvSpPr>
-          <p:cNvPr id="21" name="Text 19"/>
-          <p:cNvSpPr txBox="1"/>
-          <p:nvPr/>
-        </p:nvSpPr>
-        <p:spPr>
-          <a:xfrm>
-            <a:off x="7452360" y="3977640"/>
-            <a:ext cx="3931920" cy="502920"/>
-          </a:xfrm>
-          <a:prstGeom prst="rect">
-            <a:avLst/>
-          </a:prstGeom>
-          <a:noFill/>
-          <a:ln/>
-        </p:spPr>
-        <p:txBody>
-          <a:bodyPr wrap="square" lIns="0" tIns="0" rIns="0" bIns="0" rtlCol="0" anchor="ctr"/>
-          <a:lstStyle/>
-          <a:p>
-            <a:pPr indent="0" marL="0">
-              <a:buNone/>
-            </a:pPr>
-            <a:r>
-              <a:rPr lang="en-US" sz="2100" b="1" dirty="0">
-                <a:solidFill>
-                  <a:srgbClr val="1F2A30"/>
-                </a:solidFill>
-              </a:rPr>
-              <a:t>Quali valori, e quante volte?</a:t>
-            </a:r>
-            <a:endParaRPr lang="en-US" sz="2100" dirty="0"/>
-          </a:p>
-        </p:txBody>
-      </p:sp>
-      <p:sp>
-        <p:nvSpPr>
-          <p:cNvPr id="22" name="Text 20"/>
-          <p:cNvSpPr txBox="1"/>
-          <p:nvPr/>
-        </p:nvSpPr>
-        <p:spPr>
-          <a:xfrm>
-            <a:off x="7452360" y="4526280"/>
-            <a:ext cx="3931920" cy="457200"/>
-          </a:xfrm>
-          <a:prstGeom prst="rect">
-            <a:avLst/>
-          </a:prstGeom>
-          <a:noFill/>
-          <a:ln/>
-        </p:spPr>
-        <p:txBody>
-          <a:bodyPr wrap="square" lIns="0" tIns="0" rIns="0" bIns="0" rtlCol="0" anchor="ctr"/>
-          <a:lstStyle/>
-          <a:p>
-            <a:pPr indent="0" marL="0">
-              <a:buNone/>
-            </a:pPr>
-            <a:r>
-              <a:rPr lang="en-US" sz="1700" dirty="0">
-                <a:solidFill>
-                  <a:srgbClr val="0F4C5C"/>
-                </a:solidFill>
-                <a:latin typeface="Courier New" pitchFamily="34" charset="0"/>
-                <a:ea typeface="Courier New" pitchFamily="34" charset="-122"/>
-                <a:cs typeface="Courier New" pitchFamily="34" charset="-120"/>
-              </a:rPr>
-              <a:t>df["col"].value_counts()</a:t>
-            </a:r>
-            <a:endParaRPr lang="en-US" sz="1700" dirty="0"/>
-          </a:p>
-        </p:txBody>
-      </p:sp>
-      <p:sp>
-        <p:nvSpPr>
-          <p:cNvPr id="23" name="Text 21"/>
-          <p:cNvSpPr txBox="1"/>
-          <p:nvPr/>
-        </p:nvSpPr>
-        <p:spPr>
-          <a:xfrm>
-            <a:off x="548640" y="5623560"/>
-            <a:ext cx="11064240" cy="457200"/>
-          </a:xfrm>
-          <a:prstGeom prst="rect">
-            <a:avLst/>
-          </a:prstGeom>
-          <a:noFill/>
-          <a:ln/>
-        </p:spPr>
-        <p:txBody>
-          <a:bodyPr wrap="square" lIns="0" tIns="0" rIns="0" bIns="0" rtlCol="0" anchor="ctr"/>
-          <a:lstStyle/>
-          <a:p>
-            <a:pPr indent="0" marL="0">
-              <a:buNone/>
-            </a:pPr>
-            <a:r>
-              <a:rPr lang="en-US" sz="1800" i="1" dirty="0">
-                <a:solidFill>
-                  <a:srgbClr val="0F4C5C"/>
-                </a:solidFill>
-              </a:rPr>
-              <a:t>Prima di qualunque analisi. Sempre.</a:t>
+              <a:t>Nessuno conosce tutti i metodi. Si cercano, ogni giorno, anche dopo anni.</a:t>
             </a:r>
             <a:endParaRPr lang="en-US" sz="1800" dirty="0"/>
           </a:p>
@@ -4279,83 +4289,724 @@
         </p:nvSpPr>
         <p:spPr>
           <a:xfrm>
-            <a:off x="731520" y="2194560"/>
-            <a:ext cx="10698480" cy="1280160"/>
-          </a:xfrm>
-          <a:prstGeom prst="rect">
-            <a:avLst/>
-          </a:prstGeom>
-          <a:noFill/>
-          <a:ln/>
-        </p:spPr>
-        <p:txBody>
-          <a:bodyPr wrap="square" lIns="0" tIns="0" rIns="0" bIns="0" rtlCol="0" anchor="b"/>
+            <a:off x="548640" y="365760"/>
+            <a:ext cx="11064240" cy="822960"/>
+          </a:xfrm>
+          <a:prstGeom prst="rect">
+            <a:avLst/>
+          </a:prstGeom>
+          <a:noFill/>
+          <a:ln/>
+        </p:spPr>
+        <p:txBody>
+          <a:bodyPr wrap="square" lIns="0" tIns="0" rIns="0" bIns="0" rtlCol="0" anchor="ctr"/>
           <a:lstStyle/>
           <a:p>
             <a:pPr algn="l" indent="0" marL="0">
               <a:buNone/>
             </a:pPr>
             <a:r>
-              <a:rPr lang="en-US" sz="5400" b="1" dirty="0">
-                <a:solidFill>
-                  <a:srgbClr val="FFFFFF"/>
-                </a:solidFill>
-              </a:rPr>
-              <a:t>Task: conosci il tuo dataset</a:t>
-            </a:r>
-            <a:endParaRPr lang="en-US" sz="5400" dirty="0"/>
-          </a:p>
-        </p:txBody>
-      </p:sp>
-      <p:sp>
-        <p:nvSpPr>
-          <p:cNvPr id="3" name="Text 0"/>
+              <a:rPr lang="en-US" sz="3600" b="1" dirty="0">
+                <a:solidFill>
+                  <a:srgbClr val="0F4C5C"/>
+                </a:solidFill>
+              </a:rPr>
+              <a:t>Le domande da fare sempre a un dataset</a:t>
+            </a:r>
+            <a:endParaRPr lang="en-US" sz="3600" dirty="0"/>
+          </a:p>
+        </p:txBody>
+      </p:sp>
+      <p:sp>
+        <p:nvSpPr>
+          <p:cNvPr id="3" name="Shape 1"/>
           <p:cNvSpPr/>
+          <p:nvPr/>
+        </p:nvSpPr>
+        <p:spPr>
+          <a:xfrm>
+            <a:off x="548640" y="1737360"/>
+            <a:ext cx="5440680" cy="1645920"/>
+          </a:xfrm>
+          <a:prstGeom prst="roundRect">
+            <a:avLst>
+              <a:gd name="adj" fmla="val 6667"/>
+            </a:avLst>
+          </a:prstGeom>
+          <a:solidFill>
+            <a:srgbClr val="EEF3F4"/>
+          </a:solidFill>
+          <a:ln/>
+        </p:spPr>
+      </p:sp>
+      <p:sp>
+        <p:nvSpPr>
+          <p:cNvPr id="4" name="Shape 2"/>
+          <p:cNvSpPr/>
+          <p:nvPr/>
+        </p:nvSpPr>
+        <p:spPr>
+          <a:xfrm>
+            <a:off x="822960" y="2194560"/>
+            <a:ext cx="731520" cy="731520"/>
+          </a:xfrm>
+          <a:prstGeom prst="ellipse">
+            <a:avLst/>
+          </a:prstGeom>
+          <a:solidFill>
+            <a:srgbClr val="FFFFFF"/>
+          </a:solidFill>
+          <a:ln/>
+        </p:spPr>
+      </p:sp>
+      <p:sp>
+        <p:nvSpPr>
+          <p:cNvPr id="5" name="Text 3"/>
+          <p:cNvSpPr txBox="1"/>
+          <p:nvPr/>
+        </p:nvSpPr>
+        <p:spPr>
+          <a:xfrm>
+            <a:off x="822960" y="2194560"/>
+            <a:ext cx="731520" cy="731520"/>
+          </a:xfrm>
+          <a:prstGeom prst="rect">
+            <a:avLst/>
+          </a:prstGeom>
+          <a:noFill/>
+          <a:ln/>
+        </p:spPr>
+        <p:txBody>
+          <a:bodyPr wrap="square" lIns="0" tIns="0" rIns="0" bIns="0" rtlCol="0" anchor="ctr"/>
+          <a:lstStyle/>
+          <a:p>
+            <a:pPr algn="ctr" indent="0" marL="0">
+              <a:buNone/>
+            </a:pPr>
+            <a:r>
+              <a:rPr lang="en-US" sz="2080" b="1" dirty="0">
+                <a:solidFill>
+                  <a:srgbClr val="0F4C5C"/>
+                </a:solidFill>
+              </a:rPr>
+              <a:t>1</a:t>
+            </a:r>
+            <a:endParaRPr lang="en-US" sz="2080" dirty="0"/>
+          </a:p>
+        </p:txBody>
+      </p:sp>
+      <p:sp>
+        <p:nvSpPr>
+          <p:cNvPr id="6" name="Text 4"/>
+          <p:cNvSpPr txBox="1"/>
+          <p:nvPr/>
+        </p:nvSpPr>
+        <p:spPr>
+          <a:xfrm>
+            <a:off x="1828800" y="2057400"/>
+            <a:ext cx="3931920" cy="502920"/>
+          </a:xfrm>
+          <a:prstGeom prst="rect">
+            <a:avLst/>
+          </a:prstGeom>
+          <a:noFill/>
+          <a:ln/>
+        </p:spPr>
+        <p:txBody>
+          <a:bodyPr wrap="square" lIns="0" tIns="0" rIns="0" bIns="0" rtlCol="0" anchor="ctr"/>
+          <a:lstStyle/>
+          <a:p>
+            <a:pPr indent="0" marL="0">
+              <a:buNone/>
+            </a:pPr>
+            <a:r>
+              <a:rPr lang="en-US" sz="2100" b="1" dirty="0">
+                <a:solidFill>
+                  <a:srgbClr val="1F2A30"/>
+                </a:solidFill>
+              </a:rPr>
+              <a:t>Quanto è grande?</a:t>
+            </a:r>
+            <a:endParaRPr lang="en-US" sz="2100" dirty="0"/>
+          </a:p>
+        </p:txBody>
+      </p:sp>
+      <p:sp>
+        <p:nvSpPr>
+          <p:cNvPr id="7" name="Text 5"/>
+          <p:cNvSpPr txBox="1"/>
+          <p:nvPr/>
+        </p:nvSpPr>
+        <p:spPr>
+          <a:xfrm>
+            <a:off x="1828800" y="2606040"/>
+            <a:ext cx="3931920" cy="457200"/>
+          </a:xfrm>
+          <a:prstGeom prst="rect">
+            <a:avLst/>
+          </a:prstGeom>
+          <a:noFill/>
+          <a:ln/>
+        </p:spPr>
+        <p:txBody>
+          <a:bodyPr wrap="square" lIns="0" tIns="0" rIns="0" bIns="0" rtlCol="0" anchor="ctr"/>
+          <a:lstStyle/>
+          <a:p>
+            <a:pPr indent="0" marL="0">
+              <a:buNone/>
+            </a:pPr>
+            <a:r>
+              <a:rPr lang="en-US" sz="1700" dirty="0">
+                <a:solidFill>
+                  <a:srgbClr val="0F4C5C"/>
+                </a:solidFill>
+                <a:latin typeface="Courier New" pitchFamily="34" charset="0"/>
+                <a:ea typeface="Courier New" pitchFamily="34" charset="-122"/>
+                <a:cs typeface="Courier New" pitchFamily="34" charset="-120"/>
+              </a:rPr>
+              <a:t>df.shape</a:t>
+            </a:r>
+            <a:endParaRPr lang="en-US" sz="1700" dirty="0"/>
+          </a:p>
+        </p:txBody>
+      </p:sp>
+      <p:sp>
+        <p:nvSpPr>
+          <p:cNvPr id="8" name="Shape 6"/>
+          <p:cNvSpPr/>
+          <p:nvPr/>
+        </p:nvSpPr>
+        <p:spPr>
+          <a:xfrm>
+            <a:off x="6172200" y="1737360"/>
+            <a:ext cx="5440680" cy="1645920"/>
+          </a:xfrm>
+          <a:prstGeom prst="roundRect">
+            <a:avLst>
+              <a:gd name="adj" fmla="val 6667"/>
+            </a:avLst>
+          </a:prstGeom>
+          <a:solidFill>
+            <a:srgbClr val="EEF3F4"/>
+          </a:solidFill>
+          <a:ln/>
+        </p:spPr>
+      </p:sp>
+      <p:sp>
+        <p:nvSpPr>
+          <p:cNvPr id="9" name="Shape 7"/>
+          <p:cNvSpPr/>
+          <p:nvPr/>
+        </p:nvSpPr>
+        <p:spPr>
+          <a:xfrm>
+            <a:off x="6446520" y="2194560"/>
+            <a:ext cx="731520" cy="731520"/>
+          </a:xfrm>
+          <a:prstGeom prst="ellipse">
+            <a:avLst/>
+          </a:prstGeom>
+          <a:solidFill>
+            <a:srgbClr val="FFFFFF"/>
+          </a:solidFill>
+          <a:ln/>
+        </p:spPr>
+      </p:sp>
+      <p:sp>
+        <p:nvSpPr>
+          <p:cNvPr id="10" name="Text 8"/>
+          <p:cNvSpPr txBox="1"/>
+          <p:nvPr/>
+        </p:nvSpPr>
+        <p:spPr>
+          <a:xfrm>
+            <a:off x="6446520" y="2194560"/>
+            <a:ext cx="731520" cy="731520"/>
+          </a:xfrm>
+          <a:prstGeom prst="rect">
+            <a:avLst/>
+          </a:prstGeom>
+          <a:noFill/>
+          <a:ln/>
+        </p:spPr>
+        <p:txBody>
+          <a:bodyPr wrap="square" lIns="0" tIns="0" rIns="0" bIns="0" rtlCol="0" anchor="ctr"/>
+          <a:lstStyle/>
+          <a:p>
+            <a:pPr algn="ctr" indent="0" marL="0">
+              <a:buNone/>
+            </a:pPr>
+            <a:r>
+              <a:rPr lang="en-US" sz="2080" b="1" dirty="0">
+                <a:solidFill>
+                  <a:srgbClr val="0F4C5C"/>
+                </a:solidFill>
+              </a:rPr>
+              <a:t>2</a:t>
+            </a:r>
+            <a:endParaRPr lang="en-US" sz="2080" dirty="0"/>
+          </a:p>
+        </p:txBody>
+      </p:sp>
+      <p:sp>
+        <p:nvSpPr>
+          <p:cNvPr id="11" name="Text 9"/>
+          <p:cNvSpPr txBox="1"/>
+          <p:nvPr/>
+        </p:nvSpPr>
+        <p:spPr>
+          <a:xfrm>
+            <a:off x="7452360" y="2057400"/>
+            <a:ext cx="3931920" cy="502920"/>
+          </a:xfrm>
+          <a:prstGeom prst="rect">
+            <a:avLst/>
+          </a:prstGeom>
+          <a:noFill/>
+          <a:ln/>
+        </p:spPr>
+        <p:txBody>
+          <a:bodyPr wrap="square" lIns="0" tIns="0" rIns="0" bIns="0" rtlCol="0" anchor="ctr"/>
+          <a:lstStyle/>
+          <a:p>
+            <a:pPr indent="0" marL="0">
+              <a:buNone/>
+            </a:pPr>
+            <a:r>
+              <a:rPr lang="en-US" sz="2100" b="1" dirty="0">
+                <a:solidFill>
+                  <a:srgbClr val="1F2A30"/>
+                </a:solidFill>
+              </a:rPr>
+              <a:t>Di che tipo sono le colonne?</a:t>
+            </a:r>
+            <a:endParaRPr lang="en-US" sz="2100" dirty="0"/>
+          </a:p>
+        </p:txBody>
+      </p:sp>
+      <p:sp>
+        <p:nvSpPr>
+          <p:cNvPr id="12" name="Text 10"/>
+          <p:cNvSpPr txBox="1"/>
+          <p:nvPr/>
+        </p:nvSpPr>
+        <p:spPr>
+          <a:xfrm>
+            <a:off x="7452360" y="2606040"/>
+            <a:ext cx="3931920" cy="457200"/>
+          </a:xfrm>
+          <a:prstGeom prst="rect">
+            <a:avLst/>
+          </a:prstGeom>
+          <a:noFill/>
+          <a:ln/>
+        </p:spPr>
+        <p:txBody>
+          <a:bodyPr wrap="square" lIns="0" tIns="0" rIns="0" bIns="0" rtlCol="0" anchor="ctr"/>
+          <a:lstStyle/>
+          <a:p>
+            <a:pPr indent="0" marL="0">
+              <a:buNone/>
+            </a:pPr>
+            <a:r>
+              <a:rPr lang="en-US" sz="1700" dirty="0">
+                <a:solidFill>
+                  <a:srgbClr val="0F4C5C"/>
+                </a:solidFill>
+                <a:latin typeface="Courier New" pitchFamily="34" charset="0"/>
+                <a:ea typeface="Courier New" pitchFamily="34" charset="-122"/>
+                <a:cs typeface="Courier New" pitchFamily="34" charset="-120"/>
+              </a:rPr>
+              <a:t>df.dtypes</a:t>
+            </a:r>
+            <a:endParaRPr lang="en-US" sz="1700" dirty="0"/>
+          </a:p>
+        </p:txBody>
+      </p:sp>
+      <p:sp>
+        <p:nvSpPr>
+          <p:cNvPr id="13" name="Shape 11"/>
+          <p:cNvSpPr/>
+          <p:nvPr/>
+        </p:nvSpPr>
+        <p:spPr>
+          <a:xfrm>
+            <a:off x="548640" y="3657600"/>
+            <a:ext cx="5440680" cy="1645920"/>
+          </a:xfrm>
+          <a:prstGeom prst="roundRect">
+            <a:avLst>
+              <a:gd name="adj" fmla="val 6667"/>
+            </a:avLst>
+          </a:prstGeom>
+          <a:solidFill>
+            <a:srgbClr val="EEF3F4"/>
+          </a:solidFill>
+          <a:ln/>
+        </p:spPr>
+      </p:sp>
+      <p:sp>
+        <p:nvSpPr>
+          <p:cNvPr id="14" name="Shape 12"/>
+          <p:cNvSpPr/>
+          <p:nvPr/>
+        </p:nvSpPr>
+        <p:spPr>
+          <a:xfrm>
+            <a:off x="822960" y="4114800"/>
+            <a:ext cx="731520" cy="731520"/>
+          </a:xfrm>
+          <a:prstGeom prst="ellipse">
+            <a:avLst/>
+          </a:prstGeom>
+          <a:solidFill>
+            <a:srgbClr val="FFFFFF"/>
+          </a:solidFill>
+          <a:ln/>
+        </p:spPr>
+      </p:sp>
+      <p:sp>
+        <p:nvSpPr>
+          <p:cNvPr id="15" name="Text 13"/>
+          <p:cNvSpPr txBox="1"/>
+          <p:nvPr/>
+        </p:nvSpPr>
+        <p:spPr>
+          <a:xfrm>
+            <a:off x="822960" y="4114800"/>
+            <a:ext cx="731520" cy="731520"/>
+          </a:xfrm>
+          <a:prstGeom prst="rect">
+            <a:avLst/>
+          </a:prstGeom>
+          <a:noFill/>
+          <a:ln/>
+        </p:spPr>
+        <p:txBody>
+          <a:bodyPr wrap="square" lIns="0" tIns="0" rIns="0" bIns="0" rtlCol="0" anchor="ctr"/>
+          <a:lstStyle/>
+          <a:p>
+            <a:pPr algn="ctr" indent="0" marL="0">
+              <a:buNone/>
+            </a:pPr>
+            <a:r>
+              <a:rPr lang="en-US" sz="2080" b="1" dirty="0">
+                <a:solidFill>
+                  <a:srgbClr val="0F4C5C"/>
+                </a:solidFill>
+              </a:rPr>
+              <a:t>3</a:t>
+            </a:r>
+            <a:endParaRPr lang="en-US" sz="2080" dirty="0"/>
+          </a:p>
+        </p:txBody>
+      </p:sp>
+      <p:sp>
+        <p:nvSpPr>
+          <p:cNvPr id="16" name="Text 14"/>
+          <p:cNvSpPr txBox="1"/>
+          <p:nvPr/>
+        </p:nvSpPr>
+        <p:spPr>
+          <a:xfrm>
+            <a:off x="1828800" y="3977640"/>
+            <a:ext cx="3931920" cy="502920"/>
+          </a:xfrm>
+          <a:prstGeom prst="rect">
+            <a:avLst/>
+          </a:prstGeom>
+          <a:noFill/>
+          <a:ln/>
+        </p:spPr>
+        <p:txBody>
+          <a:bodyPr wrap="square" lIns="0" tIns="0" rIns="0" bIns="0" rtlCol="0" anchor="ctr"/>
+          <a:lstStyle/>
+          <a:p>
+            <a:pPr indent="0" marL="0">
+              <a:buNone/>
+            </a:pPr>
+            <a:r>
+              <a:rPr lang="en-US" sz="2100" b="1" dirty="0">
+                <a:solidFill>
+                  <a:srgbClr val="1F2A30"/>
+                </a:solidFill>
+              </a:rPr>
+              <a:t>Quanti valori diversi?</a:t>
+            </a:r>
+            <a:endParaRPr lang="en-US" sz="2100" dirty="0"/>
+          </a:p>
+        </p:txBody>
+      </p:sp>
+      <p:sp>
+        <p:nvSpPr>
+          <p:cNvPr id="17" name="Text 15"/>
+          <p:cNvSpPr txBox="1"/>
+          <p:nvPr/>
+        </p:nvSpPr>
+        <p:spPr>
+          <a:xfrm>
+            <a:off x="1828800" y="4526280"/>
+            <a:ext cx="3931920" cy="457200"/>
+          </a:xfrm>
+          <a:prstGeom prst="rect">
+            <a:avLst/>
+          </a:prstGeom>
+          <a:noFill/>
+          <a:ln/>
+        </p:spPr>
+        <p:txBody>
+          <a:bodyPr wrap="square" lIns="0" tIns="0" rIns="0" bIns="0" rtlCol="0" anchor="ctr"/>
+          <a:lstStyle/>
+          <a:p>
+            <a:pPr indent="0" marL="0">
+              <a:buNone/>
+            </a:pPr>
+            <a:r>
+              <a:rPr lang="en-US" sz="1700" dirty="0">
+                <a:solidFill>
+                  <a:srgbClr val="0F4C5C"/>
+                </a:solidFill>
+                <a:latin typeface="Courier New" pitchFamily="34" charset="0"/>
+                <a:ea typeface="Courier New" pitchFamily="34" charset="-122"/>
+                <a:cs typeface="Courier New" pitchFamily="34" charset="-120"/>
+              </a:rPr>
+              <a:t>df["col"].nunique()</a:t>
+            </a:r>
+            <a:endParaRPr lang="en-US" sz="1700" dirty="0"/>
+          </a:p>
+        </p:txBody>
+      </p:sp>
+      <p:sp>
+        <p:nvSpPr>
+          <p:cNvPr id="18" name="Shape 16"/>
+          <p:cNvSpPr/>
+          <p:nvPr/>
+        </p:nvSpPr>
+        <p:spPr>
+          <a:xfrm>
+            <a:off x="6172200" y="3657600"/>
+            <a:ext cx="5440680" cy="1645920"/>
+          </a:xfrm>
+          <a:prstGeom prst="roundRect">
+            <a:avLst>
+              <a:gd name="adj" fmla="val 6667"/>
+            </a:avLst>
+          </a:prstGeom>
+          <a:solidFill>
+            <a:srgbClr val="EEF3F4"/>
+          </a:solidFill>
+          <a:ln/>
+        </p:spPr>
+      </p:sp>
+      <p:sp>
+        <p:nvSpPr>
+          <p:cNvPr id="19" name="Shape 17"/>
+          <p:cNvSpPr/>
+          <p:nvPr/>
+        </p:nvSpPr>
+        <p:spPr>
+          <a:xfrm>
+            <a:off x="6446520" y="4114800"/>
+            <a:ext cx="731520" cy="731520"/>
+          </a:xfrm>
+          <a:prstGeom prst="ellipse">
+            <a:avLst/>
+          </a:prstGeom>
+          <a:solidFill>
+            <a:srgbClr val="FFFFFF"/>
+          </a:solidFill>
+          <a:ln/>
+        </p:spPr>
+      </p:sp>
+      <p:sp>
+        <p:nvSpPr>
+          <p:cNvPr id="20" name="Text 18"/>
+          <p:cNvSpPr txBox="1"/>
+          <p:nvPr/>
+        </p:nvSpPr>
+        <p:spPr>
+          <a:xfrm>
+            <a:off x="6446520" y="4114800"/>
+            <a:ext cx="731520" cy="731520"/>
+          </a:xfrm>
+          <a:prstGeom prst="rect">
+            <a:avLst/>
+          </a:prstGeom>
+          <a:noFill/>
+          <a:ln/>
+        </p:spPr>
+        <p:txBody>
+          <a:bodyPr wrap="square" lIns="0" tIns="0" rIns="0" bIns="0" rtlCol="0" anchor="ctr"/>
+          <a:lstStyle/>
+          <a:p>
+            <a:pPr algn="ctr" indent="0" marL="0">
+              <a:buNone/>
+            </a:pPr>
+            <a:r>
+              <a:rPr lang="en-US" sz="2080" b="1" dirty="0">
+                <a:solidFill>
+                  <a:srgbClr val="0F4C5C"/>
+                </a:solidFill>
+              </a:rPr>
+              <a:t>4</a:t>
+            </a:r>
+            <a:endParaRPr lang="en-US" sz="2080" dirty="0"/>
+          </a:p>
+        </p:txBody>
+      </p:sp>
+      <p:sp>
+        <p:nvSpPr>
+          <p:cNvPr id="21" name="Text 19"/>
+          <p:cNvSpPr txBox="1"/>
+          <p:nvPr/>
+        </p:nvSpPr>
+        <p:spPr>
+          <a:xfrm>
+            <a:off x="7452360" y="3977640"/>
+            <a:ext cx="3931920" cy="502920"/>
+          </a:xfrm>
+          <a:prstGeom prst="rect">
+            <a:avLst/>
+          </a:prstGeom>
+          <a:noFill/>
+          <a:ln/>
+        </p:spPr>
+        <p:txBody>
+          <a:bodyPr wrap="square" lIns="0" tIns="0" rIns="0" bIns="0" rtlCol="0" anchor="ctr"/>
+          <a:lstStyle/>
+          <a:p>
+            <a:pPr indent="0" marL="0">
+              <a:buNone/>
+            </a:pPr>
+            <a:r>
+              <a:rPr lang="en-US" sz="2100" b="1" dirty="0">
+                <a:solidFill>
+                  <a:srgbClr val="1F2A30"/>
+                </a:solidFill>
+              </a:rPr>
+              <a:t>Quali valori, e quante volte?</a:t>
+            </a:r>
+            <a:endParaRPr lang="en-US" sz="2100" dirty="0"/>
+          </a:p>
+        </p:txBody>
+      </p:sp>
+      <p:sp>
+        <p:nvSpPr>
+          <p:cNvPr id="22" name="Text 20"/>
+          <p:cNvSpPr txBox="1"/>
+          <p:nvPr/>
+        </p:nvSpPr>
+        <p:spPr>
+          <a:xfrm>
+            <a:off x="7452360" y="4526280"/>
+            <a:ext cx="3931920" cy="457200"/>
+          </a:xfrm>
+          <a:prstGeom prst="rect">
+            <a:avLst/>
+          </a:prstGeom>
+          <a:noFill/>
+          <a:ln/>
+        </p:spPr>
+        <p:txBody>
+          <a:bodyPr wrap="square" lIns="0" tIns="0" rIns="0" bIns="0" rtlCol="0" anchor="ctr"/>
+          <a:lstStyle/>
+          <a:p>
+            <a:pPr indent="0" marL="0">
+              <a:buNone/>
+            </a:pPr>
+            <a:r>
+              <a:rPr lang="en-US" sz="1700" dirty="0">
+                <a:solidFill>
+                  <a:srgbClr val="0F4C5C"/>
+                </a:solidFill>
+                <a:latin typeface="Courier New" pitchFamily="34" charset="0"/>
+                <a:ea typeface="Courier New" pitchFamily="34" charset="-122"/>
+                <a:cs typeface="Courier New" pitchFamily="34" charset="-120"/>
+              </a:rPr>
+              <a:t>df["col"].value_counts()</a:t>
+            </a:r>
+            <a:endParaRPr lang="en-US" sz="1700" dirty="0"/>
+          </a:p>
+        </p:txBody>
+      </p:sp>
+      <p:sp>
+        <p:nvSpPr>
+          <p:cNvPr id="23" name="Text 21"/>
+          <p:cNvSpPr txBox="1"/>
+          <p:nvPr/>
+        </p:nvSpPr>
+        <p:spPr>
+          <a:xfrm>
+            <a:off x="548640" y="5623560"/>
+            <a:ext cx="11064240" cy="457200"/>
+          </a:xfrm>
+          <a:prstGeom prst="rect">
+            <a:avLst/>
+          </a:prstGeom>
+          <a:noFill/>
+          <a:ln/>
+        </p:spPr>
+        <p:txBody>
+          <a:bodyPr wrap="square" lIns="0" tIns="0" rIns="0" bIns="0" rtlCol="0" anchor="ctr"/>
+          <a:lstStyle/>
+          <a:p>
+            <a:pPr indent="0" marL="0">
+              <a:buNone/>
+            </a:pPr>
+            <a:r>
+              <a:rPr lang="en-US" sz="1800" i="1" dirty="0">
+                <a:solidFill>
+                  <a:srgbClr val="0F4C5C"/>
+                </a:solidFill>
+              </a:rPr>
+              <a:t>Prima di qualunque analisi. Sempre.</a:t>
+            </a:r>
+            <a:endParaRPr lang="en-US" sz="1800" dirty="0"/>
+          </a:p>
+        </p:txBody>
+      </p:sp>
+      <p:sp>
+        <p:nvSpPr>
+          <p:cNvPr id="25" name="Slide Number Placeholder 0"/>
+          <p:cNvSpPr>
+            <a:spLocks noGrp="1"/>
+          </p:cNvSpPr>
           <p:nvPr>
-            <p:ph idx="101" type="body" hasCustomPrompt="1"/>
+            <p:ph type="sldNum" sz="quarter" idx="4294967295"/>
           </p:nvPr>
         </p:nvSpPr>
         <p:spPr>
           <a:xfrm>
-            <a:off x="731520" y="3657600"/>
-            <a:ext cx="10698480" cy="1463040"/>
-          </a:xfrm>
-          <a:prstGeom prst="rect">
-            <a:avLst/>
-          </a:prstGeom>
-          <a:noFill/>
-          <a:ln/>
-        </p:spPr>
-        <p:txBody>
-          <a:bodyPr wrap="square" lIns="0" tIns="0" rIns="0" bIns="0" rtlCol="0" anchor="t"/>
-          <a:lstStyle/>
-          <a:p>
-            <a:pPr indent="0" marL="0">
-              <a:buNone/>
-            </a:pPr>
-            <a:r>
-              <a:rPr lang="en-US" sz="2200" dirty="0">
-                <a:solidFill>
-                  <a:srgbClr val="B8C4CB"/>
-                </a:solidFill>
-              </a:rPr>
-              <a:t>Un collega ti manda imprese.xlsx. Ti puoi fidare?</a:t>
-            </a:r>
-            <a:endParaRPr lang="en-US" sz="2200" dirty="0"/>
-          </a:p>
-          <a:p>
-            <a:pPr indent="0" marL="0">
-              <a:buNone/>
-            </a:pPr>
-            <a:r>
-              <a:rPr lang="en-US" sz="2200" dirty="0">
-                <a:solidFill>
-                  <a:srgbClr val="B8C4CB"/>
-                </a:solidFill>
-              </a:rPr>
-              <a:t>60 minuti · apri il notebook dal README</a:t>
-            </a:r>
-            <a:endParaRPr lang="en-US" sz="2200" dirty="0"/>
+            <a:off x="11155680" y="6400800"/>
+            <a:ext cx="457200" cy="274320"/>
+          </a:xfrm>
+          <a:prstGeom prst="rect">
+            <a:avLst/>
+          </a:prstGeom>
+          <a:extLst>
+            <a:ext uri="{C572A759-6A51-4108-AA02-DFA0A04FC94B}">
+              <ma14:wrappingTextBoxFlag xmlns:ma14="http://schemas.microsoft.com/office/mac/drawingml/2011/main" val="0"/>
+            </a:ext>
+          </a:extLst>
+        </p:spPr>
+        <p:txBody>
+          <a:bodyPr/>
+          <a:lstStyle>
+            <a:lvl1pPr>
+              <a:defRPr sz="1000">
+                <a:solidFill>
+                  <a:srgbClr val="5C6F7B"/>
+                </a:solidFill>
+              </a:defRPr>
+            </a:lvl1pPr>
+          </a:lstStyle>
+          <a:p>
+            <a:pPr algn="r"/>
+            <a:fld id="{F7021451-1387-4CA6-816F-3879F97B5CBC}" type="slidenum">
+              <a:rPr b="0" lang="en-US"/>
+              <a:t>12</a:t>
+            </a:fld>
+            <a:endParaRPr lang="en-US"/>
           </a:p>
         </p:txBody>
       </p:sp>
@@ -4416,7 +5067,7 @@
                   <a:srgbClr val="FFFFFF"/>
                 </a:solidFill>
               </a:rPr>
-              <a:t>Debrief</a:t>
+              <a:t>Task: conosci il tuo dataset</a:t>
             </a:r>
             <a:endParaRPr lang="en-US" sz="5400" dirty="0"/>
           </a:p>
@@ -4454,7 +5105,21 @@
                   <a:srgbClr val="B8C4CB"/>
                 </a:solidFill>
               </a:rPr>
-              <a:t>Cosa non torna nel dataset</a:t>
+              <a:t>Un collega ti manda imprese.xlsx. Ti puoi fidare?</a:t>
+            </a:r>
+            <a:endParaRPr lang="en-US" sz="2200" dirty="0"/>
+          </a:p>
+          <a:p>
+            <a:pPr indent="0" marL="0">
+              <a:buNone/>
+            </a:pPr>
+            <a:r>
+              <a:rPr lang="en-US" sz="2200" dirty="0">
+                <a:solidFill>
+                  <a:srgbClr val="B8C4CB"/>
+                </a:solidFill>
+              </a:rPr>
+              <a:t>60 minuti · apri il notebook dal README</a:t>
             </a:r>
             <a:endParaRPr lang="en-US" sz="2200" dirty="0"/>
           </a:p>
@@ -4495,415 +5160,69 @@
         </p:nvSpPr>
         <p:spPr>
           <a:xfrm>
-            <a:off x="548640" y="365760"/>
-            <a:ext cx="11064240" cy="822960"/>
-          </a:xfrm>
-          <a:prstGeom prst="rect">
-            <a:avLst/>
-          </a:prstGeom>
-          <a:noFill/>
-          <a:ln/>
-        </p:spPr>
-        <p:txBody>
-          <a:bodyPr wrap="square" lIns="0" tIns="0" rIns="0" bIns="0" rtlCol="0" anchor="ctr"/>
+            <a:off x="731520" y="2194560"/>
+            <a:ext cx="10698480" cy="1280160"/>
+          </a:xfrm>
+          <a:prstGeom prst="rect">
+            <a:avLst/>
+          </a:prstGeom>
+          <a:noFill/>
+          <a:ln/>
+        </p:spPr>
+        <p:txBody>
+          <a:bodyPr wrap="square" lIns="0" tIns="0" rIns="0" bIns="0" rtlCol="0" anchor="b"/>
           <a:lstStyle/>
           <a:p>
             <a:pPr algn="l" indent="0" marL="0">
               <a:buNone/>
             </a:pPr>
             <a:r>
-              <a:rPr lang="en-US" sz="3600" b="1" dirty="0">
-                <a:solidFill>
-                  <a:srgbClr val="0F4C5C"/>
-                </a:solidFill>
-              </a:rPr>
-              <a:t>I conti non tornano</a:t>
-            </a:r>
-            <a:endParaRPr lang="en-US" sz="3600" dirty="0"/>
-          </a:p>
-        </p:txBody>
-      </p:sp>
-      <p:sp>
-        <p:nvSpPr>
-          <p:cNvPr id="3" name="Shape 1"/>
+              <a:rPr lang="en-US" sz="5400" b="1" dirty="0">
+                <a:solidFill>
+                  <a:srgbClr val="FFFFFF"/>
+                </a:solidFill>
+              </a:rPr>
+              <a:t>Debrief</a:t>
+            </a:r>
+            <a:endParaRPr lang="en-US" sz="5400" dirty="0"/>
+          </a:p>
+        </p:txBody>
+      </p:sp>
+      <p:sp>
+        <p:nvSpPr>
+          <p:cNvPr id="3" name="Text 0"/>
           <p:cNvSpPr/>
-          <p:nvPr/>
-        </p:nvSpPr>
-        <p:spPr>
-          <a:xfrm>
-            <a:off x="548640" y="1737360"/>
-            <a:ext cx="3657600" cy="3108960"/>
-          </a:xfrm>
-          <a:prstGeom prst="roundRect">
-            <a:avLst>
-              <a:gd name="adj" fmla="val 3529"/>
-            </a:avLst>
-          </a:prstGeom>
-          <a:solidFill>
-            <a:srgbClr val="EEF3F4"/>
-          </a:solidFill>
-          <a:ln/>
-        </p:spPr>
-      </p:sp>
-      <p:sp>
-        <p:nvSpPr>
-          <p:cNvPr id="4" name="Text 2"/>
-          <p:cNvSpPr txBox="1"/>
-          <p:nvPr/>
-        </p:nvSpPr>
-        <p:spPr>
-          <a:xfrm>
-            <a:off x="914400" y="2011680"/>
-            <a:ext cx="2926080" cy="1188720"/>
-          </a:xfrm>
-          <a:prstGeom prst="rect">
-            <a:avLst/>
-          </a:prstGeom>
-          <a:noFill/>
-          <a:ln/>
-        </p:spPr>
-        <p:txBody>
-          <a:bodyPr wrap="square" lIns="0" tIns="0" rIns="0" bIns="0" rtlCol="0" anchor="ctr"/>
+          <p:nvPr>
+            <p:ph idx="101" type="body" hasCustomPrompt="1"/>
+          </p:nvPr>
+        </p:nvSpPr>
+        <p:spPr>
+          <a:xfrm>
+            <a:off x="731520" y="3657600"/>
+            <a:ext cx="10698480" cy="1463040"/>
+          </a:xfrm>
+          <a:prstGeom prst="rect">
+            <a:avLst/>
+          </a:prstGeom>
+          <a:noFill/>
+          <a:ln/>
+        </p:spPr>
+        <p:txBody>
+          <a:bodyPr wrap="square" lIns="0" tIns="0" rIns="0" bIns="0" rtlCol="0" anchor="t"/>
           <a:lstStyle/>
           <a:p>
             <a:pPr indent="0" marL="0">
               <a:buNone/>
             </a:pPr>
             <a:r>
-              <a:rPr lang="en-US" sz="6400" b="1" dirty="0">
-                <a:solidFill>
-                  <a:srgbClr val="0F4C5C"/>
-                </a:solidFill>
-              </a:rPr>
-              <a:t>2.500</a:t>
-            </a:r>
-            <a:endParaRPr lang="en-US" sz="6400" dirty="0"/>
-          </a:p>
-        </p:txBody>
-      </p:sp>
-      <p:sp>
-        <p:nvSpPr>
-          <p:cNvPr id="5" name="Text 3"/>
-          <p:cNvSpPr txBox="1"/>
-          <p:nvPr/>
-        </p:nvSpPr>
-        <p:spPr>
-          <a:xfrm>
-            <a:off x="914400" y="3291840"/>
-            <a:ext cx="2926080" cy="457200"/>
-          </a:xfrm>
-          <a:prstGeom prst="rect">
-            <a:avLst/>
-          </a:prstGeom>
-          <a:noFill/>
-          <a:ln/>
-        </p:spPr>
-        <p:txBody>
-          <a:bodyPr wrap="square" lIns="0" tIns="0" rIns="0" bIns="0" rtlCol="0" anchor="ctr"/>
-          <a:lstStyle/>
-          <a:p>
-            <a:pPr indent="0" marL="0">
-              <a:buNone/>
-            </a:pPr>
-            <a:r>
-              <a:rPr lang="en-US" sz="2200" b="1" dirty="0">
-                <a:solidFill>
-                  <a:srgbClr val="0F4C5C"/>
-                </a:solidFill>
-              </a:rPr>
-              <a:t>righe attese</a:t>
+              <a:rPr lang="en-US" sz="2200" dirty="0">
+                <a:solidFill>
+                  <a:srgbClr val="B8C4CB"/>
+                </a:solidFill>
+              </a:rPr>
+              <a:t>Cosa non torna nel dataset</a:t>
             </a:r>
             <a:endParaRPr lang="en-US" sz="2200" dirty="0"/>
-          </a:p>
-        </p:txBody>
-      </p:sp>
-      <p:sp>
-        <p:nvSpPr>
-          <p:cNvPr id="6" name="Text 4"/>
-          <p:cNvSpPr txBox="1"/>
-          <p:nvPr/>
-        </p:nvSpPr>
-        <p:spPr>
-          <a:xfrm>
-            <a:off x="914400" y="3794760"/>
-            <a:ext cx="2926080" cy="457200"/>
-          </a:xfrm>
-          <a:prstGeom prst="rect">
-            <a:avLst/>
-          </a:prstGeom>
-          <a:noFill/>
-          <a:ln/>
-        </p:spPr>
-        <p:txBody>
-          <a:bodyPr wrap="square" lIns="0" tIns="0" rIns="0" bIns="0" rtlCol="0" anchor="ctr"/>
-          <a:lstStyle/>
-          <a:p>
-            <a:pPr indent="0" marL="0">
-              <a:buNone/>
-            </a:pPr>
-            <a:r>
-              <a:rPr lang="en-US" sz="1600" dirty="0">
-                <a:solidFill>
-                  <a:srgbClr val="5C6F7B"/>
-                </a:solidFill>
-                <a:latin typeface="Courier New" pitchFamily="34" charset="0"/>
-                <a:ea typeface="Courier New" pitchFamily="34" charset="-122"/>
-                <a:cs typeface="Courier New" pitchFamily="34" charset="-120"/>
-              </a:rPr>
-              <a:t>500 imprese × 5 anni</a:t>
-            </a:r>
-            <a:endParaRPr lang="en-US" sz="1600" dirty="0"/>
-          </a:p>
-        </p:txBody>
-      </p:sp>
-      <p:sp>
-        <p:nvSpPr>
-          <p:cNvPr id="7" name="Shape 5"/>
-          <p:cNvSpPr/>
-          <p:nvPr/>
-        </p:nvSpPr>
-        <p:spPr>
-          <a:xfrm>
-            <a:off x="4480560" y="1737360"/>
-            <a:ext cx="3657600" cy="3108960"/>
-          </a:xfrm>
-          <a:prstGeom prst="roundRect">
-            <a:avLst>
-              <a:gd name="adj" fmla="val 3529"/>
-            </a:avLst>
-          </a:prstGeom>
-          <a:solidFill>
-            <a:srgbClr val="0F4C5C"/>
-          </a:solidFill>
-          <a:ln/>
-        </p:spPr>
-      </p:sp>
-      <p:sp>
-        <p:nvSpPr>
-          <p:cNvPr id="8" name="Text 6"/>
-          <p:cNvSpPr txBox="1"/>
-          <p:nvPr/>
-        </p:nvSpPr>
-        <p:spPr>
-          <a:xfrm>
-            <a:off x="4846320" y="2011680"/>
-            <a:ext cx="2926080" cy="1188720"/>
-          </a:xfrm>
-          <a:prstGeom prst="rect">
-            <a:avLst/>
-          </a:prstGeom>
-          <a:noFill/>
-          <a:ln/>
-        </p:spPr>
-        <p:txBody>
-          <a:bodyPr wrap="square" lIns="0" tIns="0" rIns="0" bIns="0" rtlCol="0" anchor="ctr"/>
-          <a:lstStyle/>
-          <a:p>
-            <a:pPr indent="0" marL="0">
-              <a:buNone/>
-            </a:pPr>
-            <a:r>
-              <a:rPr lang="en-US" sz="6400" b="1" dirty="0">
-                <a:solidFill>
-                  <a:srgbClr val="FFFFFF"/>
-                </a:solidFill>
-              </a:rPr>
-              <a:t>2.515</a:t>
-            </a:r>
-            <a:endParaRPr lang="en-US" sz="6400" dirty="0"/>
-          </a:p>
-        </p:txBody>
-      </p:sp>
-      <p:sp>
-        <p:nvSpPr>
-          <p:cNvPr id="9" name="Text 7"/>
-          <p:cNvSpPr txBox="1"/>
-          <p:nvPr/>
-        </p:nvSpPr>
-        <p:spPr>
-          <a:xfrm>
-            <a:off x="4846320" y="3291840"/>
-            <a:ext cx="2926080" cy="457200"/>
-          </a:xfrm>
-          <a:prstGeom prst="rect">
-            <a:avLst/>
-          </a:prstGeom>
-          <a:noFill/>
-          <a:ln/>
-        </p:spPr>
-        <p:txBody>
-          <a:bodyPr wrap="square" lIns="0" tIns="0" rIns="0" bIns="0" rtlCol="0" anchor="ctr"/>
-          <a:lstStyle/>
-          <a:p>
-            <a:pPr indent="0" marL="0">
-              <a:buNone/>
-            </a:pPr>
-            <a:r>
-              <a:rPr lang="en-US" sz="2200" b="1" dirty="0">
-                <a:solidFill>
-                  <a:srgbClr val="FFFFFF"/>
-                </a:solidFill>
-              </a:rPr>
-              <a:t>righe nel file</a:t>
-            </a:r>
-            <a:endParaRPr lang="en-US" sz="2200" dirty="0"/>
-          </a:p>
-        </p:txBody>
-      </p:sp>
-      <p:sp>
-        <p:nvSpPr>
-          <p:cNvPr id="10" name="Text 8"/>
-          <p:cNvSpPr txBox="1"/>
-          <p:nvPr/>
-        </p:nvSpPr>
-        <p:spPr>
-          <a:xfrm>
-            <a:off x="4846320" y="3794760"/>
-            <a:ext cx="2926080" cy="457200"/>
-          </a:xfrm>
-          <a:prstGeom prst="rect">
-            <a:avLst/>
-          </a:prstGeom>
-          <a:noFill/>
-          <a:ln/>
-        </p:spPr>
-        <p:txBody>
-          <a:bodyPr wrap="square" lIns="0" tIns="0" rIns="0" bIns="0" rtlCol="0" anchor="ctr"/>
-          <a:lstStyle/>
-          <a:p>
-            <a:pPr indent="0" marL="0">
-              <a:buNone/>
-            </a:pPr>
-            <a:r>
-              <a:rPr lang="en-US" sz="1600" dirty="0">
-                <a:solidFill>
-                  <a:srgbClr val="B8C4CB"/>
-                </a:solidFill>
-                <a:latin typeface="Courier New" pitchFamily="34" charset="0"/>
-                <a:ea typeface="Courier New" pitchFamily="34" charset="-122"/>
-                <a:cs typeface="Courier New" pitchFamily="34" charset="-120"/>
-              </a:rPr>
-              <a:t>df.shape</a:t>
-            </a:r>
-            <a:endParaRPr lang="en-US" sz="1600" dirty="0"/>
-          </a:p>
-        </p:txBody>
-      </p:sp>
-      <p:sp>
-        <p:nvSpPr>
-          <p:cNvPr id="11" name="Text 9"/>
-          <p:cNvSpPr txBox="1"/>
-          <p:nvPr/>
-        </p:nvSpPr>
-        <p:spPr>
-          <a:xfrm>
-            <a:off x="8503920" y="1828800"/>
-            <a:ext cx="3108960" cy="3657600"/>
-          </a:xfrm>
-          <a:prstGeom prst="rect">
-            <a:avLst/>
-          </a:prstGeom>
-          <a:noFill/>
-          <a:ln/>
-        </p:spPr>
-        <p:txBody>
-          <a:bodyPr wrap="square" lIns="0" tIns="0" rIns="0" bIns="0" rtlCol="0" anchor="t"/>
-          <a:lstStyle/>
-          <a:p>
-            <a:pPr indent="0" marL="0">
-              <a:spcAft>
-                <a:spcPts val="1000"/>
-              </a:spcAft>
-              <a:buNone/>
-            </a:pPr>
-            <a:r>
-              <a:rPr lang="en-US" sz="1800" b="1" dirty="0">
-                <a:solidFill>
-                  <a:srgbClr val="9E2A2B"/>
-                </a:solidFill>
-              </a:rPr>
-              <a:t>15 righe in più.</a:t>
-            </a:r>
-            <a:endParaRPr lang="en-US" sz="1800" dirty="0"/>
-          </a:p>
-          <a:p>
-            <a:pPr indent="0" marL="0">
-              <a:spcAft>
-                <a:spcPts val="1000"/>
-              </a:spcAft>
-              <a:buNone/>
-            </a:pPr>
-            <a:r>
-              <a:rPr lang="en-US" sz="1800" dirty="0">
-                <a:solidFill>
-                  <a:srgbClr val="1F2A30"/>
-                </a:solidFill>
-              </a:rPr>
-              <a:t>Probabilmente duplicati: la stessa impresa, lo stesso anno, due volte.</a:t>
-            </a:r>
-            <a:endParaRPr lang="en-US" sz="1800" dirty="0"/>
-          </a:p>
-          <a:p>
-            <a:pPr indent="0" marL="0">
-              <a:spcAft>
-                <a:spcPts val="1000"/>
-              </a:spcAft>
-              <a:buNone/>
-            </a:pPr>
-            <a:r>
-              <a:rPr lang="en-US" sz="1800" dirty="0">
-                <a:solidFill>
-                  <a:srgbClr val="1F2A30"/>
-                </a:solidFill>
-              </a:rPr>
-              <a:t>Un controllo da fare a mente, in 10 secondi. Nessun codice lo fa per te.</a:t>
-            </a:r>
-            <a:endParaRPr lang="en-US" sz="1800" dirty="0"/>
-          </a:p>
-        </p:txBody>
-      </p:sp>
-      <p:sp>
-        <p:nvSpPr>
-          <p:cNvPr id="25" name="Slide Number Placeholder 0"/>
-          <p:cNvSpPr>
-            <a:spLocks noGrp="1"/>
-          </p:cNvSpPr>
-          <p:nvPr>
-            <p:ph type="sldNum" sz="quarter" idx="4294967295"/>
-          </p:nvPr>
-        </p:nvSpPr>
-        <p:spPr>
-          <a:xfrm>
-            <a:off x="11155680" y="6400800"/>
-            <a:ext cx="457200" cy="274320"/>
-          </a:xfrm>
-          <a:prstGeom prst="rect">
-            <a:avLst/>
-          </a:prstGeom>
-          <a:extLst>
-            <a:ext uri="{C572A759-6A51-4108-AA02-DFA0A04FC94B}">
-              <ma14:wrappingTextBoxFlag xmlns:ma14="http://schemas.microsoft.com/office/mac/drawingml/2011/main" val="0"/>
-            </a:ext>
-          </a:extLst>
-        </p:spPr>
-        <p:txBody>
-          <a:bodyPr/>
-          <a:lstStyle>
-            <a:lvl1pPr>
-              <a:defRPr sz="1000">
-                <a:solidFill>
-                  <a:srgbClr val="5C6F7B"/>
-                </a:solidFill>
-              </a:defRPr>
-            </a:lvl1pPr>
-          </a:lstStyle>
-          <a:p>
-            <a:pPr algn="r"/>
-            <a:fld id="{F7021451-1387-4CA6-816F-3879F97B5CBC}" type="slidenum">
-              <a:rPr b="0" lang="en-US"/>
-              <a:t>14</a:t>
-            </a:fld>
-            <a:endParaRPr lang="en-US"/>
           </a:p>
         </p:txBody>
       </p:sp>
@@ -4964,7 +5283,7 @@
                   <a:srgbClr val="0F4C5C"/>
                 </a:solidFill>
               </a:rPr>
-              <a:t>Il fatturato è testo</a:t>
+              <a:t>I conti non tornano</a:t>
             </a:r>
             <a:endParaRPr lang="en-US" sz="3600" dirty="0"/>
           </a:p>
@@ -4972,22 +5291,22 @@
       </p:sp>
       <p:sp>
         <p:nvSpPr>
-          <p:cNvPr id="3" name="card-code"/>
+          <p:cNvPr id="3" name="Shape 1"/>
           <p:cNvSpPr/>
           <p:nvPr/>
         </p:nvSpPr>
         <p:spPr>
           <a:xfrm>
             <a:off x="548640" y="1737360"/>
-            <a:ext cx="5577840" cy="1005840"/>
+            <a:ext cx="3657600" cy="3108960"/>
           </a:xfrm>
           <a:prstGeom prst="roundRect">
             <a:avLst>
-              <a:gd name="adj" fmla="val 10909"/>
+              <a:gd name="adj" fmla="val 3529"/>
             </a:avLst>
           </a:prstGeom>
           <a:solidFill>
-            <a:srgbClr val="1F2A30"/>
+            <a:srgbClr val="EEF3F4"/>
           </a:solidFill>
           <a:ln/>
         </p:spPr>
@@ -5000,8 +5319,8 @@
         </p:nvSpPr>
         <p:spPr>
           <a:xfrm>
-            <a:off x="777240" y="1874520"/>
-            <a:ext cx="1828800" cy="274320"/>
+            <a:off x="914400" y="2011680"/>
+            <a:ext cx="2926080" cy="1188720"/>
           </a:xfrm>
           <a:prstGeom prst="rect">
             <a:avLst/>
@@ -5017,14 +5336,14 @@
               <a:buNone/>
             </a:pPr>
             <a:r>
-              <a:rPr lang="en-US" sz="1100" b="1" spc="200" kern="0" dirty="0">
-                <a:solidFill>
-                  <a:srgbClr val="E09F3E"/>
-                </a:solidFill>
-              </a:rPr>
-              <a:t>PYTHON</a:t>
-            </a:r>
-            <a:endParaRPr lang="en-US" sz="1100" dirty="0"/>
+              <a:rPr lang="en-US" sz="6400" b="1" dirty="0">
+                <a:solidFill>
+                  <a:srgbClr val="0F4C5C"/>
+                </a:solidFill>
+              </a:rPr>
+              <a:t>2.500</a:t>
+            </a:r>
+            <a:endParaRPr lang="en-US" sz="6400" dirty="0"/>
           </a:p>
         </p:txBody>
       </p:sp>
@@ -5036,69 +5355,105 @@
         </p:nvSpPr>
         <p:spPr>
           <a:xfrm>
-            <a:off x="777240" y="2194560"/>
-            <a:ext cx="5120640" cy="411480"/>
-          </a:xfrm>
-          <a:prstGeom prst="rect">
-            <a:avLst/>
-          </a:prstGeom>
-          <a:noFill/>
-          <a:ln/>
-        </p:spPr>
-        <p:txBody>
-          <a:bodyPr wrap="square" lIns="0" tIns="0" rIns="0" bIns="0" rtlCol="0" anchor="t"/>
+            <a:off x="914400" y="3291840"/>
+            <a:ext cx="2926080" cy="457200"/>
+          </a:xfrm>
+          <a:prstGeom prst="rect">
+            <a:avLst/>
+          </a:prstGeom>
+          <a:noFill/>
+          <a:ln/>
+        </p:spPr>
+        <p:txBody>
+          <a:bodyPr wrap="square" lIns="0" tIns="0" rIns="0" bIns="0" rtlCol="0" anchor="ctr"/>
           <a:lstStyle/>
           <a:p>
             <a:pPr indent="0" marL="0">
               <a:buNone/>
             </a:pPr>
             <a:r>
-              <a:rPr lang="en-US" sz="1800" dirty="0">
-                <a:solidFill>
-                  <a:srgbClr val="FFFFFF"/>
+              <a:rPr lang="en-US" sz="2200" b="1" dirty="0">
+                <a:solidFill>
+                  <a:srgbClr val="0F4C5C"/>
+                </a:solidFill>
+              </a:rPr>
+              <a:t>righe attese</a:t>
+            </a:r>
+            <a:endParaRPr lang="en-US" sz="2200" dirty="0"/>
+          </a:p>
+        </p:txBody>
+      </p:sp>
+      <p:sp>
+        <p:nvSpPr>
+          <p:cNvPr id="6" name="Text 4"/>
+          <p:cNvSpPr txBox="1"/>
+          <p:nvPr/>
+        </p:nvSpPr>
+        <p:spPr>
+          <a:xfrm>
+            <a:off x="914400" y="3794760"/>
+            <a:ext cx="2926080" cy="457200"/>
+          </a:xfrm>
+          <a:prstGeom prst="rect">
+            <a:avLst/>
+          </a:prstGeom>
+          <a:noFill/>
+          <a:ln/>
+        </p:spPr>
+        <p:txBody>
+          <a:bodyPr wrap="square" lIns="0" tIns="0" rIns="0" bIns="0" rtlCol="0" anchor="ctr"/>
+          <a:lstStyle/>
+          <a:p>
+            <a:pPr indent="0" marL="0">
+              <a:buNone/>
+            </a:pPr>
+            <a:r>
+              <a:rPr lang="en-US" sz="1600" dirty="0">
+                <a:solidFill>
+                  <a:srgbClr val="5C6F7B"/>
                 </a:solidFill>
                 <a:latin typeface="Courier New" pitchFamily="34" charset="0"/>
                 <a:ea typeface="Courier New" pitchFamily="34" charset="-122"/>
                 <a:cs typeface="Courier New" pitchFamily="34" charset="-120"/>
               </a:rPr>
-              <a:t>df["fatturato"].mean()</a:t>
-            </a:r>
-            <a:endParaRPr lang="en-US" sz="1800" dirty="0"/>
-          </a:p>
-        </p:txBody>
-      </p:sp>
-      <p:sp>
-        <p:nvSpPr>
-          <p:cNvPr id="6" name="card-err"/>
+              <a:t>500 imprese × 5 anni</a:t>
+            </a:r>
+            <a:endParaRPr lang="en-US" sz="1600" dirty="0"/>
+          </a:p>
+        </p:txBody>
+      </p:sp>
+      <p:sp>
+        <p:nvSpPr>
+          <p:cNvPr id="7" name="Shape 5"/>
           <p:cNvSpPr/>
           <p:nvPr/>
         </p:nvSpPr>
         <p:spPr>
           <a:xfrm>
-            <a:off x="548640" y="2880360"/>
-            <a:ext cx="5577840" cy="1097280"/>
+            <a:off x="4480560" y="1737360"/>
+            <a:ext cx="3657600" cy="3108960"/>
           </a:xfrm>
           <a:prstGeom prst="roundRect">
             <a:avLst>
-              <a:gd name="adj" fmla="val 10000"/>
+              <a:gd name="adj" fmla="val 3529"/>
             </a:avLst>
           </a:prstGeom>
           <a:solidFill>
-            <a:srgbClr val="FBEAEA"/>
+            <a:srgbClr val="0F4C5C"/>
           </a:solidFill>
           <a:ln/>
         </p:spPr>
       </p:sp>
       <p:sp>
         <p:nvSpPr>
-          <p:cNvPr id="7" name="Text 5"/>
-          <p:cNvSpPr txBox="1"/>
-          <p:nvPr/>
-        </p:nvSpPr>
-        <p:spPr>
-          <a:xfrm>
-            <a:off x="777240" y="3017520"/>
-            <a:ext cx="1828800" cy="274320"/>
+          <p:cNvPr id="8" name="Text 6"/>
+          <p:cNvSpPr txBox="1"/>
+          <p:nvPr/>
+        </p:nvSpPr>
+        <p:spPr>
+          <a:xfrm>
+            <a:off x="4846320" y="2011680"/>
+            <a:ext cx="2926080" cy="1188720"/>
           </a:xfrm>
           <a:prstGeom prst="rect">
             <a:avLst/>
@@ -5114,111 +5469,89 @@
               <a:buNone/>
             </a:pPr>
             <a:r>
-              <a:rPr lang="en-US" sz="1100" b="1" spc="200" kern="0" dirty="0">
-                <a:solidFill>
-                  <a:srgbClr val="9E2A2B"/>
-                </a:solidFill>
-              </a:rPr>
-              <a:t>ERRORE</a:t>
-            </a:r>
-            <a:endParaRPr lang="en-US" sz="1100" dirty="0"/>
-          </a:p>
-        </p:txBody>
-      </p:sp>
-      <p:sp>
-        <p:nvSpPr>
-          <p:cNvPr id="8" name="Text 6"/>
-          <p:cNvSpPr txBox="1"/>
-          <p:nvPr/>
-        </p:nvSpPr>
-        <p:spPr>
-          <a:xfrm>
-            <a:off x="777240" y="3337560"/>
-            <a:ext cx="5120640" cy="502920"/>
-          </a:xfrm>
-          <a:prstGeom prst="rect">
-            <a:avLst/>
-          </a:prstGeom>
-          <a:noFill/>
-          <a:ln/>
-        </p:spPr>
-        <p:txBody>
-          <a:bodyPr wrap="square" lIns="0" tIns="0" rIns="0" bIns="0" rtlCol="0" anchor="t"/>
+              <a:rPr lang="en-US" sz="6400" b="1" dirty="0">
+                <a:solidFill>
+                  <a:srgbClr val="FFFFFF"/>
+                </a:solidFill>
+              </a:rPr>
+              <a:t>2.515</a:t>
+            </a:r>
+            <a:endParaRPr lang="en-US" sz="6400" dirty="0"/>
+          </a:p>
+        </p:txBody>
+      </p:sp>
+      <p:sp>
+        <p:nvSpPr>
+          <p:cNvPr id="9" name="Text 7"/>
+          <p:cNvSpPr txBox="1"/>
+          <p:nvPr/>
+        </p:nvSpPr>
+        <p:spPr>
+          <a:xfrm>
+            <a:off x="4846320" y="3291840"/>
+            <a:ext cx="2926080" cy="457200"/>
+          </a:xfrm>
+          <a:prstGeom prst="rect">
+            <a:avLst/>
+          </a:prstGeom>
+          <a:noFill/>
+          <a:ln/>
+        </p:spPr>
+        <p:txBody>
+          <a:bodyPr wrap="square" lIns="0" tIns="0" rIns="0" bIns="0" rtlCol="0" anchor="ctr"/>
           <a:lstStyle/>
           <a:p>
             <a:pPr indent="0" marL="0">
               <a:buNone/>
             </a:pPr>
             <a:r>
-              <a:rPr lang="en-US" sz="1800" dirty="0">
-                <a:solidFill>
-                  <a:srgbClr val="9E2A2B"/>
+              <a:rPr lang="en-US" sz="2200" b="1" dirty="0">
+                <a:solidFill>
+                  <a:srgbClr val="FFFFFF"/>
+                </a:solidFill>
+              </a:rPr>
+              <a:t>righe nel file</a:t>
+            </a:r>
+            <a:endParaRPr lang="en-US" sz="2200" dirty="0"/>
+          </a:p>
+        </p:txBody>
+      </p:sp>
+      <p:sp>
+        <p:nvSpPr>
+          <p:cNvPr id="10" name="Text 8"/>
+          <p:cNvSpPr txBox="1"/>
+          <p:nvPr/>
+        </p:nvSpPr>
+        <p:spPr>
+          <a:xfrm>
+            <a:off x="4846320" y="3794760"/>
+            <a:ext cx="2926080" cy="457200"/>
+          </a:xfrm>
+          <a:prstGeom prst="rect">
+            <a:avLst/>
+          </a:prstGeom>
+          <a:noFill/>
+          <a:ln/>
+        </p:spPr>
+        <p:txBody>
+          <a:bodyPr wrap="square" lIns="0" tIns="0" rIns="0" bIns="0" rtlCol="0" anchor="ctr"/>
+          <a:lstStyle/>
+          <a:p>
+            <a:pPr indent="0" marL="0">
+              <a:buNone/>
+            </a:pPr>
+            <a:r>
+              <a:rPr lang="en-US" sz="1600" dirty="0">
+                <a:solidFill>
+                  <a:srgbClr val="B8C4CB"/>
                 </a:solidFill>
                 <a:latin typeface="Courier New" pitchFamily="34" charset="0"/>
                 <a:ea typeface="Courier New" pitchFamily="34" charset="-122"/>
                 <a:cs typeface="Courier New" pitchFamily="34" charset="-120"/>
               </a:rPr>
-              <a:t>TypeError: ... string ...</a:t>
-            </a:r>
-            <a:endParaRPr lang="en-US" sz="1800" dirty="0"/>
-          </a:p>
-        </p:txBody>
-      </p:sp>
-      <p:sp>
-        <p:nvSpPr>
-          <p:cNvPr id="9" name="card-code"/>
-          <p:cNvSpPr/>
-          <p:nvPr/>
-        </p:nvSpPr>
-        <p:spPr>
-          <a:xfrm>
-            <a:off x="548640" y="4160520"/>
-            <a:ext cx="5577840" cy="1005840"/>
-          </a:xfrm>
-          <a:prstGeom prst="roundRect">
-            <a:avLst>
-              <a:gd name="adj" fmla="val 10909"/>
-            </a:avLst>
-          </a:prstGeom>
-          <a:solidFill>
-            <a:srgbClr val="1F2A30"/>
-          </a:solidFill>
-          <a:ln/>
-        </p:spPr>
-      </p:sp>
-      <p:sp>
-        <p:nvSpPr>
-          <p:cNvPr id="10" name="Text 8"/>
-          <p:cNvSpPr txBox="1"/>
-          <p:nvPr/>
-        </p:nvSpPr>
-        <p:spPr>
-          <a:xfrm>
-            <a:off x="777240" y="4297680"/>
-            <a:ext cx="1828800" cy="274320"/>
-          </a:xfrm>
-          <a:prstGeom prst="rect">
-            <a:avLst/>
-          </a:prstGeom>
-          <a:noFill/>
-          <a:ln/>
-        </p:spPr>
-        <p:txBody>
-          <a:bodyPr wrap="square" lIns="0" tIns="0" rIns="0" bIns="0" rtlCol="0" anchor="ctr"/>
-          <a:lstStyle/>
-          <a:p>
-            <a:pPr indent="0" marL="0">
-              <a:buNone/>
-            </a:pPr>
-            <a:r>
-              <a:rPr lang="en-US" sz="1100" b="1" spc="200" kern="0" dirty="0">
-                <a:solidFill>
-                  <a:srgbClr val="E09F3E"/>
-                </a:solidFill>
-              </a:rPr>
-              <a:t>PYTHON</a:t>
-            </a:r>
-            <a:endParaRPr lang="en-US" sz="1100" dirty="0"/>
+              <a:t>df.shape</a:t>
+            </a:r>
+            <a:endParaRPr lang="en-US" sz="1600" dirty="0"/>
           </a:p>
         </p:txBody>
       </p:sp>
@@ -5230,180 +5563,8 @@
         </p:nvSpPr>
         <p:spPr>
           <a:xfrm>
-            <a:off x="777240" y="4617720"/>
-            <a:ext cx="5120640" cy="411480"/>
-          </a:xfrm>
-          <a:prstGeom prst="rect">
-            <a:avLst/>
-          </a:prstGeom>
-          <a:noFill/>
-          <a:ln/>
-        </p:spPr>
-        <p:txBody>
-          <a:bodyPr wrap="square" lIns="0" tIns="0" rIns="0" bIns="0" rtlCol="0" anchor="t"/>
-          <a:lstStyle/>
-          <a:p>
-            <a:pPr indent="0" marL="0">
-              <a:buNone/>
-            </a:pPr>
-            <a:r>
-              <a:rPr lang="en-US" sz="1800" dirty="0">
-                <a:solidFill>
-                  <a:srgbClr val="FFFFFF"/>
-                </a:solidFill>
-                <a:latin typeface="Courier New" pitchFamily="34" charset="0"/>
-                <a:ea typeface="Courier New" pitchFamily="34" charset="-122"/>
-                <a:cs typeface="Courier New" pitchFamily="34" charset="-120"/>
-              </a:rPr>
-              <a:t>df["fatturato"].max()</a:t>
-            </a:r>
-            <a:endParaRPr lang="en-US" sz="1800" dirty="0"/>
-          </a:p>
-        </p:txBody>
-      </p:sp>
-      <p:sp>
-        <p:nvSpPr>
-          <p:cNvPr id="12" name="card-out"/>
-          <p:cNvSpPr/>
-          <p:nvPr/>
-        </p:nvSpPr>
-        <p:spPr>
-          <a:xfrm>
-            <a:off x="548640" y="5303520"/>
-            <a:ext cx="5577840" cy="914400"/>
-          </a:xfrm>
-          <a:prstGeom prst="roundRect">
-            <a:avLst>
-              <a:gd name="adj" fmla="val 12000"/>
-            </a:avLst>
-          </a:prstGeom>
-          <a:solidFill>
-            <a:srgbClr val="EEF3F4"/>
-          </a:solidFill>
-          <a:ln/>
-        </p:spPr>
-      </p:sp>
-      <p:sp>
-        <p:nvSpPr>
-          <p:cNvPr id="13" name="Text 11"/>
-          <p:cNvSpPr txBox="1"/>
-          <p:nvPr/>
-        </p:nvSpPr>
-        <p:spPr>
-          <a:xfrm>
-            <a:off x="777240" y="5440680"/>
-            <a:ext cx="1828800" cy="274320"/>
-          </a:xfrm>
-          <a:prstGeom prst="rect">
-            <a:avLst/>
-          </a:prstGeom>
-          <a:noFill/>
-          <a:ln/>
-        </p:spPr>
-        <p:txBody>
-          <a:bodyPr wrap="square" lIns="0" tIns="0" rIns="0" bIns="0" rtlCol="0" anchor="ctr"/>
-          <a:lstStyle/>
-          <a:p>
-            <a:pPr indent="0" marL="0">
-              <a:buNone/>
-            </a:pPr>
-            <a:r>
-              <a:rPr lang="en-US" sz="1100" b="1" spc="200" kern="0" dirty="0">
-                <a:solidFill>
-                  <a:srgbClr val="5C6F7B"/>
-                </a:solidFill>
-              </a:rPr>
-              <a:t>OUTPUT</a:t>
-            </a:r>
-            <a:endParaRPr lang="en-US" sz="1100" dirty="0"/>
-          </a:p>
-        </p:txBody>
-      </p:sp>
-      <p:sp>
-        <p:nvSpPr>
-          <p:cNvPr id="14" name="Text 12"/>
-          <p:cNvSpPr txBox="1"/>
-          <p:nvPr/>
-        </p:nvSpPr>
-        <p:spPr>
-          <a:xfrm>
-            <a:off x="777240" y="5760720"/>
-            <a:ext cx="5120640" cy="320040"/>
-          </a:xfrm>
-          <a:prstGeom prst="rect">
-            <a:avLst/>
-          </a:prstGeom>
-          <a:noFill/>
-          <a:ln/>
-        </p:spPr>
-        <p:txBody>
-          <a:bodyPr wrap="square" lIns="0" tIns="0" rIns="0" bIns="0" rtlCol="0" anchor="t"/>
-          <a:lstStyle/>
-          <a:p>
-            <a:pPr indent="0" marL="0">
-              <a:buNone/>
-            </a:pPr>
-            <a:r>
-              <a:rPr lang="en-US" sz="1800" dirty="0">
-                <a:solidFill>
-                  <a:srgbClr val="1F2A30"/>
-                </a:solidFill>
-                <a:latin typeface="Courier New" pitchFamily="34" charset="0"/>
-                <a:ea typeface="Courier New" pitchFamily="34" charset="-122"/>
-                <a:cs typeface="Courier New" pitchFamily="34" charset="-120"/>
-              </a:rPr>
-              <a:t>'n.d.'</a:t>
-            </a:r>
-            <a:endParaRPr lang="en-US" sz="1800" dirty="0"/>
-          </a:p>
-        </p:txBody>
-      </p:sp>
-      <p:sp>
-        <p:nvSpPr>
-          <p:cNvPr id="15" name="Text 13"/>
-          <p:cNvSpPr txBox="1"/>
-          <p:nvPr/>
-        </p:nvSpPr>
-        <p:spPr>
-          <a:xfrm>
-            <a:off x="6675120" y="1737360"/>
-            <a:ext cx="4937760" cy="1280160"/>
-          </a:xfrm>
-          <a:prstGeom prst="rect">
-            <a:avLst/>
-          </a:prstGeom>
-          <a:noFill/>
-          <a:ln/>
-        </p:spPr>
-        <p:txBody>
-          <a:bodyPr wrap="square" lIns="0" tIns="0" rIns="0" bIns="0" rtlCol="0" anchor="t"/>
-          <a:lstStyle/>
-          <a:p>
-            <a:pPr indent="0" marL="0">
-              <a:buNone/>
-            </a:pPr>
-            <a:r>
-              <a:rPr lang="en-US" sz="2800" b="1" dirty="0">
-                <a:solidFill>
-                  <a:srgbClr val="9E2A2B"/>
-                </a:solidFill>
-              </a:rPr>
-              <a:t>La media si ferma con un errore. Il massimo no.</a:t>
-            </a:r>
-            <a:endParaRPr lang="en-US" sz="2800" dirty="0"/>
-          </a:p>
-        </p:txBody>
-      </p:sp>
-      <p:sp>
-        <p:nvSpPr>
-          <p:cNvPr id="16" name="Text 14"/>
-          <p:cNvSpPr txBox="1"/>
-          <p:nvPr/>
-        </p:nvSpPr>
-        <p:spPr>
-          <a:xfrm>
-            <a:off x="6675120" y="3200400"/>
-            <a:ext cx="4937760" cy="2926080"/>
+            <a:off x="8503920" y="1828800"/>
+            <a:ext cx="3108960" cy="3657600"/>
           </a:xfrm>
           <a:prstGeom prst="rect">
             <a:avLst/>
@@ -5422,12 +5583,12 @@
               <a:buNone/>
             </a:pPr>
             <a:r>
-              <a:rPr lang="en-US" sz="1800" dirty="0">
-                <a:solidFill>
-                  <a:srgbClr val="1F2A30"/>
-                </a:solidFill>
-              </a:rPr>
-              <a:t>Il massimo di un testo è in ordine alfabetico: «n» viene dopo le cifre.</a:t>
+              <a:rPr lang="en-US" sz="1800" b="1" dirty="0">
+                <a:solidFill>
+                  <a:srgbClr val="9E2A2B"/>
+                </a:solidFill>
+              </a:rPr>
+              <a:t>15 righe in più.</a:t>
             </a:r>
             <a:endParaRPr lang="en-US" sz="1800" dirty="0"/>
           </a:p>
@@ -5444,7 +5605,7 @@
                   <a:srgbClr val="1F2A30"/>
                 </a:solidFill>
               </a:rPr>
-              <a:t>Perché è testo? Il file usa la virgola decimale italiana (1.032,9) e contiene "n.d.".</a:t>
+              <a:t>Probabilmente duplicati: la stessa impresa, lo stesso anno, due volte.</a:t>
             </a:r>
             <a:endParaRPr lang="en-US" sz="1800" dirty="0"/>
           </a:p>
@@ -5456,12 +5617,12 @@
               <a:buNone/>
             </a:pPr>
             <a:r>
-              <a:rPr lang="en-US" sz="1800" b="1" dirty="0">
-                <a:solidFill>
-                  <a:srgbClr val="0F4C5C"/>
-                </a:solidFill>
-              </a:rPr>
-              <a:t>È la trappola "5000" * 2 della L1, su un file vero.</a:t>
+              <a:rPr lang="en-US" sz="1800" dirty="0">
+                <a:solidFill>
+                  <a:srgbClr val="1F2A30"/>
+                </a:solidFill>
+              </a:rPr>
+              <a:t>Un controllo da fare a mente, in 10 secondi. Nessun codice lo fa per te.</a:t>
             </a:r>
             <a:endParaRPr lang="en-US" sz="1800" dirty="0"/>
           </a:p>
@@ -5569,7 +5730,7 @@
                   <a:srgbClr val="0F4C5C"/>
                 </a:solidFill>
               </a:rPr>
-              <a:t>Lombardia non è lombardia</a:t>
+              <a:t>Il fatturato è testo</a:t>
             </a:r>
             <a:endParaRPr lang="en-US" sz="3600" dirty="0"/>
           </a:p>
@@ -5577,18 +5738,309 @@
       </p:sp>
       <p:sp>
         <p:nvSpPr>
-          <p:cNvPr id="3" name="card-out"/>
+          <p:cNvPr id="3" name="card-code"/>
           <p:cNvSpPr/>
           <p:nvPr/>
         </p:nvSpPr>
         <p:spPr>
           <a:xfrm>
             <a:off x="548640" y="1737360"/>
-            <a:ext cx="5577840" cy="3657600"/>
+            <a:ext cx="5577840" cy="1005840"/>
           </a:xfrm>
           <a:prstGeom prst="roundRect">
             <a:avLst>
-              <a:gd name="adj" fmla="val 3000"/>
+              <a:gd name="adj" fmla="val 10909"/>
+            </a:avLst>
+          </a:prstGeom>
+          <a:solidFill>
+            <a:srgbClr val="1F2A30"/>
+          </a:solidFill>
+          <a:ln/>
+        </p:spPr>
+      </p:sp>
+      <p:sp>
+        <p:nvSpPr>
+          <p:cNvPr id="4" name="Text 2"/>
+          <p:cNvSpPr txBox="1"/>
+          <p:nvPr/>
+        </p:nvSpPr>
+        <p:spPr>
+          <a:xfrm>
+            <a:off x="777240" y="1874520"/>
+            <a:ext cx="1828800" cy="274320"/>
+          </a:xfrm>
+          <a:prstGeom prst="rect">
+            <a:avLst/>
+          </a:prstGeom>
+          <a:noFill/>
+          <a:ln/>
+        </p:spPr>
+        <p:txBody>
+          <a:bodyPr wrap="square" lIns="0" tIns="0" rIns="0" bIns="0" rtlCol="0" anchor="ctr"/>
+          <a:lstStyle/>
+          <a:p>
+            <a:pPr indent="0" marL="0">
+              <a:buNone/>
+            </a:pPr>
+            <a:r>
+              <a:rPr lang="en-US" sz="1100" b="1" spc="200" kern="0" dirty="0">
+                <a:solidFill>
+                  <a:srgbClr val="E09F3E"/>
+                </a:solidFill>
+              </a:rPr>
+              <a:t>PYTHON</a:t>
+            </a:r>
+            <a:endParaRPr lang="en-US" sz="1100" dirty="0"/>
+          </a:p>
+        </p:txBody>
+      </p:sp>
+      <p:sp>
+        <p:nvSpPr>
+          <p:cNvPr id="5" name="Text 3"/>
+          <p:cNvSpPr txBox="1"/>
+          <p:nvPr/>
+        </p:nvSpPr>
+        <p:spPr>
+          <a:xfrm>
+            <a:off x="777240" y="2194560"/>
+            <a:ext cx="5120640" cy="411480"/>
+          </a:xfrm>
+          <a:prstGeom prst="rect">
+            <a:avLst/>
+          </a:prstGeom>
+          <a:noFill/>
+          <a:ln/>
+        </p:spPr>
+        <p:txBody>
+          <a:bodyPr wrap="square" lIns="0" tIns="0" rIns="0" bIns="0" rtlCol="0" anchor="t"/>
+          <a:lstStyle/>
+          <a:p>
+            <a:pPr indent="0" marL="0">
+              <a:buNone/>
+            </a:pPr>
+            <a:r>
+              <a:rPr lang="en-US" sz="1800" dirty="0">
+                <a:solidFill>
+                  <a:srgbClr val="FFFFFF"/>
+                </a:solidFill>
+                <a:latin typeface="Courier New" pitchFamily="34" charset="0"/>
+                <a:ea typeface="Courier New" pitchFamily="34" charset="-122"/>
+                <a:cs typeface="Courier New" pitchFamily="34" charset="-120"/>
+              </a:rPr>
+              <a:t>df["fatturato"].mean()</a:t>
+            </a:r>
+            <a:endParaRPr lang="en-US" sz="1800" dirty="0"/>
+          </a:p>
+        </p:txBody>
+      </p:sp>
+      <p:sp>
+        <p:nvSpPr>
+          <p:cNvPr id="6" name="card-err"/>
+          <p:cNvSpPr/>
+          <p:nvPr/>
+        </p:nvSpPr>
+        <p:spPr>
+          <a:xfrm>
+            <a:off x="548640" y="2880360"/>
+            <a:ext cx="5577840" cy="1097280"/>
+          </a:xfrm>
+          <a:prstGeom prst="roundRect">
+            <a:avLst>
+              <a:gd name="adj" fmla="val 10000"/>
+            </a:avLst>
+          </a:prstGeom>
+          <a:solidFill>
+            <a:srgbClr val="FBEAEA"/>
+          </a:solidFill>
+          <a:ln/>
+        </p:spPr>
+      </p:sp>
+      <p:sp>
+        <p:nvSpPr>
+          <p:cNvPr id="7" name="Text 5"/>
+          <p:cNvSpPr txBox="1"/>
+          <p:nvPr/>
+        </p:nvSpPr>
+        <p:spPr>
+          <a:xfrm>
+            <a:off x="777240" y="3017520"/>
+            <a:ext cx="1828800" cy="274320"/>
+          </a:xfrm>
+          <a:prstGeom prst="rect">
+            <a:avLst/>
+          </a:prstGeom>
+          <a:noFill/>
+          <a:ln/>
+        </p:spPr>
+        <p:txBody>
+          <a:bodyPr wrap="square" lIns="0" tIns="0" rIns="0" bIns="0" rtlCol="0" anchor="ctr"/>
+          <a:lstStyle/>
+          <a:p>
+            <a:pPr indent="0" marL="0">
+              <a:buNone/>
+            </a:pPr>
+            <a:r>
+              <a:rPr lang="en-US" sz="1100" b="1" spc="200" kern="0" dirty="0">
+                <a:solidFill>
+                  <a:srgbClr val="9E2A2B"/>
+                </a:solidFill>
+              </a:rPr>
+              <a:t>ERRORE</a:t>
+            </a:r>
+            <a:endParaRPr lang="en-US" sz="1100" dirty="0"/>
+          </a:p>
+        </p:txBody>
+      </p:sp>
+      <p:sp>
+        <p:nvSpPr>
+          <p:cNvPr id="8" name="Text 6"/>
+          <p:cNvSpPr txBox="1"/>
+          <p:nvPr/>
+        </p:nvSpPr>
+        <p:spPr>
+          <a:xfrm>
+            <a:off x="777240" y="3337560"/>
+            <a:ext cx="5120640" cy="502920"/>
+          </a:xfrm>
+          <a:prstGeom prst="rect">
+            <a:avLst/>
+          </a:prstGeom>
+          <a:noFill/>
+          <a:ln/>
+        </p:spPr>
+        <p:txBody>
+          <a:bodyPr wrap="square" lIns="0" tIns="0" rIns="0" bIns="0" rtlCol="0" anchor="t"/>
+          <a:lstStyle/>
+          <a:p>
+            <a:pPr indent="0" marL="0">
+              <a:buNone/>
+            </a:pPr>
+            <a:r>
+              <a:rPr lang="en-US" sz="1800" dirty="0">
+                <a:solidFill>
+                  <a:srgbClr val="9E2A2B"/>
+                </a:solidFill>
+                <a:latin typeface="Courier New" pitchFamily="34" charset="0"/>
+                <a:ea typeface="Courier New" pitchFamily="34" charset="-122"/>
+                <a:cs typeface="Courier New" pitchFamily="34" charset="-120"/>
+              </a:rPr>
+              <a:t>TypeError: ... string ...</a:t>
+            </a:r>
+            <a:endParaRPr lang="en-US" sz="1800" dirty="0"/>
+          </a:p>
+        </p:txBody>
+      </p:sp>
+      <p:sp>
+        <p:nvSpPr>
+          <p:cNvPr id="9" name="card-code"/>
+          <p:cNvSpPr/>
+          <p:nvPr/>
+        </p:nvSpPr>
+        <p:spPr>
+          <a:xfrm>
+            <a:off x="548640" y="4160520"/>
+            <a:ext cx="5577840" cy="1005840"/>
+          </a:xfrm>
+          <a:prstGeom prst="roundRect">
+            <a:avLst>
+              <a:gd name="adj" fmla="val 10909"/>
+            </a:avLst>
+          </a:prstGeom>
+          <a:solidFill>
+            <a:srgbClr val="1F2A30"/>
+          </a:solidFill>
+          <a:ln/>
+        </p:spPr>
+      </p:sp>
+      <p:sp>
+        <p:nvSpPr>
+          <p:cNvPr id="10" name="Text 8"/>
+          <p:cNvSpPr txBox="1"/>
+          <p:nvPr/>
+        </p:nvSpPr>
+        <p:spPr>
+          <a:xfrm>
+            <a:off x="777240" y="4297680"/>
+            <a:ext cx="1828800" cy="274320"/>
+          </a:xfrm>
+          <a:prstGeom prst="rect">
+            <a:avLst/>
+          </a:prstGeom>
+          <a:noFill/>
+          <a:ln/>
+        </p:spPr>
+        <p:txBody>
+          <a:bodyPr wrap="square" lIns="0" tIns="0" rIns="0" bIns="0" rtlCol="0" anchor="ctr"/>
+          <a:lstStyle/>
+          <a:p>
+            <a:pPr indent="0" marL="0">
+              <a:buNone/>
+            </a:pPr>
+            <a:r>
+              <a:rPr lang="en-US" sz="1100" b="1" spc="200" kern="0" dirty="0">
+                <a:solidFill>
+                  <a:srgbClr val="E09F3E"/>
+                </a:solidFill>
+              </a:rPr>
+              <a:t>PYTHON</a:t>
+            </a:r>
+            <a:endParaRPr lang="en-US" sz="1100" dirty="0"/>
+          </a:p>
+        </p:txBody>
+      </p:sp>
+      <p:sp>
+        <p:nvSpPr>
+          <p:cNvPr id="11" name="Text 9"/>
+          <p:cNvSpPr txBox="1"/>
+          <p:nvPr/>
+        </p:nvSpPr>
+        <p:spPr>
+          <a:xfrm>
+            <a:off x="777240" y="4617720"/>
+            <a:ext cx="5120640" cy="411480"/>
+          </a:xfrm>
+          <a:prstGeom prst="rect">
+            <a:avLst/>
+          </a:prstGeom>
+          <a:noFill/>
+          <a:ln/>
+        </p:spPr>
+        <p:txBody>
+          <a:bodyPr wrap="square" lIns="0" tIns="0" rIns="0" bIns="0" rtlCol="0" anchor="t"/>
+          <a:lstStyle/>
+          <a:p>
+            <a:pPr indent="0" marL="0">
+              <a:buNone/>
+            </a:pPr>
+            <a:r>
+              <a:rPr lang="en-US" sz="1800" dirty="0">
+                <a:solidFill>
+                  <a:srgbClr val="FFFFFF"/>
+                </a:solidFill>
+                <a:latin typeface="Courier New" pitchFamily="34" charset="0"/>
+                <a:ea typeface="Courier New" pitchFamily="34" charset="-122"/>
+                <a:cs typeface="Courier New" pitchFamily="34" charset="-120"/>
+              </a:rPr>
+              <a:t>df["fatturato"].max()</a:t>
+            </a:r>
+            <a:endParaRPr lang="en-US" sz="1800" dirty="0"/>
+          </a:p>
+        </p:txBody>
+      </p:sp>
+      <p:sp>
+        <p:nvSpPr>
+          <p:cNvPr id="12" name="card-out"/>
+          <p:cNvSpPr/>
+          <p:nvPr/>
+        </p:nvSpPr>
+        <p:spPr>
+          <a:xfrm>
+            <a:off x="548640" y="5303520"/>
+            <a:ext cx="5577840" cy="914400"/>
+          </a:xfrm>
+          <a:prstGeom prst="roundRect">
+            <a:avLst>
+              <a:gd name="adj" fmla="val 12000"/>
             </a:avLst>
           </a:prstGeom>
           <a:solidFill>
@@ -5599,13 +6051,13 @@
       </p:sp>
       <p:sp>
         <p:nvSpPr>
-          <p:cNvPr id="4" name="Text 2"/>
-          <p:cNvSpPr txBox="1"/>
-          <p:nvPr/>
-        </p:nvSpPr>
-        <p:spPr>
-          <a:xfrm>
-            <a:off x="777240" y="1874520"/>
+          <p:cNvPr id="13" name="Text 11"/>
+          <p:cNvSpPr txBox="1"/>
+          <p:nvPr/>
+        </p:nvSpPr>
+        <p:spPr>
+          <a:xfrm>
+            <a:off x="777240" y="5440680"/>
             <a:ext cx="1828800" cy="274320"/>
           </a:xfrm>
           <a:prstGeom prst="rect">
@@ -5635,14 +6087,14 @@
       </p:sp>
       <p:sp>
         <p:nvSpPr>
-          <p:cNvPr id="5" name="Text 3"/>
-          <p:cNvSpPr txBox="1"/>
-          <p:nvPr/>
-        </p:nvSpPr>
-        <p:spPr>
-          <a:xfrm>
-            <a:off x="777240" y="2194560"/>
-            <a:ext cx="5120640" cy="3063240"/>
+          <p:cNvPr id="14" name="Text 12"/>
+          <p:cNvSpPr txBox="1"/>
+          <p:nvPr/>
+        </p:nvSpPr>
+        <p:spPr>
+          <a:xfrm>
+            <a:off x="777240" y="5760720"/>
+            <a:ext cx="5120640" cy="320040"/>
           </a:xfrm>
           <a:prstGeom prst="rect">
             <a:avLst/>
@@ -5666,124 +6118,58 @@
                 <a:ea typeface="Courier New" pitchFamily="34" charset="-122"/>
                 <a:cs typeface="Courier New" pitchFamily="34" charset="-120"/>
               </a:rPr>
-              <a:t>Lombardia      302</a:t>
+              <a:t>'n.d.'</a:t>
             </a:r>
             <a:endParaRPr lang="en-US" sz="1800" dirty="0"/>
           </a:p>
+        </p:txBody>
+      </p:sp>
+      <p:sp>
+        <p:nvSpPr>
+          <p:cNvPr id="15" name="Text 13"/>
+          <p:cNvSpPr txBox="1"/>
+          <p:nvPr/>
+        </p:nvSpPr>
+        <p:spPr>
+          <a:xfrm>
+            <a:off x="6675120" y="1737360"/>
+            <a:ext cx="4937760" cy="1280160"/>
+          </a:xfrm>
+          <a:prstGeom prst="rect">
+            <a:avLst/>
+          </a:prstGeom>
+          <a:noFill/>
+          <a:ln/>
+        </p:spPr>
+        <p:txBody>
+          <a:bodyPr wrap="square" lIns="0" tIns="0" rIns="0" bIns="0" rtlCol="0" anchor="t"/>
+          <a:lstStyle/>
           <a:p>
             <a:pPr indent="0" marL="0">
               <a:buNone/>
             </a:pPr>
             <a:r>
-              <a:rPr lang="en-US" sz="1800" dirty="0">
-                <a:solidFill>
-                  <a:srgbClr val="1F2A30"/>
-                </a:solidFill>
-                <a:latin typeface="Courier New" pitchFamily="34" charset="0"/>
-                <a:ea typeface="Courier New" pitchFamily="34" charset="-122"/>
-                <a:cs typeface="Courier New" pitchFamily="34" charset="-120"/>
-              </a:rPr>
-              <a:t>...</a:t>
-            </a:r>
-            <a:endParaRPr lang="en-US" sz="1800" dirty="0"/>
-          </a:p>
-          <a:p>
-            <a:pPr indent="0" marL="0">
-              <a:buNone/>
-            </a:pPr>
-            <a:r>
-              <a:rPr lang="en-US" sz="1800" dirty="0">
-                <a:solidFill>
-                  <a:srgbClr val="1F2A30"/>
-                </a:solidFill>
-                <a:latin typeface="Courier New" pitchFamily="34" charset="0"/>
-                <a:ea typeface="Courier New" pitchFamily="34" charset="-122"/>
-                <a:cs typeface="Courier New" pitchFamily="34" charset="-120"/>
-              </a:rPr>
-              <a:t>lombardia       35</a:t>
-            </a:r>
-            <a:endParaRPr lang="en-US" sz="1800" dirty="0"/>
-          </a:p>
-          <a:p>
-            <a:pPr indent="0" marL="0">
-              <a:buNone/>
-            </a:pPr>
-            <a:r>
-              <a:rPr lang="en-US" sz="1800" dirty="0">
-                <a:solidFill>
-                  <a:srgbClr val="1F2A30"/>
-                </a:solidFill>
-                <a:latin typeface="Courier New" pitchFamily="34" charset="0"/>
-                <a:ea typeface="Courier New" pitchFamily="34" charset="-122"/>
-                <a:cs typeface="Courier New" pitchFamily="34" charset="-120"/>
-              </a:rPr>
-              <a:t>Lombardia       30</a:t>
-            </a:r>
-            <a:endParaRPr lang="en-US" sz="1800" dirty="0"/>
-          </a:p>
-          <a:p>
-            <a:pPr indent="0" marL="0">
-              <a:buNone/>
-            </a:pPr>
-            <a:r>
-              <a:rPr lang="en-US" sz="1800" dirty="0">
-                <a:solidFill>
-                  <a:srgbClr val="1F2A30"/>
-                </a:solidFill>
-                <a:latin typeface="Courier New" pitchFamily="34" charset="0"/>
-                <a:ea typeface="Courier New" pitchFamily="34" charset="-122"/>
-                <a:cs typeface="Courier New" pitchFamily="34" charset="-120"/>
-              </a:rPr>
-              <a:t>LOMBARDIA       30</a:t>
-            </a:r>
-            <a:endParaRPr lang="en-US" sz="1800" dirty="0"/>
-          </a:p>
-          <a:p>
-            <a:pPr indent="0" marL="0">
-              <a:buNone/>
-            </a:pPr>
-            <a:r>
-              <a:rPr lang="en-US" sz="1800" dirty="0">
-                <a:solidFill>
-                  <a:srgbClr val="1F2A30"/>
-                </a:solidFill>
-                <a:latin typeface="Courier New" pitchFamily="34" charset="0"/>
-                <a:ea typeface="Courier New" pitchFamily="34" charset="-122"/>
-                <a:cs typeface="Courier New" pitchFamily="34" charset="-120"/>
-              </a:rPr>
-              <a:t>Emilia-Romagna 147</a:t>
-            </a:r>
-            <a:endParaRPr lang="en-US" sz="1800" dirty="0"/>
-          </a:p>
-          <a:p>
-            <a:pPr indent="0" marL="0">
-              <a:buNone/>
-            </a:pPr>
-            <a:r>
-              <a:rPr lang="en-US" sz="1800" dirty="0">
-                <a:solidFill>
-                  <a:srgbClr val="1F2A30"/>
-                </a:solidFill>
-                <a:latin typeface="Courier New" pitchFamily="34" charset="0"/>
-                <a:ea typeface="Courier New" pitchFamily="34" charset="-122"/>
-                <a:cs typeface="Courier New" pitchFamily="34" charset="-120"/>
-              </a:rPr>
-              <a:t>Emilia Romagna  46</a:t>
-            </a:r>
-            <a:endParaRPr lang="en-US" sz="1800" dirty="0"/>
-          </a:p>
-        </p:txBody>
-      </p:sp>
-      <p:sp>
-        <p:nvSpPr>
-          <p:cNvPr id="6" name="Text 4"/>
-          <p:cNvSpPr txBox="1"/>
-          <p:nvPr/>
-        </p:nvSpPr>
-        <p:spPr>
-          <a:xfrm>
-            <a:off x="6675120" y="1828800"/>
-            <a:ext cx="4937760" cy="3657600"/>
+              <a:rPr lang="en-US" sz="2800" b="1" dirty="0">
+                <a:solidFill>
+                  <a:srgbClr val="9E2A2B"/>
+                </a:solidFill>
+              </a:rPr>
+              <a:t>La media si ferma con un errore. Il massimo no.</a:t>
+            </a:r>
+            <a:endParaRPr lang="en-US" sz="2800" dirty="0"/>
+          </a:p>
+        </p:txBody>
+      </p:sp>
+      <p:sp>
+        <p:nvSpPr>
+          <p:cNvPr id="16" name="Text 14"/>
+          <p:cNvSpPr txBox="1"/>
+          <p:nvPr/>
+        </p:nvSpPr>
+        <p:spPr>
+          <a:xfrm>
+            <a:off x="6675120" y="3200400"/>
+            <a:ext cx="4937760" cy="2926080"/>
           </a:xfrm>
           <a:prstGeom prst="rect">
             <a:avLst/>
@@ -5802,14 +6188,14 @@
               <a:buNone/>
             </a:pPr>
             <a:r>
-              <a:rPr lang="en-US" sz="1900" dirty="0">
+              <a:rPr lang="en-US" sz="1800" dirty="0">
                 <a:solidFill>
                   <a:srgbClr val="1F2A30"/>
                 </a:solidFill>
               </a:rPr>
-              <a:t>Per Python sono valori diversi: maiuscole, spazi finali, trattini.</a:t>
-            </a:r>
-            <a:endParaRPr lang="en-US" sz="1900" dirty="0"/>
+              <a:t>Il massimo di un testo è in ordine alfabetico: «n» viene dopo le cifre.</a:t>
+            </a:r>
+            <a:endParaRPr lang="en-US" sz="1800" dirty="0"/>
           </a:p>
           <a:p>
             <a:pPr indent="0" marL="0">
@@ -5819,14 +6205,14 @@
               <a:buNone/>
             </a:pPr>
             <a:r>
-              <a:rPr lang="en-US" sz="1900" dirty="0">
+              <a:rPr lang="en-US" sz="1800" dirty="0">
                 <a:solidFill>
                   <a:srgbClr val="1F2A30"/>
                 </a:solidFill>
               </a:rPr>
-              <a:t>Le due «Lombardia» uguali? Una ha uno spazio alla fine: non si vede, ma c'è.</a:t>
-            </a:r>
-            <a:endParaRPr lang="en-US" sz="1900" dirty="0"/>
+              <a:t>Perché è testo? Il file usa la virgola decimale italiana (1.032,9) e contiene "n.d.".</a:t>
+            </a:r>
+            <a:endParaRPr lang="en-US" sz="1800" dirty="0"/>
           </a:p>
           <a:p>
             <a:pPr indent="0" marL="0">
@@ -5836,14 +6222,14 @@
               <a:buNone/>
             </a:pPr>
             <a:r>
-              <a:rPr lang="en-US" sz="1900" b="1" dirty="0">
-                <a:solidFill>
-                  <a:srgbClr val="9E2A2B"/>
-                </a:solidFill>
-              </a:rPr>
-              <a:t>Se raggruppi per regione così com'è, la Lombardia viene spezzata in quattro.</a:t>
-            </a:r>
-            <a:endParaRPr lang="en-US" sz="1900" dirty="0"/>
+              <a:rPr lang="en-US" sz="1800" b="1" dirty="0">
+                <a:solidFill>
+                  <a:srgbClr val="0F4C5C"/>
+                </a:solidFill>
+              </a:rPr>
+              <a:t>È la trappola "5000" * 2 della L1, su un file vero.</a:t>
+            </a:r>
+            <a:endParaRPr lang="en-US" sz="1800" dirty="0"/>
           </a:p>
         </p:txBody>
       </p:sp>
@@ -5949,7 +6335,7 @@
                   <a:srgbClr val="0F4C5C"/>
                 </a:solidFill>
               </a:rPr>
-              <a:t>Cosa abbiamo trovato</a:t>
+              <a:t>Lombardia non è lombardia</a:t>
             </a:r>
             <a:endParaRPr lang="en-US" sz="3600" dirty="0"/>
           </a:p>
@@ -5957,18 +6343,18 @@
       </p:sp>
       <p:sp>
         <p:nvSpPr>
-          <p:cNvPr id="3" name="Shape 1"/>
+          <p:cNvPr id="3" name="card-out"/>
           <p:cNvSpPr/>
           <p:nvPr/>
         </p:nvSpPr>
         <p:spPr>
           <a:xfrm>
             <a:off x="548640" y="1737360"/>
-            <a:ext cx="5440680" cy="1645920"/>
+            <a:ext cx="5577840" cy="3657600"/>
           </a:xfrm>
           <a:prstGeom prst="roundRect">
             <a:avLst>
-              <a:gd name="adj" fmla="val 6667"/>
+              <a:gd name="adj" fmla="val 3000"/>
             </a:avLst>
           </a:prstGeom>
           <a:solidFill>
@@ -5979,58 +6365,14 @@
       </p:sp>
       <p:sp>
         <p:nvSpPr>
-          <p:cNvPr id="4" name="Shape 2"/>
-          <p:cNvSpPr/>
-          <p:nvPr/>
-        </p:nvSpPr>
-        <p:spPr>
-          <a:xfrm>
-            <a:off x="822960" y="2103120"/>
-            <a:ext cx="914400" cy="914400"/>
-          </a:xfrm>
-          <a:prstGeom prst="ellipse">
-            <a:avLst/>
-          </a:prstGeom>
-          <a:solidFill>
-            <a:srgbClr val="FFFFFF"/>
-          </a:solidFill>
-          <a:ln/>
-        </p:spPr>
-      </p:sp>
-      <p:pic>
-        <p:nvPicPr>
-          <p:cNvPr id="5" name="Image 0" descr="preencoded.png">    </p:cNvPr>
-          <p:cNvPicPr>
-            <a:picLocks noChangeAspect="1"/>
-          </p:cNvPicPr>
-          <p:nvPr/>
-        </p:nvPicPr>
-        <p:blipFill>
-          <a:blip r:embed="rId1"/>
-          <a:stretch>
-            <a:fillRect/>
-          </a:stretch>
-        </p:blipFill>
-        <p:spPr>
-          <a:xfrm>
-            <a:off x="1069848" y="2350008"/>
-            <a:ext cx="420624" cy="420624"/>
-          </a:xfrm>
-          <a:prstGeom prst="rect">
-            <a:avLst/>
-          </a:prstGeom>
-        </p:spPr>
-      </p:pic>
-      <p:sp>
-        <p:nvSpPr>
-          <p:cNvPr id="6" name="Text 3"/>
-          <p:cNvSpPr txBox="1"/>
-          <p:nvPr/>
-        </p:nvSpPr>
-        <p:spPr>
-          <a:xfrm>
-            <a:off x="2011680" y="2103120"/>
-            <a:ext cx="3749040" cy="457200"/>
+          <p:cNvPr id="4" name="Text 2"/>
+          <p:cNvSpPr txBox="1"/>
+          <p:nvPr/>
+        </p:nvSpPr>
+        <p:spPr>
+          <a:xfrm>
+            <a:off x="777240" y="1874520"/>
+            <a:ext cx="1828800" cy="274320"/>
           </a:xfrm>
           <a:prstGeom prst="rect">
             <a:avLst/>
@@ -6046,27 +6388,168 @@
               <a:buNone/>
             </a:pPr>
             <a:r>
-              <a:rPr lang="en-US" sz="2200" b="1" dirty="0">
+              <a:rPr lang="en-US" sz="1100" b="1" spc="200" kern="0" dirty="0">
+                <a:solidFill>
+                  <a:srgbClr val="5C6F7B"/>
+                </a:solidFill>
+              </a:rPr>
+              <a:t>OUTPUT</a:t>
+            </a:r>
+            <a:endParaRPr lang="en-US" sz="1100" dirty="0"/>
+          </a:p>
+        </p:txBody>
+      </p:sp>
+      <p:sp>
+        <p:nvSpPr>
+          <p:cNvPr id="5" name="Text 3"/>
+          <p:cNvSpPr txBox="1"/>
+          <p:nvPr/>
+        </p:nvSpPr>
+        <p:spPr>
+          <a:xfrm>
+            <a:off x="777240" y="2194560"/>
+            <a:ext cx="5120640" cy="3063240"/>
+          </a:xfrm>
+          <a:prstGeom prst="rect">
+            <a:avLst/>
+          </a:prstGeom>
+          <a:noFill/>
+          <a:ln/>
+        </p:spPr>
+        <p:txBody>
+          <a:bodyPr wrap="square" lIns="0" tIns="0" rIns="0" bIns="0" rtlCol="0" anchor="t"/>
+          <a:lstStyle/>
+          <a:p>
+            <a:pPr indent="0" marL="0">
+              <a:buNone/>
+            </a:pPr>
+            <a:r>
+              <a:rPr lang="en-US" sz="1800" dirty="0">
                 <a:solidFill>
                   <a:srgbClr val="1F2A30"/>
                 </a:solidFill>
-              </a:rPr>
-              <a:t>Fatturato come testo</a:t>
-            </a:r>
-            <a:endParaRPr lang="en-US" sz="2200" dirty="0"/>
-          </a:p>
-        </p:txBody>
-      </p:sp>
-      <p:sp>
-        <p:nvSpPr>
-          <p:cNvPr id="7" name="Text 4"/>
-          <p:cNvSpPr txBox="1"/>
-          <p:nvPr/>
-        </p:nvSpPr>
-        <p:spPr>
-          <a:xfrm>
-            <a:off x="2011680" y="2560320"/>
-            <a:ext cx="3749040" cy="548640"/>
+                <a:latin typeface="Courier New" pitchFamily="34" charset="0"/>
+                <a:ea typeface="Courier New" pitchFamily="34" charset="-122"/>
+                <a:cs typeface="Courier New" pitchFamily="34" charset="-120"/>
+              </a:rPr>
+              <a:t>Lombardia      302</a:t>
+            </a:r>
+            <a:endParaRPr lang="en-US" sz="1800" dirty="0"/>
+          </a:p>
+          <a:p>
+            <a:pPr indent="0" marL="0">
+              <a:buNone/>
+            </a:pPr>
+            <a:r>
+              <a:rPr lang="en-US" sz="1800" dirty="0">
+                <a:solidFill>
+                  <a:srgbClr val="1F2A30"/>
+                </a:solidFill>
+                <a:latin typeface="Courier New" pitchFamily="34" charset="0"/>
+                <a:ea typeface="Courier New" pitchFamily="34" charset="-122"/>
+                <a:cs typeface="Courier New" pitchFamily="34" charset="-120"/>
+              </a:rPr>
+              <a:t>...</a:t>
+            </a:r>
+            <a:endParaRPr lang="en-US" sz="1800" dirty="0"/>
+          </a:p>
+          <a:p>
+            <a:pPr indent="0" marL="0">
+              <a:buNone/>
+            </a:pPr>
+            <a:r>
+              <a:rPr lang="en-US" sz="1800" dirty="0">
+                <a:solidFill>
+                  <a:srgbClr val="1F2A30"/>
+                </a:solidFill>
+                <a:latin typeface="Courier New" pitchFamily="34" charset="0"/>
+                <a:ea typeface="Courier New" pitchFamily="34" charset="-122"/>
+                <a:cs typeface="Courier New" pitchFamily="34" charset="-120"/>
+              </a:rPr>
+              <a:t>lombardia       35</a:t>
+            </a:r>
+            <a:endParaRPr lang="en-US" sz="1800" dirty="0"/>
+          </a:p>
+          <a:p>
+            <a:pPr indent="0" marL="0">
+              <a:buNone/>
+            </a:pPr>
+            <a:r>
+              <a:rPr lang="en-US" sz="1800" dirty="0">
+                <a:solidFill>
+                  <a:srgbClr val="1F2A30"/>
+                </a:solidFill>
+                <a:latin typeface="Courier New" pitchFamily="34" charset="0"/>
+                <a:ea typeface="Courier New" pitchFamily="34" charset="-122"/>
+                <a:cs typeface="Courier New" pitchFamily="34" charset="-120"/>
+              </a:rPr>
+              <a:t>Lombardia       30</a:t>
+            </a:r>
+            <a:endParaRPr lang="en-US" sz="1800" dirty="0"/>
+          </a:p>
+          <a:p>
+            <a:pPr indent="0" marL="0">
+              <a:buNone/>
+            </a:pPr>
+            <a:r>
+              <a:rPr lang="en-US" sz="1800" dirty="0">
+                <a:solidFill>
+                  <a:srgbClr val="1F2A30"/>
+                </a:solidFill>
+                <a:latin typeface="Courier New" pitchFamily="34" charset="0"/>
+                <a:ea typeface="Courier New" pitchFamily="34" charset="-122"/>
+                <a:cs typeface="Courier New" pitchFamily="34" charset="-120"/>
+              </a:rPr>
+              <a:t>LOMBARDIA       30</a:t>
+            </a:r>
+            <a:endParaRPr lang="en-US" sz="1800" dirty="0"/>
+          </a:p>
+          <a:p>
+            <a:pPr indent="0" marL="0">
+              <a:buNone/>
+            </a:pPr>
+            <a:r>
+              <a:rPr lang="en-US" sz="1800" dirty="0">
+                <a:solidFill>
+                  <a:srgbClr val="1F2A30"/>
+                </a:solidFill>
+                <a:latin typeface="Courier New" pitchFamily="34" charset="0"/>
+                <a:ea typeface="Courier New" pitchFamily="34" charset="-122"/>
+                <a:cs typeface="Courier New" pitchFamily="34" charset="-120"/>
+              </a:rPr>
+              <a:t>Emilia-Romagna 147</a:t>
+            </a:r>
+            <a:endParaRPr lang="en-US" sz="1800" dirty="0"/>
+          </a:p>
+          <a:p>
+            <a:pPr indent="0" marL="0">
+              <a:buNone/>
+            </a:pPr>
+            <a:r>
+              <a:rPr lang="en-US" sz="1800" dirty="0">
+                <a:solidFill>
+                  <a:srgbClr val="1F2A30"/>
+                </a:solidFill>
+                <a:latin typeface="Courier New" pitchFamily="34" charset="0"/>
+                <a:ea typeface="Courier New" pitchFamily="34" charset="-122"/>
+                <a:cs typeface="Courier New" pitchFamily="34" charset="-120"/>
+              </a:rPr>
+              <a:t>Emilia Romagna  46</a:t>
+            </a:r>
+            <a:endParaRPr lang="en-US" sz="1800" dirty="0"/>
+          </a:p>
+        </p:txBody>
+      </p:sp>
+      <p:sp>
+        <p:nvSpPr>
+          <p:cNvPr id="6" name="Text 4"/>
+          <p:cNvSpPr txBox="1"/>
+          <p:nvPr/>
+        </p:nvSpPr>
+        <p:spPr>
+          <a:xfrm>
+            <a:off x="6675120" y="1828800"/>
+            <a:ext cx="4937760" cy="3657600"/>
           </a:xfrm>
           <a:prstGeom prst="rect">
             <a:avLst/>
@@ -6079,467 +6562,54 @@
           <a:lstStyle/>
           <a:p>
             <a:pPr indent="0" marL="0">
-              <a:buNone/>
-            </a:pPr>
-            <a:r>
-              <a:rPr lang="en-US" sz="1600" dirty="0">
-                <a:solidFill>
-                  <a:srgbClr val="5C6F7B"/>
-                </a:solidFill>
-              </a:rPr>
-              <a:t>virgola decimale e "n.d."</a:t>
-            </a:r>
-            <a:endParaRPr lang="en-US" sz="1600" dirty="0"/>
-          </a:p>
-        </p:txBody>
-      </p:sp>
-      <p:sp>
-        <p:nvSpPr>
-          <p:cNvPr id="8" name="Shape 5"/>
-          <p:cNvSpPr/>
-          <p:nvPr/>
-        </p:nvSpPr>
-        <p:spPr>
-          <a:xfrm>
-            <a:off x="6172200" y="1737360"/>
-            <a:ext cx="5440680" cy="1645920"/>
-          </a:xfrm>
-          <a:prstGeom prst="roundRect">
-            <a:avLst>
-              <a:gd name="adj" fmla="val 6667"/>
-            </a:avLst>
-          </a:prstGeom>
-          <a:solidFill>
-            <a:srgbClr val="EEF3F4"/>
-          </a:solidFill>
-          <a:ln/>
-        </p:spPr>
-      </p:sp>
-      <p:sp>
-        <p:nvSpPr>
-          <p:cNvPr id="9" name="Shape 6"/>
-          <p:cNvSpPr/>
-          <p:nvPr/>
-        </p:nvSpPr>
-        <p:spPr>
-          <a:xfrm>
-            <a:off x="6446520" y="2103120"/>
-            <a:ext cx="914400" cy="914400"/>
-          </a:xfrm>
-          <a:prstGeom prst="ellipse">
-            <a:avLst/>
-          </a:prstGeom>
-          <a:solidFill>
-            <a:srgbClr val="FFFFFF"/>
-          </a:solidFill>
-          <a:ln/>
-        </p:spPr>
-      </p:sp>
-      <p:pic>
-        <p:nvPicPr>
-          <p:cNvPr id="10" name="Image 1" descr="preencoded.png">    </p:cNvPr>
-          <p:cNvPicPr>
-            <a:picLocks noChangeAspect="1"/>
-          </p:cNvPicPr>
-          <p:nvPr/>
-        </p:nvPicPr>
-        <p:blipFill>
-          <a:blip r:embed="rId2"/>
-          <a:stretch>
-            <a:fillRect/>
-          </a:stretch>
-        </p:blipFill>
-        <p:spPr>
-          <a:xfrm>
-            <a:off x="6693408" y="2350008"/>
-            <a:ext cx="420624" cy="420624"/>
-          </a:xfrm>
-          <a:prstGeom prst="rect">
-            <a:avLst/>
-          </a:prstGeom>
-        </p:spPr>
-      </p:pic>
-      <p:sp>
-        <p:nvSpPr>
-          <p:cNvPr id="11" name="Text 7"/>
-          <p:cNvSpPr txBox="1"/>
-          <p:nvPr/>
-        </p:nvSpPr>
-        <p:spPr>
-          <a:xfrm>
-            <a:off x="7635240" y="2103120"/>
-            <a:ext cx="3749040" cy="457200"/>
-          </a:xfrm>
-          <a:prstGeom prst="rect">
-            <a:avLst/>
-          </a:prstGeom>
-          <a:noFill/>
-          <a:ln/>
-        </p:spPr>
-        <p:txBody>
-          <a:bodyPr wrap="square" lIns="0" tIns="0" rIns="0" bIns="0" rtlCol="0" anchor="ctr"/>
-          <a:lstStyle/>
+              <a:spcAft>
+                <a:spcPts val="1000"/>
+              </a:spcAft>
+              <a:buNone/>
+            </a:pPr>
+            <a:r>
+              <a:rPr lang="en-US" sz="1900" dirty="0">
+                <a:solidFill>
+                  <a:srgbClr val="1F2A30"/>
+                </a:solidFill>
+              </a:rPr>
+              <a:t>Per Python sono valori diversi: maiuscole, spazi finali, trattini.</a:t>
+            </a:r>
+            <a:endParaRPr lang="en-US" sz="1900" dirty="0"/>
+          </a:p>
           <a:p>
             <a:pPr indent="0" marL="0">
-              <a:buNone/>
-            </a:pPr>
-            <a:r>
-              <a:rPr lang="en-US" sz="2200" b="1" dirty="0">
+              <a:spcAft>
+                <a:spcPts val="1000"/>
+              </a:spcAft>
+              <a:buNone/>
+            </a:pPr>
+            <a:r>
+              <a:rPr lang="en-US" sz="1900" dirty="0">
                 <a:solidFill>
                   <a:srgbClr val="1F2A30"/>
                 </a:solidFill>
               </a:rPr>
-              <a:t>15 righe in più</a:t>
-            </a:r>
-            <a:endParaRPr lang="en-US" sz="2200" dirty="0"/>
-          </a:p>
-        </p:txBody>
-      </p:sp>
-      <p:sp>
-        <p:nvSpPr>
-          <p:cNvPr id="12" name="Text 8"/>
-          <p:cNvSpPr txBox="1"/>
-          <p:nvPr/>
-        </p:nvSpPr>
-        <p:spPr>
-          <a:xfrm>
-            <a:off x="7635240" y="2560320"/>
-            <a:ext cx="3749040" cy="548640"/>
-          </a:xfrm>
-          <a:prstGeom prst="rect">
-            <a:avLst/>
-          </a:prstGeom>
-          <a:noFill/>
-          <a:ln/>
-        </p:spPr>
-        <p:txBody>
-          <a:bodyPr wrap="square" lIns="0" tIns="0" rIns="0" bIns="0" rtlCol="0" anchor="t"/>
-          <a:lstStyle/>
+              <a:t>Le due «Lombardia» uguali? Una ha uno spazio alla fine: non si vede, ma c'è.</a:t>
+            </a:r>
+            <a:endParaRPr lang="en-US" sz="1900" dirty="0"/>
+          </a:p>
           <a:p>
             <a:pPr indent="0" marL="0">
-              <a:buNone/>
-            </a:pPr>
-            <a:r>
-              <a:rPr lang="en-US" sz="1600" dirty="0">
-                <a:solidFill>
-                  <a:srgbClr val="5C6F7B"/>
-                </a:solidFill>
-              </a:rPr>
-              <a:t>probabili duplicati</a:t>
-            </a:r>
-            <a:endParaRPr lang="en-US" sz="1600" dirty="0"/>
-          </a:p>
-        </p:txBody>
-      </p:sp>
-      <p:sp>
-        <p:nvSpPr>
-          <p:cNvPr id="13" name="Shape 9"/>
-          <p:cNvSpPr/>
-          <p:nvPr/>
-        </p:nvSpPr>
-        <p:spPr>
-          <a:xfrm>
-            <a:off x="548640" y="3657600"/>
-            <a:ext cx="5440680" cy="1645920"/>
-          </a:xfrm>
-          <a:prstGeom prst="roundRect">
-            <a:avLst>
-              <a:gd name="adj" fmla="val 6667"/>
-            </a:avLst>
-          </a:prstGeom>
-          <a:solidFill>
-            <a:srgbClr val="EEF3F4"/>
-          </a:solidFill>
-          <a:ln/>
-        </p:spPr>
-      </p:sp>
-      <p:sp>
-        <p:nvSpPr>
-          <p:cNvPr id="14" name="Shape 10"/>
-          <p:cNvSpPr/>
-          <p:nvPr/>
-        </p:nvSpPr>
-        <p:spPr>
-          <a:xfrm>
-            <a:off x="822960" y="4023360"/>
-            <a:ext cx="914400" cy="914400"/>
-          </a:xfrm>
-          <a:prstGeom prst="ellipse">
-            <a:avLst/>
-          </a:prstGeom>
-          <a:solidFill>
-            <a:srgbClr val="FFFFFF"/>
-          </a:solidFill>
-          <a:ln/>
-        </p:spPr>
-      </p:sp>
-      <p:pic>
-        <p:nvPicPr>
-          <p:cNvPr id="15" name="Image 2" descr="preencoded.png">    </p:cNvPr>
-          <p:cNvPicPr>
-            <a:picLocks noChangeAspect="1"/>
-          </p:cNvPicPr>
-          <p:nvPr/>
-        </p:nvPicPr>
-        <p:blipFill>
-          <a:blip r:embed="rId3"/>
-          <a:stretch>
-            <a:fillRect/>
-          </a:stretch>
-        </p:blipFill>
-        <p:spPr>
-          <a:xfrm>
-            <a:off x="1069848" y="4270248"/>
-            <a:ext cx="420624" cy="420624"/>
-          </a:xfrm>
-          <a:prstGeom prst="rect">
-            <a:avLst/>
-          </a:prstGeom>
-        </p:spPr>
-      </p:pic>
-      <p:sp>
-        <p:nvSpPr>
-          <p:cNvPr id="16" name="Text 11"/>
-          <p:cNvSpPr txBox="1"/>
-          <p:nvPr/>
-        </p:nvSpPr>
-        <p:spPr>
-          <a:xfrm>
-            <a:off x="2011680" y="4023360"/>
-            <a:ext cx="3749040" cy="457200"/>
-          </a:xfrm>
-          <a:prstGeom prst="rect">
-            <a:avLst/>
-          </a:prstGeom>
-          <a:noFill/>
-          <a:ln/>
-        </p:spPr>
-        <p:txBody>
-          <a:bodyPr wrap="square" lIns="0" tIns="0" rIns="0" bIns="0" rtlCol="0" anchor="ctr"/>
-          <a:lstStyle/>
-          <a:p>
-            <a:pPr indent="0" marL="0">
-              <a:buNone/>
-            </a:pPr>
-            <a:r>
-              <a:rPr lang="en-US" sz="2200" b="1" dirty="0">
-                <a:solidFill>
-                  <a:srgbClr val="1F2A30"/>
-                </a:solidFill>
-              </a:rPr>
-              <a:t>Regioni scritte male</a:t>
-            </a:r>
-            <a:endParaRPr lang="en-US" sz="2200" dirty="0"/>
-          </a:p>
-        </p:txBody>
-      </p:sp>
-      <p:sp>
-        <p:nvSpPr>
-          <p:cNvPr id="17" name="Text 12"/>
-          <p:cNvSpPr txBox="1"/>
-          <p:nvPr/>
-        </p:nvSpPr>
-        <p:spPr>
-          <a:xfrm>
-            <a:off x="2011680" y="4480560"/>
-            <a:ext cx="3749040" cy="548640"/>
-          </a:xfrm>
-          <a:prstGeom prst="rect">
-            <a:avLst/>
-          </a:prstGeom>
-          <a:noFill/>
-          <a:ln/>
-        </p:spPr>
-        <p:txBody>
-          <a:bodyPr wrap="square" lIns="0" tIns="0" rIns="0" bIns="0" rtlCol="0" anchor="t"/>
-          <a:lstStyle/>
-          <a:p>
-            <a:pPr indent="0" marL="0">
-              <a:buNone/>
-            </a:pPr>
-            <a:r>
-              <a:rPr lang="en-US" sz="1600" dirty="0">
-                <a:solidFill>
-                  <a:srgbClr val="5C6F7B"/>
-                </a:solidFill>
-              </a:rPr>
-              <a:t>maiuscole, spazi, trattini</a:t>
-            </a:r>
-            <a:endParaRPr lang="en-US" sz="1600" dirty="0"/>
-          </a:p>
-        </p:txBody>
-      </p:sp>
-      <p:sp>
-        <p:nvSpPr>
-          <p:cNvPr id="18" name="Shape 13"/>
-          <p:cNvSpPr/>
-          <p:nvPr/>
-        </p:nvSpPr>
-        <p:spPr>
-          <a:xfrm>
-            <a:off x="6172200" y="3657600"/>
-            <a:ext cx="5440680" cy="1645920"/>
-          </a:xfrm>
-          <a:prstGeom prst="roundRect">
-            <a:avLst>
-              <a:gd name="adj" fmla="val 6667"/>
-            </a:avLst>
-          </a:prstGeom>
-          <a:solidFill>
-            <a:srgbClr val="EEF3F4"/>
-          </a:solidFill>
-          <a:ln/>
-        </p:spPr>
-      </p:sp>
-      <p:sp>
-        <p:nvSpPr>
-          <p:cNvPr id="19" name="Shape 14"/>
-          <p:cNvSpPr/>
-          <p:nvPr/>
-        </p:nvSpPr>
-        <p:spPr>
-          <a:xfrm>
-            <a:off x="6446520" y="4023360"/>
-            <a:ext cx="914400" cy="914400"/>
-          </a:xfrm>
-          <a:prstGeom prst="ellipse">
-            <a:avLst/>
-          </a:prstGeom>
-          <a:solidFill>
-            <a:srgbClr val="FFFFFF"/>
-          </a:solidFill>
-          <a:ln/>
-        </p:spPr>
-      </p:sp>
-      <p:pic>
-        <p:nvPicPr>
-          <p:cNvPr id="20" name="Image 3" descr="preencoded.png">    </p:cNvPr>
-          <p:cNvPicPr>
-            <a:picLocks noChangeAspect="1"/>
-          </p:cNvPicPr>
-          <p:nvPr/>
-        </p:nvPicPr>
-        <p:blipFill>
-          <a:blip r:embed="rId4"/>
-          <a:stretch>
-            <a:fillRect/>
-          </a:stretch>
-        </p:blipFill>
-        <p:spPr>
-          <a:xfrm>
-            <a:off x="6693408" y="4270248"/>
-            <a:ext cx="420624" cy="420624"/>
-          </a:xfrm>
-          <a:prstGeom prst="rect">
-            <a:avLst/>
-          </a:prstGeom>
-        </p:spPr>
-      </p:pic>
-      <p:sp>
-        <p:nvSpPr>
-          <p:cNvPr id="21" name="Text 15"/>
-          <p:cNvSpPr txBox="1"/>
-          <p:nvPr/>
-        </p:nvSpPr>
-        <p:spPr>
-          <a:xfrm>
-            <a:off x="7635240" y="4023360"/>
-            <a:ext cx="3749040" cy="457200"/>
-          </a:xfrm>
-          <a:prstGeom prst="rect">
-            <a:avLst/>
-          </a:prstGeom>
-          <a:noFill/>
-          <a:ln/>
-        </p:spPr>
-        <p:txBody>
-          <a:bodyPr wrap="square" lIns="0" tIns="0" rIns="0" bIns="0" rtlCol="0" anchor="ctr"/>
-          <a:lstStyle/>
-          <a:p>
-            <a:pPr indent="0" marL="0">
-              <a:buNone/>
-            </a:pPr>
-            <a:r>
-              <a:rPr lang="en-US" sz="2200" b="1" dirty="0">
-                <a:solidFill>
-                  <a:srgbClr val="1F2A30"/>
-                </a:solidFill>
-              </a:rPr>
-              <a:t>Addetti negativi</a:t>
-            </a:r>
-            <a:endParaRPr lang="en-US" sz="2200" dirty="0"/>
-          </a:p>
-        </p:txBody>
-      </p:sp>
-      <p:sp>
-        <p:nvSpPr>
-          <p:cNvPr id="22" name="Text 16"/>
-          <p:cNvSpPr txBox="1"/>
-          <p:nvPr/>
-        </p:nvSpPr>
-        <p:spPr>
-          <a:xfrm>
-            <a:off x="7635240" y="4480560"/>
-            <a:ext cx="3749040" cy="548640"/>
-          </a:xfrm>
-          <a:prstGeom prst="rect">
-            <a:avLst/>
-          </a:prstGeom>
-          <a:noFill/>
-          <a:ln/>
-        </p:spPr>
-        <p:txBody>
-          <a:bodyPr wrap="square" lIns="0" tIns="0" rIns="0" bIns="0" rtlCol="0" anchor="t"/>
-          <a:lstStyle/>
-          <a:p>
-            <a:pPr indent="0" marL="0">
-              <a:buNone/>
-            </a:pPr>
-            <a:r>
-              <a:rPr lang="en-US" sz="1600" dirty="0">
-                <a:solidFill>
-                  <a:srgbClr val="5C6F7B"/>
-                </a:solidFill>
-              </a:rPr>
-              <a:t>-12: impossibile (bonus)</a:t>
-            </a:r>
-            <a:endParaRPr lang="en-US" sz="1600" dirty="0"/>
-          </a:p>
-        </p:txBody>
-      </p:sp>
-      <p:sp>
-        <p:nvSpPr>
-          <p:cNvPr id="23" name="Text 17"/>
-          <p:cNvSpPr txBox="1"/>
-          <p:nvPr/>
-        </p:nvSpPr>
-        <p:spPr>
-          <a:xfrm>
-            <a:off x="548640" y="5623560"/>
-            <a:ext cx="11064240" cy="457200"/>
-          </a:xfrm>
-          <a:prstGeom prst="rect">
-            <a:avLst/>
-          </a:prstGeom>
-          <a:noFill/>
-          <a:ln/>
-        </p:spPr>
-        <p:txBody>
-          <a:bodyPr wrap="square" lIns="0" tIns="0" rIns="0" bIns="0" rtlCol="0" anchor="ctr"/>
-          <a:lstStyle/>
-          <a:p>
-            <a:pPr indent="0" marL="0">
-              <a:buNone/>
-            </a:pPr>
-            <a:r>
-              <a:rPr lang="en-US" sz="1800" i="1" dirty="0">
-                <a:solidFill>
-                  <a:srgbClr val="0F4C5C"/>
-                </a:solidFill>
-              </a:rPr>
-              <a:t>Solo uno di questi problemi ha prodotto un errore. Gli altri erano silenziosi.</a:t>
-            </a:r>
-            <a:endParaRPr lang="en-US" sz="1800" dirty="0"/>
+              <a:spcAft>
+                <a:spcPts val="1000"/>
+              </a:spcAft>
+              <a:buNone/>
+            </a:pPr>
+            <a:r>
+              <a:rPr lang="en-US" sz="1900" b="1" dirty="0">
+                <a:solidFill>
+                  <a:srgbClr val="9E2A2B"/>
+                </a:solidFill>
+              </a:rPr>
+              <a:t>Se raggruppi per regione così com'è, la Lombardia viene spezzata in quattro.</a:t>
+            </a:r>
+            <a:endParaRPr lang="en-US" sz="1900" dirty="0"/>
           </a:p>
         </p:txBody>
       </p:sp>
@@ -6599,6 +6669,702 @@
 <file path=ppt/slides/slide18.xml><?xml version="1.0" encoding="utf-8"?>
 <p:sld xmlns:a="http://schemas.openxmlformats.org/drawingml/2006/main" xmlns:r="http://schemas.openxmlformats.org/officeDocument/2006/relationships" xmlns:p="http://schemas.openxmlformats.org/presentationml/2006/main">
   <p:cSld name="Slide 18">
+    <p:spTree>
+      <p:nvGrpSpPr>
+        <p:cNvPr id="1" name=""/>
+        <p:cNvGrpSpPr/>
+        <p:nvPr/>
+      </p:nvGrpSpPr>
+      <p:grpSpPr>
+        <a:xfrm>
+          <a:off x="0" y="0"/>
+          <a:ext cx="0" cy="0"/>
+          <a:chOff x="0" y="0"/>
+          <a:chExt cx="0" cy="0"/>
+        </a:xfrm>
+      </p:grpSpPr>
+      <p:sp>
+        <p:nvSpPr>
+          <p:cNvPr id="2" name="Text 0"/>
+          <p:cNvSpPr/>
+          <p:nvPr>
+            <p:ph idx="100" type="title" hasCustomPrompt="1"/>
+          </p:nvPr>
+        </p:nvSpPr>
+        <p:spPr>
+          <a:xfrm>
+            <a:off x="548640" y="365760"/>
+            <a:ext cx="11064240" cy="822960"/>
+          </a:xfrm>
+          <a:prstGeom prst="rect">
+            <a:avLst/>
+          </a:prstGeom>
+          <a:noFill/>
+          <a:ln/>
+        </p:spPr>
+        <p:txBody>
+          <a:bodyPr wrap="square" lIns="0" tIns="0" rIns="0" bIns="0" rtlCol="0" anchor="ctr"/>
+          <a:lstStyle/>
+          <a:p>
+            <a:pPr algn="l" indent="0" marL="0">
+              <a:buNone/>
+            </a:pPr>
+            <a:r>
+              <a:rPr lang="en-US" sz="3600" b="1" dirty="0">
+                <a:solidFill>
+                  <a:srgbClr val="0F4C5C"/>
+                </a:solidFill>
+              </a:rPr>
+              <a:t>Cosa abbiamo trovato</a:t>
+            </a:r>
+            <a:endParaRPr lang="en-US" sz="3600" dirty="0"/>
+          </a:p>
+        </p:txBody>
+      </p:sp>
+      <p:sp>
+        <p:nvSpPr>
+          <p:cNvPr id="3" name="Shape 1"/>
+          <p:cNvSpPr/>
+          <p:nvPr/>
+        </p:nvSpPr>
+        <p:spPr>
+          <a:xfrm>
+            <a:off x="548640" y="1737360"/>
+            <a:ext cx="5440680" cy="1645920"/>
+          </a:xfrm>
+          <a:prstGeom prst="roundRect">
+            <a:avLst>
+              <a:gd name="adj" fmla="val 6667"/>
+            </a:avLst>
+          </a:prstGeom>
+          <a:solidFill>
+            <a:srgbClr val="EEF3F4"/>
+          </a:solidFill>
+          <a:ln/>
+        </p:spPr>
+      </p:sp>
+      <p:sp>
+        <p:nvSpPr>
+          <p:cNvPr id="4" name="Shape 2"/>
+          <p:cNvSpPr/>
+          <p:nvPr/>
+        </p:nvSpPr>
+        <p:spPr>
+          <a:xfrm>
+            <a:off x="822960" y="2103120"/>
+            <a:ext cx="914400" cy="914400"/>
+          </a:xfrm>
+          <a:prstGeom prst="ellipse">
+            <a:avLst/>
+          </a:prstGeom>
+          <a:solidFill>
+            <a:srgbClr val="FFFFFF"/>
+          </a:solidFill>
+          <a:ln/>
+        </p:spPr>
+      </p:sp>
+      <p:pic>
+        <p:nvPicPr>
+          <p:cNvPr id="5" name="Image 0" descr="preencoded.png">    </p:cNvPr>
+          <p:cNvPicPr>
+            <a:picLocks noChangeAspect="1"/>
+          </p:cNvPicPr>
+          <p:nvPr/>
+        </p:nvPicPr>
+        <p:blipFill>
+          <a:blip r:embed="rId1"/>
+          <a:stretch>
+            <a:fillRect/>
+          </a:stretch>
+        </p:blipFill>
+        <p:spPr>
+          <a:xfrm>
+            <a:off x="1069848" y="2350008"/>
+            <a:ext cx="420624" cy="420624"/>
+          </a:xfrm>
+          <a:prstGeom prst="rect">
+            <a:avLst/>
+          </a:prstGeom>
+        </p:spPr>
+      </p:pic>
+      <p:sp>
+        <p:nvSpPr>
+          <p:cNvPr id="6" name="Text 3"/>
+          <p:cNvSpPr txBox="1"/>
+          <p:nvPr/>
+        </p:nvSpPr>
+        <p:spPr>
+          <a:xfrm>
+            <a:off x="2011680" y="2103120"/>
+            <a:ext cx="3749040" cy="457200"/>
+          </a:xfrm>
+          <a:prstGeom prst="rect">
+            <a:avLst/>
+          </a:prstGeom>
+          <a:noFill/>
+          <a:ln/>
+        </p:spPr>
+        <p:txBody>
+          <a:bodyPr wrap="square" lIns="0" tIns="0" rIns="0" bIns="0" rtlCol="0" anchor="ctr"/>
+          <a:lstStyle/>
+          <a:p>
+            <a:pPr indent="0" marL="0">
+              <a:buNone/>
+            </a:pPr>
+            <a:r>
+              <a:rPr lang="en-US" sz="2200" b="1" dirty="0">
+                <a:solidFill>
+                  <a:srgbClr val="1F2A30"/>
+                </a:solidFill>
+              </a:rPr>
+              <a:t>Fatturato come testo</a:t>
+            </a:r>
+            <a:endParaRPr lang="en-US" sz="2200" dirty="0"/>
+          </a:p>
+        </p:txBody>
+      </p:sp>
+      <p:sp>
+        <p:nvSpPr>
+          <p:cNvPr id="7" name="Text 4"/>
+          <p:cNvSpPr txBox="1"/>
+          <p:nvPr/>
+        </p:nvSpPr>
+        <p:spPr>
+          <a:xfrm>
+            <a:off x="2011680" y="2560320"/>
+            <a:ext cx="3749040" cy="548640"/>
+          </a:xfrm>
+          <a:prstGeom prst="rect">
+            <a:avLst/>
+          </a:prstGeom>
+          <a:noFill/>
+          <a:ln/>
+        </p:spPr>
+        <p:txBody>
+          <a:bodyPr wrap="square" lIns="0" tIns="0" rIns="0" bIns="0" rtlCol="0" anchor="t"/>
+          <a:lstStyle/>
+          <a:p>
+            <a:pPr indent="0" marL="0">
+              <a:buNone/>
+            </a:pPr>
+            <a:r>
+              <a:rPr lang="en-US" sz="1600" dirty="0">
+                <a:solidFill>
+                  <a:srgbClr val="5C6F7B"/>
+                </a:solidFill>
+              </a:rPr>
+              <a:t>virgola decimale e "n.d."</a:t>
+            </a:r>
+            <a:endParaRPr lang="en-US" sz="1600" dirty="0"/>
+          </a:p>
+        </p:txBody>
+      </p:sp>
+      <p:sp>
+        <p:nvSpPr>
+          <p:cNvPr id="8" name="Shape 5"/>
+          <p:cNvSpPr/>
+          <p:nvPr/>
+        </p:nvSpPr>
+        <p:spPr>
+          <a:xfrm>
+            <a:off x="6172200" y="1737360"/>
+            <a:ext cx="5440680" cy="1645920"/>
+          </a:xfrm>
+          <a:prstGeom prst="roundRect">
+            <a:avLst>
+              <a:gd name="adj" fmla="val 6667"/>
+            </a:avLst>
+          </a:prstGeom>
+          <a:solidFill>
+            <a:srgbClr val="EEF3F4"/>
+          </a:solidFill>
+          <a:ln/>
+        </p:spPr>
+      </p:sp>
+      <p:sp>
+        <p:nvSpPr>
+          <p:cNvPr id="9" name="Shape 6"/>
+          <p:cNvSpPr/>
+          <p:nvPr/>
+        </p:nvSpPr>
+        <p:spPr>
+          <a:xfrm>
+            <a:off x="6446520" y="2103120"/>
+            <a:ext cx="914400" cy="914400"/>
+          </a:xfrm>
+          <a:prstGeom prst="ellipse">
+            <a:avLst/>
+          </a:prstGeom>
+          <a:solidFill>
+            <a:srgbClr val="FFFFFF"/>
+          </a:solidFill>
+          <a:ln/>
+        </p:spPr>
+      </p:sp>
+      <p:pic>
+        <p:nvPicPr>
+          <p:cNvPr id="10" name="Image 1" descr="preencoded.png">    </p:cNvPr>
+          <p:cNvPicPr>
+            <a:picLocks noChangeAspect="1"/>
+          </p:cNvPicPr>
+          <p:nvPr/>
+        </p:nvPicPr>
+        <p:blipFill>
+          <a:blip r:embed="rId2"/>
+          <a:stretch>
+            <a:fillRect/>
+          </a:stretch>
+        </p:blipFill>
+        <p:spPr>
+          <a:xfrm>
+            <a:off x="6693408" y="2350008"/>
+            <a:ext cx="420624" cy="420624"/>
+          </a:xfrm>
+          <a:prstGeom prst="rect">
+            <a:avLst/>
+          </a:prstGeom>
+        </p:spPr>
+      </p:pic>
+      <p:sp>
+        <p:nvSpPr>
+          <p:cNvPr id="11" name="Text 7"/>
+          <p:cNvSpPr txBox="1"/>
+          <p:nvPr/>
+        </p:nvSpPr>
+        <p:spPr>
+          <a:xfrm>
+            <a:off x="7635240" y="2103120"/>
+            <a:ext cx="3749040" cy="457200"/>
+          </a:xfrm>
+          <a:prstGeom prst="rect">
+            <a:avLst/>
+          </a:prstGeom>
+          <a:noFill/>
+          <a:ln/>
+        </p:spPr>
+        <p:txBody>
+          <a:bodyPr wrap="square" lIns="0" tIns="0" rIns="0" bIns="0" rtlCol="0" anchor="ctr"/>
+          <a:lstStyle/>
+          <a:p>
+            <a:pPr indent="0" marL="0">
+              <a:buNone/>
+            </a:pPr>
+            <a:r>
+              <a:rPr lang="en-US" sz="2200" b="1" dirty="0">
+                <a:solidFill>
+                  <a:srgbClr val="1F2A30"/>
+                </a:solidFill>
+              </a:rPr>
+              <a:t>15 righe in più</a:t>
+            </a:r>
+            <a:endParaRPr lang="en-US" sz="2200" dirty="0"/>
+          </a:p>
+        </p:txBody>
+      </p:sp>
+      <p:sp>
+        <p:nvSpPr>
+          <p:cNvPr id="12" name="Text 8"/>
+          <p:cNvSpPr txBox="1"/>
+          <p:nvPr/>
+        </p:nvSpPr>
+        <p:spPr>
+          <a:xfrm>
+            <a:off x="7635240" y="2560320"/>
+            <a:ext cx="3749040" cy="548640"/>
+          </a:xfrm>
+          <a:prstGeom prst="rect">
+            <a:avLst/>
+          </a:prstGeom>
+          <a:noFill/>
+          <a:ln/>
+        </p:spPr>
+        <p:txBody>
+          <a:bodyPr wrap="square" lIns="0" tIns="0" rIns="0" bIns="0" rtlCol="0" anchor="t"/>
+          <a:lstStyle/>
+          <a:p>
+            <a:pPr indent="0" marL="0">
+              <a:buNone/>
+            </a:pPr>
+            <a:r>
+              <a:rPr lang="en-US" sz="1600" dirty="0">
+                <a:solidFill>
+                  <a:srgbClr val="5C6F7B"/>
+                </a:solidFill>
+              </a:rPr>
+              <a:t>probabili duplicati</a:t>
+            </a:r>
+            <a:endParaRPr lang="en-US" sz="1600" dirty="0"/>
+          </a:p>
+        </p:txBody>
+      </p:sp>
+      <p:sp>
+        <p:nvSpPr>
+          <p:cNvPr id="13" name="Shape 9"/>
+          <p:cNvSpPr/>
+          <p:nvPr/>
+        </p:nvSpPr>
+        <p:spPr>
+          <a:xfrm>
+            <a:off x="548640" y="3657600"/>
+            <a:ext cx="5440680" cy="1645920"/>
+          </a:xfrm>
+          <a:prstGeom prst="roundRect">
+            <a:avLst>
+              <a:gd name="adj" fmla="val 6667"/>
+            </a:avLst>
+          </a:prstGeom>
+          <a:solidFill>
+            <a:srgbClr val="EEF3F4"/>
+          </a:solidFill>
+          <a:ln/>
+        </p:spPr>
+      </p:sp>
+      <p:sp>
+        <p:nvSpPr>
+          <p:cNvPr id="14" name="Shape 10"/>
+          <p:cNvSpPr/>
+          <p:nvPr/>
+        </p:nvSpPr>
+        <p:spPr>
+          <a:xfrm>
+            <a:off x="822960" y="4023360"/>
+            <a:ext cx="914400" cy="914400"/>
+          </a:xfrm>
+          <a:prstGeom prst="ellipse">
+            <a:avLst/>
+          </a:prstGeom>
+          <a:solidFill>
+            <a:srgbClr val="FFFFFF"/>
+          </a:solidFill>
+          <a:ln/>
+        </p:spPr>
+      </p:sp>
+      <p:pic>
+        <p:nvPicPr>
+          <p:cNvPr id="15" name="Image 2" descr="preencoded.png">    </p:cNvPr>
+          <p:cNvPicPr>
+            <a:picLocks noChangeAspect="1"/>
+          </p:cNvPicPr>
+          <p:nvPr/>
+        </p:nvPicPr>
+        <p:blipFill>
+          <a:blip r:embed="rId3"/>
+          <a:stretch>
+            <a:fillRect/>
+          </a:stretch>
+        </p:blipFill>
+        <p:spPr>
+          <a:xfrm>
+            <a:off x="1069848" y="4270248"/>
+            <a:ext cx="420624" cy="420624"/>
+          </a:xfrm>
+          <a:prstGeom prst="rect">
+            <a:avLst/>
+          </a:prstGeom>
+        </p:spPr>
+      </p:pic>
+      <p:sp>
+        <p:nvSpPr>
+          <p:cNvPr id="16" name="Text 11"/>
+          <p:cNvSpPr txBox="1"/>
+          <p:nvPr/>
+        </p:nvSpPr>
+        <p:spPr>
+          <a:xfrm>
+            <a:off x="2011680" y="4023360"/>
+            <a:ext cx="3749040" cy="457200"/>
+          </a:xfrm>
+          <a:prstGeom prst="rect">
+            <a:avLst/>
+          </a:prstGeom>
+          <a:noFill/>
+          <a:ln/>
+        </p:spPr>
+        <p:txBody>
+          <a:bodyPr wrap="square" lIns="0" tIns="0" rIns="0" bIns="0" rtlCol="0" anchor="ctr"/>
+          <a:lstStyle/>
+          <a:p>
+            <a:pPr indent="0" marL="0">
+              <a:buNone/>
+            </a:pPr>
+            <a:r>
+              <a:rPr lang="en-US" sz="2200" b="1" dirty="0">
+                <a:solidFill>
+                  <a:srgbClr val="1F2A30"/>
+                </a:solidFill>
+              </a:rPr>
+              <a:t>Regioni scritte male</a:t>
+            </a:r>
+            <a:endParaRPr lang="en-US" sz="2200" dirty="0"/>
+          </a:p>
+        </p:txBody>
+      </p:sp>
+      <p:sp>
+        <p:nvSpPr>
+          <p:cNvPr id="17" name="Text 12"/>
+          <p:cNvSpPr txBox="1"/>
+          <p:nvPr/>
+        </p:nvSpPr>
+        <p:spPr>
+          <a:xfrm>
+            <a:off x="2011680" y="4480560"/>
+            <a:ext cx="3749040" cy="548640"/>
+          </a:xfrm>
+          <a:prstGeom prst="rect">
+            <a:avLst/>
+          </a:prstGeom>
+          <a:noFill/>
+          <a:ln/>
+        </p:spPr>
+        <p:txBody>
+          <a:bodyPr wrap="square" lIns="0" tIns="0" rIns="0" bIns="0" rtlCol="0" anchor="t"/>
+          <a:lstStyle/>
+          <a:p>
+            <a:pPr indent="0" marL="0">
+              <a:buNone/>
+            </a:pPr>
+            <a:r>
+              <a:rPr lang="en-US" sz="1600" dirty="0">
+                <a:solidFill>
+                  <a:srgbClr val="5C6F7B"/>
+                </a:solidFill>
+              </a:rPr>
+              <a:t>maiuscole, spazi, trattini</a:t>
+            </a:r>
+            <a:endParaRPr lang="en-US" sz="1600" dirty="0"/>
+          </a:p>
+        </p:txBody>
+      </p:sp>
+      <p:sp>
+        <p:nvSpPr>
+          <p:cNvPr id="18" name="Shape 13"/>
+          <p:cNvSpPr/>
+          <p:nvPr/>
+        </p:nvSpPr>
+        <p:spPr>
+          <a:xfrm>
+            <a:off x="6172200" y="3657600"/>
+            <a:ext cx="5440680" cy="1645920"/>
+          </a:xfrm>
+          <a:prstGeom prst="roundRect">
+            <a:avLst>
+              <a:gd name="adj" fmla="val 6667"/>
+            </a:avLst>
+          </a:prstGeom>
+          <a:solidFill>
+            <a:srgbClr val="EEF3F4"/>
+          </a:solidFill>
+          <a:ln/>
+        </p:spPr>
+      </p:sp>
+      <p:sp>
+        <p:nvSpPr>
+          <p:cNvPr id="19" name="Shape 14"/>
+          <p:cNvSpPr/>
+          <p:nvPr/>
+        </p:nvSpPr>
+        <p:spPr>
+          <a:xfrm>
+            <a:off x="6446520" y="4023360"/>
+            <a:ext cx="914400" cy="914400"/>
+          </a:xfrm>
+          <a:prstGeom prst="ellipse">
+            <a:avLst/>
+          </a:prstGeom>
+          <a:solidFill>
+            <a:srgbClr val="FFFFFF"/>
+          </a:solidFill>
+          <a:ln/>
+        </p:spPr>
+      </p:sp>
+      <p:pic>
+        <p:nvPicPr>
+          <p:cNvPr id="20" name="Image 3" descr="preencoded.png">    </p:cNvPr>
+          <p:cNvPicPr>
+            <a:picLocks noChangeAspect="1"/>
+          </p:cNvPicPr>
+          <p:nvPr/>
+        </p:nvPicPr>
+        <p:blipFill>
+          <a:blip r:embed="rId4"/>
+          <a:stretch>
+            <a:fillRect/>
+          </a:stretch>
+        </p:blipFill>
+        <p:spPr>
+          <a:xfrm>
+            <a:off x="6693408" y="4270248"/>
+            <a:ext cx="420624" cy="420624"/>
+          </a:xfrm>
+          <a:prstGeom prst="rect">
+            <a:avLst/>
+          </a:prstGeom>
+        </p:spPr>
+      </p:pic>
+      <p:sp>
+        <p:nvSpPr>
+          <p:cNvPr id="21" name="Text 15"/>
+          <p:cNvSpPr txBox="1"/>
+          <p:nvPr/>
+        </p:nvSpPr>
+        <p:spPr>
+          <a:xfrm>
+            <a:off x="7635240" y="4023360"/>
+            <a:ext cx="3749040" cy="457200"/>
+          </a:xfrm>
+          <a:prstGeom prst="rect">
+            <a:avLst/>
+          </a:prstGeom>
+          <a:noFill/>
+          <a:ln/>
+        </p:spPr>
+        <p:txBody>
+          <a:bodyPr wrap="square" lIns="0" tIns="0" rIns="0" bIns="0" rtlCol="0" anchor="ctr"/>
+          <a:lstStyle/>
+          <a:p>
+            <a:pPr indent="0" marL="0">
+              <a:buNone/>
+            </a:pPr>
+            <a:r>
+              <a:rPr lang="en-US" sz="2200" b="1" dirty="0">
+                <a:solidFill>
+                  <a:srgbClr val="1F2A30"/>
+                </a:solidFill>
+              </a:rPr>
+              <a:t>Addetti negativi</a:t>
+            </a:r>
+            <a:endParaRPr lang="en-US" sz="2200" dirty="0"/>
+          </a:p>
+        </p:txBody>
+      </p:sp>
+      <p:sp>
+        <p:nvSpPr>
+          <p:cNvPr id="22" name="Text 16"/>
+          <p:cNvSpPr txBox="1"/>
+          <p:nvPr/>
+        </p:nvSpPr>
+        <p:spPr>
+          <a:xfrm>
+            <a:off x="7635240" y="4480560"/>
+            <a:ext cx="3749040" cy="548640"/>
+          </a:xfrm>
+          <a:prstGeom prst="rect">
+            <a:avLst/>
+          </a:prstGeom>
+          <a:noFill/>
+          <a:ln/>
+        </p:spPr>
+        <p:txBody>
+          <a:bodyPr wrap="square" lIns="0" tIns="0" rIns="0" bIns="0" rtlCol="0" anchor="t"/>
+          <a:lstStyle/>
+          <a:p>
+            <a:pPr indent="0" marL="0">
+              <a:buNone/>
+            </a:pPr>
+            <a:r>
+              <a:rPr lang="en-US" sz="1600" dirty="0">
+                <a:solidFill>
+                  <a:srgbClr val="5C6F7B"/>
+                </a:solidFill>
+              </a:rPr>
+              <a:t>-12: impossibile (bonus)</a:t>
+            </a:r>
+            <a:endParaRPr lang="en-US" sz="1600" dirty="0"/>
+          </a:p>
+        </p:txBody>
+      </p:sp>
+      <p:sp>
+        <p:nvSpPr>
+          <p:cNvPr id="23" name="Text 17"/>
+          <p:cNvSpPr txBox="1"/>
+          <p:nvPr/>
+        </p:nvSpPr>
+        <p:spPr>
+          <a:xfrm>
+            <a:off x="548640" y="5623560"/>
+            <a:ext cx="11064240" cy="457200"/>
+          </a:xfrm>
+          <a:prstGeom prst="rect">
+            <a:avLst/>
+          </a:prstGeom>
+          <a:noFill/>
+          <a:ln/>
+        </p:spPr>
+        <p:txBody>
+          <a:bodyPr wrap="square" lIns="0" tIns="0" rIns="0" bIns="0" rtlCol="0" anchor="ctr"/>
+          <a:lstStyle/>
+          <a:p>
+            <a:pPr indent="0" marL="0">
+              <a:buNone/>
+            </a:pPr>
+            <a:r>
+              <a:rPr lang="en-US" sz="1800" i="1" dirty="0">
+                <a:solidFill>
+                  <a:srgbClr val="0F4C5C"/>
+                </a:solidFill>
+              </a:rPr>
+              <a:t>Solo uno di questi problemi ha prodotto un errore. Gli altri erano silenziosi.</a:t>
+            </a:r>
+            <a:endParaRPr lang="en-US" sz="1800" dirty="0"/>
+          </a:p>
+        </p:txBody>
+      </p:sp>
+      <p:sp>
+        <p:nvSpPr>
+          <p:cNvPr id="25" name="Slide Number Placeholder 0"/>
+          <p:cNvSpPr>
+            <a:spLocks noGrp="1"/>
+          </p:cNvSpPr>
+          <p:nvPr>
+            <p:ph type="sldNum" sz="quarter" idx="4294967295"/>
+          </p:nvPr>
+        </p:nvSpPr>
+        <p:spPr>
+          <a:xfrm>
+            <a:off x="11155680" y="6400800"/>
+            <a:ext cx="457200" cy="274320"/>
+          </a:xfrm>
+          <a:prstGeom prst="rect">
+            <a:avLst/>
+          </a:prstGeom>
+          <a:extLst>
+            <a:ext uri="{C572A759-6A51-4108-AA02-DFA0A04FC94B}">
+              <ma14:wrappingTextBoxFlag xmlns:ma14="http://schemas.microsoft.com/office/mac/drawingml/2011/main" val="0"/>
+            </a:ext>
+          </a:extLst>
+        </p:spPr>
+        <p:txBody>
+          <a:bodyPr/>
+          <a:lstStyle>
+            <a:lvl1pPr>
+              <a:defRPr sz="1000">
+                <a:solidFill>
+                  <a:srgbClr val="5C6F7B"/>
+                </a:solidFill>
+              </a:defRPr>
+            </a:lvl1pPr>
+          </a:lstStyle>
+          <a:p>
+            <a:pPr algn="r"/>
+            <a:fld id="{F7021451-1387-4CA6-816F-3879F97B5CBC}" type="slidenum">
+              <a:rPr b="0" lang="en-US"/>
+              <a:t>18</a:t>
+            </a:fld>
+            <a:endParaRPr lang="en-US"/>
+          </a:p>
+        </p:txBody>
+      </p:sp>
+    </p:spTree>
+  </p:cSld>
+  <p:clrMapOvr>
+    <a:masterClrMapping/>
+  </p:clrMapOvr>
+</p:sld>
+</file>
+
+<file path=ppt/slides/slide19.xml><?xml version="1.0" encoding="utf-8"?>
+<p:sld xmlns:a="http://schemas.openxmlformats.org/drawingml/2006/main" xmlns:r="http://schemas.openxmlformats.org/officeDocument/2006/relationships" xmlns:p="http://schemas.openxmlformats.org/presentationml/2006/main">
+  <p:cSld name="Slide 19">
     <p:spTree>
       <p:nvGrpSpPr>
         <p:cNvPr id="1" name=""/>
@@ -12517,6 +13283,998 @@
                   <a:srgbClr val="0F4C5C"/>
                 </a:solidFill>
               </a:rPr>
+              <a:t>Omissioni e passo</a:t>
+            </a:r>
+            <a:endParaRPr lang="en-US" sz="3600" dirty="0"/>
+          </a:p>
+        </p:txBody>
+      </p:sp>
+      <p:sp>
+        <p:nvSpPr>
+          <p:cNvPr id="3" name="Text 1"/>
+          <p:cNvSpPr txBox="1"/>
+          <p:nvPr/>
+        </p:nvSpPr>
+        <p:spPr>
+          <a:xfrm>
+            <a:off x="548640" y="1600200"/>
+            <a:ext cx="5394960" cy="457200"/>
+          </a:xfrm>
+          <a:prstGeom prst="rect">
+            <a:avLst/>
+          </a:prstGeom>
+          <a:noFill/>
+          <a:ln/>
+        </p:spPr>
+        <p:txBody>
+          <a:bodyPr wrap="square" lIns="0" tIns="0" rIns="0" bIns="0" rtlCol="0" anchor="ctr"/>
+          <a:lstStyle/>
+          <a:p>
+            <a:pPr indent="0" marL="0">
+              <a:buNone/>
+            </a:pPr>
+            <a:r>
+              <a:rPr lang="en-US" sz="2400" b="1" dirty="0">
+                <a:solidFill>
+                  <a:srgbClr val="0F4C5C"/>
+                </a:solidFill>
+              </a:rPr>
+              <a:t>Omettere inizio o fine</a:t>
+            </a:r>
+            <a:endParaRPr lang="en-US" sz="2400" dirty="0"/>
+          </a:p>
+        </p:txBody>
+      </p:sp>
+      <p:sp>
+        <p:nvSpPr>
+          <p:cNvPr id="4" name="Text 2"/>
+          <p:cNvSpPr txBox="1"/>
+          <p:nvPr/>
+        </p:nvSpPr>
+        <p:spPr>
+          <a:xfrm>
+            <a:off x="6217920" y="1600200"/>
+            <a:ext cx="5394960" cy="457200"/>
+          </a:xfrm>
+          <a:prstGeom prst="rect">
+            <a:avLst/>
+          </a:prstGeom>
+          <a:noFill/>
+          <a:ln/>
+        </p:spPr>
+        <p:txBody>
+          <a:bodyPr wrap="square" lIns="0" tIns="0" rIns="0" bIns="0" rtlCol="0" anchor="ctr"/>
+          <a:lstStyle/>
+          <a:p>
+            <a:pPr indent="0" marL="0">
+              <a:buNone/>
+            </a:pPr>
+            <a:r>
+              <a:rPr lang="en-US" sz="2400" b="1" dirty="0">
+                <a:solidFill>
+                  <a:srgbClr val="0F4C5C"/>
+                </a:solidFill>
+              </a:rPr>
+              <a:t>Il terzo numero: il passo</a:t>
+            </a:r>
+            <a:endParaRPr lang="en-US" sz="2400" dirty="0"/>
+          </a:p>
+        </p:txBody>
+      </p:sp>
+      <p:sp>
+        <p:nvSpPr>
+          <p:cNvPr id="5" name="Text 3"/>
+          <p:cNvSpPr txBox="1"/>
+          <p:nvPr/>
+        </p:nvSpPr>
+        <p:spPr>
+          <a:xfrm>
+            <a:off x="548640" y="2057400"/>
+            <a:ext cx="5394960" cy="548640"/>
+          </a:xfrm>
+          <a:prstGeom prst="rect">
+            <a:avLst/>
+          </a:prstGeom>
+          <a:noFill/>
+          <a:ln/>
+        </p:spPr>
+        <p:txBody>
+          <a:bodyPr wrap="square" lIns="0" tIns="0" rIns="0" bIns="0" rtlCol="0" anchor="ctr"/>
+          <a:lstStyle/>
+          <a:p>
+            <a:pPr indent="0" marL="0">
+              <a:buNone/>
+            </a:pPr>
+            <a:r>
+              <a:rPr lang="en-US" sz="1500" dirty="0">
+                <a:solidFill>
+                  <a:srgbClr val="5C6F7B"/>
+                </a:solidFill>
+              </a:rPr>
+              <a:t>Se manca l'inizio si parte da 0; se manca la fine si arriva in fondo.</a:t>
+            </a:r>
+            <a:endParaRPr lang="en-US" sz="1500" dirty="0"/>
+          </a:p>
+        </p:txBody>
+      </p:sp>
+      <p:sp>
+        <p:nvSpPr>
+          <p:cNvPr id="6" name="Text 4"/>
+          <p:cNvSpPr txBox="1"/>
+          <p:nvPr/>
+        </p:nvSpPr>
+        <p:spPr>
+          <a:xfrm>
+            <a:off x="6217920" y="2057400"/>
+            <a:ext cx="5394960" cy="548640"/>
+          </a:xfrm>
+          <a:prstGeom prst="rect">
+            <a:avLst/>
+          </a:prstGeom>
+          <a:noFill/>
+          <a:ln/>
+        </p:spPr>
+        <p:txBody>
+          <a:bodyPr wrap="square" lIns="0" tIns="0" rIns="0" bIns="0" rtlCol="0" anchor="ctr"/>
+          <a:lstStyle/>
+          <a:p>
+            <a:pPr indent="0" marL="0">
+              <a:buNone/>
+            </a:pPr>
+            <a:r>
+              <a:rPr lang="en-US" sz="1500" dirty="0">
+                <a:solidFill>
+                  <a:srgbClr val="5C6F7B"/>
+                </a:solidFill>
+              </a:rPr>
+              <a:t>[inizio:fine:passo]  —  ogni quante caselle prenderne una</a:t>
+            </a:r>
+            <a:endParaRPr lang="en-US" sz="1500" dirty="0"/>
+          </a:p>
+        </p:txBody>
+      </p:sp>
+      <p:sp>
+        <p:nvSpPr>
+          <p:cNvPr id="7" name="Shape 5"/>
+          <p:cNvSpPr/>
+          <p:nvPr/>
+        </p:nvSpPr>
+        <p:spPr>
+          <a:xfrm>
+            <a:off x="548640" y="2743200"/>
+            <a:ext cx="5394960" cy="713232"/>
+          </a:xfrm>
+          <a:prstGeom prst="roundRect">
+            <a:avLst>
+              <a:gd name="adj" fmla="val 12821"/>
+            </a:avLst>
+          </a:prstGeom>
+          <a:solidFill>
+            <a:srgbClr val="EEF3F4"/>
+          </a:solidFill>
+          <a:ln/>
+        </p:spPr>
+      </p:sp>
+      <p:sp>
+        <p:nvSpPr>
+          <p:cNvPr id="8" name="Text 6"/>
+          <p:cNvSpPr txBox="1"/>
+          <p:nvPr/>
+        </p:nvSpPr>
+        <p:spPr>
+          <a:xfrm>
+            <a:off x="777240" y="2743200"/>
+            <a:ext cx="3291840" cy="713232"/>
+          </a:xfrm>
+          <a:prstGeom prst="rect">
+            <a:avLst/>
+          </a:prstGeom>
+          <a:noFill/>
+          <a:ln/>
+        </p:spPr>
+        <p:txBody>
+          <a:bodyPr wrap="square" lIns="0" tIns="0" rIns="0" bIns="0" rtlCol="0" anchor="ctr"/>
+          <a:lstStyle/>
+          <a:p>
+            <a:pPr indent="0" marL="0">
+              <a:buNone/>
+            </a:pPr>
+            <a:r>
+              <a:rPr lang="en-US" sz="1800" b="1" dirty="0">
+                <a:solidFill>
+                  <a:srgbClr val="0F4C5C"/>
+                </a:solidFill>
+                <a:latin typeface="Courier New" pitchFamily="34" charset="0"/>
+                <a:ea typeface="Courier New" pitchFamily="34" charset="-122"/>
+                <a:cs typeface="Courier New" pitchFamily="34" charset="-120"/>
+              </a:rPr>
+              <a:t>x[:3] </a:t>
+            </a:r>
+            <a:pPr indent="0" marL="0">
+              <a:buNone/>
+            </a:pPr>
+            <a:r>
+              <a:rPr lang="en-US" sz="1800" dirty="0">
+                <a:solidFill>
+                  <a:srgbClr val="5C6F7B"/>
+                </a:solidFill>
+                <a:latin typeface="Courier New" pitchFamily="34" charset="0"/>
+                <a:ea typeface="Courier New" pitchFamily="34" charset="-122"/>
+                <a:cs typeface="Courier New" pitchFamily="34" charset="-120"/>
+              </a:rPr>
+              <a:t>  = x[0:3]</a:t>
+            </a:r>
+            <a:endParaRPr lang="en-US" sz="1800" dirty="0"/>
+          </a:p>
+        </p:txBody>
+      </p:sp>
+      <p:sp>
+        <p:nvSpPr>
+          <p:cNvPr id="9" name="Text 7"/>
+          <p:cNvSpPr txBox="1"/>
+          <p:nvPr/>
+        </p:nvSpPr>
+        <p:spPr>
+          <a:xfrm>
+            <a:off x="4114800" y="2743200"/>
+            <a:ext cx="1691640" cy="713232"/>
+          </a:xfrm>
+          <a:prstGeom prst="rect">
+            <a:avLst/>
+          </a:prstGeom>
+          <a:noFill/>
+          <a:ln/>
+        </p:spPr>
+        <p:txBody>
+          <a:bodyPr wrap="square" lIns="0" tIns="0" rIns="0" bIns="0" rtlCol="0" anchor="ctr"/>
+          <a:lstStyle/>
+          <a:p>
+            <a:pPr indent="0" marL="0">
+              <a:buNone/>
+            </a:pPr>
+            <a:r>
+              <a:rPr lang="en-US" sz="1800" dirty="0">
+                <a:solidFill>
+                  <a:srgbClr val="1F2A30"/>
+                </a:solidFill>
+                <a:latin typeface="Courier New" pitchFamily="34" charset="0"/>
+                <a:ea typeface="Courier New" pitchFamily="34" charset="-122"/>
+                <a:cs typeface="Courier New" pitchFamily="34" charset="-120"/>
+              </a:rPr>
+              <a:t>A B C</a:t>
+            </a:r>
+            <a:endParaRPr lang="en-US" sz="1800" dirty="0"/>
+          </a:p>
+        </p:txBody>
+      </p:sp>
+      <p:sp>
+        <p:nvSpPr>
+          <p:cNvPr id="10" name="Shape 8"/>
+          <p:cNvSpPr/>
+          <p:nvPr/>
+        </p:nvSpPr>
+        <p:spPr>
+          <a:xfrm>
+            <a:off x="548640" y="3611880"/>
+            <a:ext cx="5394960" cy="713232"/>
+          </a:xfrm>
+          <a:prstGeom prst="roundRect">
+            <a:avLst>
+              <a:gd name="adj" fmla="val 12821"/>
+            </a:avLst>
+          </a:prstGeom>
+          <a:solidFill>
+            <a:srgbClr val="EEF3F4"/>
+          </a:solidFill>
+          <a:ln/>
+        </p:spPr>
+      </p:sp>
+      <p:sp>
+        <p:nvSpPr>
+          <p:cNvPr id="11" name="Text 9"/>
+          <p:cNvSpPr txBox="1"/>
+          <p:nvPr/>
+        </p:nvSpPr>
+        <p:spPr>
+          <a:xfrm>
+            <a:off x="777240" y="3611880"/>
+            <a:ext cx="3291840" cy="713232"/>
+          </a:xfrm>
+          <a:prstGeom prst="rect">
+            <a:avLst/>
+          </a:prstGeom>
+          <a:noFill/>
+          <a:ln/>
+        </p:spPr>
+        <p:txBody>
+          <a:bodyPr wrap="square" lIns="0" tIns="0" rIns="0" bIns="0" rtlCol="0" anchor="ctr"/>
+          <a:lstStyle/>
+          <a:p>
+            <a:pPr indent="0" marL="0">
+              <a:buNone/>
+            </a:pPr>
+            <a:r>
+              <a:rPr lang="en-US" sz="1800" b="1" dirty="0">
+                <a:solidFill>
+                  <a:srgbClr val="0F4C5C"/>
+                </a:solidFill>
+                <a:latin typeface="Courier New" pitchFamily="34" charset="0"/>
+                <a:ea typeface="Courier New" pitchFamily="34" charset="-122"/>
+                <a:cs typeface="Courier New" pitchFamily="34" charset="-120"/>
+              </a:rPr>
+              <a:t>x[3:] </a:t>
+            </a:r>
+            <a:pPr indent="0" marL="0">
+              <a:buNone/>
+            </a:pPr>
+            <a:r>
+              <a:rPr lang="en-US" sz="1800" dirty="0">
+                <a:solidFill>
+                  <a:srgbClr val="5C6F7B"/>
+                </a:solidFill>
+                <a:latin typeface="Courier New" pitchFamily="34" charset="0"/>
+                <a:ea typeface="Courier New" pitchFamily="34" charset="-122"/>
+                <a:cs typeface="Courier New" pitchFamily="34" charset="-120"/>
+              </a:rPr>
+              <a:t>  = x[3:6]</a:t>
+            </a:r>
+            <a:endParaRPr lang="en-US" sz="1800" dirty="0"/>
+          </a:p>
+        </p:txBody>
+      </p:sp>
+      <p:sp>
+        <p:nvSpPr>
+          <p:cNvPr id="12" name="Text 10"/>
+          <p:cNvSpPr txBox="1"/>
+          <p:nvPr/>
+        </p:nvSpPr>
+        <p:spPr>
+          <a:xfrm>
+            <a:off x="4114800" y="3611880"/>
+            <a:ext cx="1691640" cy="713232"/>
+          </a:xfrm>
+          <a:prstGeom prst="rect">
+            <a:avLst/>
+          </a:prstGeom>
+          <a:noFill/>
+          <a:ln/>
+        </p:spPr>
+        <p:txBody>
+          <a:bodyPr wrap="square" lIns="0" tIns="0" rIns="0" bIns="0" rtlCol="0" anchor="ctr"/>
+          <a:lstStyle/>
+          <a:p>
+            <a:pPr indent="0" marL="0">
+              <a:buNone/>
+            </a:pPr>
+            <a:r>
+              <a:rPr lang="en-US" sz="1800" dirty="0">
+                <a:solidFill>
+                  <a:srgbClr val="1F2A30"/>
+                </a:solidFill>
+                <a:latin typeface="Courier New" pitchFamily="34" charset="0"/>
+                <a:ea typeface="Courier New" pitchFamily="34" charset="-122"/>
+                <a:cs typeface="Courier New" pitchFamily="34" charset="-120"/>
+              </a:rPr>
+              <a:t>D E F</a:t>
+            </a:r>
+            <a:endParaRPr lang="en-US" sz="1800" dirty="0"/>
+          </a:p>
+        </p:txBody>
+      </p:sp>
+      <p:sp>
+        <p:nvSpPr>
+          <p:cNvPr id="13" name="Shape 11"/>
+          <p:cNvSpPr/>
+          <p:nvPr/>
+        </p:nvSpPr>
+        <p:spPr>
+          <a:xfrm>
+            <a:off x="548640" y="4480560"/>
+            <a:ext cx="5394960" cy="713232"/>
+          </a:xfrm>
+          <a:prstGeom prst="roundRect">
+            <a:avLst>
+              <a:gd name="adj" fmla="val 12821"/>
+            </a:avLst>
+          </a:prstGeom>
+          <a:solidFill>
+            <a:srgbClr val="EEF3F4"/>
+          </a:solidFill>
+          <a:ln/>
+        </p:spPr>
+      </p:sp>
+      <p:sp>
+        <p:nvSpPr>
+          <p:cNvPr id="14" name="Text 12"/>
+          <p:cNvSpPr txBox="1"/>
+          <p:nvPr/>
+        </p:nvSpPr>
+        <p:spPr>
+          <a:xfrm>
+            <a:off x="777240" y="4480560"/>
+            <a:ext cx="3291840" cy="713232"/>
+          </a:xfrm>
+          <a:prstGeom prst="rect">
+            <a:avLst/>
+          </a:prstGeom>
+          <a:noFill/>
+          <a:ln/>
+        </p:spPr>
+        <p:txBody>
+          <a:bodyPr wrap="square" lIns="0" tIns="0" rIns="0" bIns="0" rtlCol="0" anchor="ctr"/>
+          <a:lstStyle/>
+          <a:p>
+            <a:pPr indent="0" marL="0">
+              <a:buNone/>
+            </a:pPr>
+            <a:r>
+              <a:rPr lang="en-US" sz="1800" b="1" dirty="0">
+                <a:solidFill>
+                  <a:srgbClr val="0F4C5C"/>
+                </a:solidFill>
+                <a:latin typeface="Courier New" pitchFamily="34" charset="0"/>
+                <a:ea typeface="Courier New" pitchFamily="34" charset="-122"/>
+                <a:cs typeface="Courier New" pitchFamily="34" charset="-120"/>
+              </a:rPr>
+              <a:t>x[:]  </a:t>
+            </a:r>
+            <a:pPr indent="0" marL="0">
+              <a:buNone/>
+            </a:pPr>
+            <a:r>
+              <a:rPr lang="en-US" sz="1800" dirty="0">
+                <a:solidFill>
+                  <a:srgbClr val="5C6F7B"/>
+                </a:solidFill>
+                <a:latin typeface="Courier New" pitchFamily="34" charset="0"/>
+                <a:ea typeface="Courier New" pitchFamily="34" charset="-122"/>
+                <a:cs typeface="Courier New" pitchFamily="34" charset="-120"/>
+              </a:rPr>
+              <a:t>  = x[0:6]</a:t>
+            </a:r>
+            <a:endParaRPr lang="en-US" sz="1800" dirty="0"/>
+          </a:p>
+        </p:txBody>
+      </p:sp>
+      <p:sp>
+        <p:nvSpPr>
+          <p:cNvPr id="15" name="Text 13"/>
+          <p:cNvSpPr txBox="1"/>
+          <p:nvPr/>
+        </p:nvSpPr>
+        <p:spPr>
+          <a:xfrm>
+            <a:off x="4114800" y="4480560"/>
+            <a:ext cx="1691640" cy="713232"/>
+          </a:xfrm>
+          <a:prstGeom prst="rect">
+            <a:avLst/>
+          </a:prstGeom>
+          <a:noFill/>
+          <a:ln/>
+        </p:spPr>
+        <p:txBody>
+          <a:bodyPr wrap="square" lIns="0" tIns="0" rIns="0" bIns="0" rtlCol="0" anchor="ctr"/>
+          <a:lstStyle/>
+          <a:p>
+            <a:pPr indent="0" marL="0">
+              <a:buNone/>
+            </a:pPr>
+            <a:r>
+              <a:rPr lang="en-US" sz="1800" dirty="0">
+                <a:solidFill>
+                  <a:srgbClr val="1F2A30"/>
+                </a:solidFill>
+                <a:latin typeface="Courier New" pitchFamily="34" charset="0"/>
+                <a:ea typeface="Courier New" pitchFamily="34" charset="-122"/>
+                <a:cs typeface="Courier New" pitchFamily="34" charset="-120"/>
+              </a:rPr>
+              <a:t>tutto</a:t>
+            </a:r>
+            <a:endParaRPr lang="en-US" sz="1800" dirty="0"/>
+          </a:p>
+        </p:txBody>
+      </p:sp>
+      <p:sp>
+        <p:nvSpPr>
+          <p:cNvPr id="16" name="Shape 14"/>
+          <p:cNvSpPr/>
+          <p:nvPr/>
+        </p:nvSpPr>
+        <p:spPr>
+          <a:xfrm>
+            <a:off x="6217920" y="2743200"/>
+            <a:ext cx="5394960" cy="713232"/>
+          </a:xfrm>
+          <a:prstGeom prst="roundRect">
+            <a:avLst>
+              <a:gd name="adj" fmla="val 12821"/>
+            </a:avLst>
+          </a:prstGeom>
+          <a:solidFill>
+            <a:srgbClr val="EEF3F4"/>
+          </a:solidFill>
+          <a:ln/>
+        </p:spPr>
+      </p:sp>
+      <p:sp>
+        <p:nvSpPr>
+          <p:cNvPr id="17" name="Text 15"/>
+          <p:cNvSpPr txBox="1"/>
+          <p:nvPr/>
+        </p:nvSpPr>
+        <p:spPr>
+          <a:xfrm>
+            <a:off x="6446520" y="2743200"/>
+            <a:ext cx="3291840" cy="713232"/>
+          </a:xfrm>
+          <a:prstGeom prst="rect">
+            <a:avLst/>
+          </a:prstGeom>
+          <a:noFill/>
+          <a:ln/>
+        </p:spPr>
+        <p:txBody>
+          <a:bodyPr wrap="square" lIns="0" tIns="0" rIns="0" bIns="0" rtlCol="0" anchor="ctr"/>
+          <a:lstStyle/>
+          <a:p>
+            <a:pPr indent="0" marL="0">
+              <a:buNone/>
+            </a:pPr>
+            <a:r>
+              <a:rPr lang="en-US" sz="1800" b="1" dirty="0">
+                <a:solidFill>
+                  <a:srgbClr val="0F4C5C"/>
+                </a:solidFill>
+                <a:latin typeface="Courier New" pitchFamily="34" charset="0"/>
+                <a:ea typeface="Courier New" pitchFamily="34" charset="-122"/>
+                <a:cs typeface="Courier New" pitchFamily="34" charset="-120"/>
+              </a:rPr>
+              <a:t>x[::2]</a:t>
+            </a:r>
+            <a:pPr indent="0" marL="0">
+              <a:buNone/>
+            </a:pPr>
+            <a:endParaRPr lang="en-US" sz="1800" dirty="0"/>
+          </a:p>
+        </p:txBody>
+      </p:sp>
+      <p:sp>
+        <p:nvSpPr>
+          <p:cNvPr id="18" name="Text 16"/>
+          <p:cNvSpPr txBox="1"/>
+          <p:nvPr/>
+        </p:nvSpPr>
+        <p:spPr>
+          <a:xfrm>
+            <a:off x="9784080" y="2743200"/>
+            <a:ext cx="1691640" cy="713232"/>
+          </a:xfrm>
+          <a:prstGeom prst="rect">
+            <a:avLst/>
+          </a:prstGeom>
+          <a:noFill/>
+          <a:ln/>
+        </p:spPr>
+        <p:txBody>
+          <a:bodyPr wrap="square" lIns="0" tIns="0" rIns="0" bIns="0" rtlCol="0" anchor="ctr"/>
+          <a:lstStyle/>
+          <a:p>
+            <a:pPr indent="0" marL="0">
+              <a:buNone/>
+            </a:pPr>
+            <a:r>
+              <a:rPr lang="en-US" sz="1800" dirty="0">
+                <a:solidFill>
+                  <a:srgbClr val="1F2A30"/>
+                </a:solidFill>
+                <a:latin typeface="Courier New" pitchFamily="34" charset="0"/>
+                <a:ea typeface="Courier New" pitchFamily="34" charset="-122"/>
+                <a:cs typeface="Courier New" pitchFamily="34" charset="-120"/>
+              </a:rPr>
+              <a:t>A C E</a:t>
+            </a:r>
+            <a:endParaRPr lang="en-US" sz="1800" dirty="0"/>
+          </a:p>
+        </p:txBody>
+      </p:sp>
+      <p:sp>
+        <p:nvSpPr>
+          <p:cNvPr id="19" name="Shape 17"/>
+          <p:cNvSpPr/>
+          <p:nvPr/>
+        </p:nvSpPr>
+        <p:spPr>
+          <a:xfrm>
+            <a:off x="6217920" y="3611880"/>
+            <a:ext cx="5394960" cy="713232"/>
+          </a:xfrm>
+          <a:prstGeom prst="roundRect">
+            <a:avLst>
+              <a:gd name="adj" fmla="val 12821"/>
+            </a:avLst>
+          </a:prstGeom>
+          <a:solidFill>
+            <a:srgbClr val="EEF3F4"/>
+          </a:solidFill>
+          <a:ln/>
+        </p:spPr>
+      </p:sp>
+      <p:sp>
+        <p:nvSpPr>
+          <p:cNvPr id="20" name="Text 18"/>
+          <p:cNvSpPr txBox="1"/>
+          <p:nvPr/>
+        </p:nvSpPr>
+        <p:spPr>
+          <a:xfrm>
+            <a:off x="6446520" y="3611880"/>
+            <a:ext cx="3291840" cy="713232"/>
+          </a:xfrm>
+          <a:prstGeom prst="rect">
+            <a:avLst/>
+          </a:prstGeom>
+          <a:noFill/>
+          <a:ln/>
+        </p:spPr>
+        <p:txBody>
+          <a:bodyPr wrap="square" lIns="0" tIns="0" rIns="0" bIns="0" rtlCol="0" anchor="ctr"/>
+          <a:lstStyle/>
+          <a:p>
+            <a:pPr indent="0" marL="0">
+              <a:buNone/>
+            </a:pPr>
+            <a:r>
+              <a:rPr lang="en-US" sz="1800" b="1" dirty="0">
+                <a:solidFill>
+                  <a:srgbClr val="0F4C5C"/>
+                </a:solidFill>
+                <a:latin typeface="Courier New" pitchFamily="34" charset="0"/>
+                <a:ea typeface="Courier New" pitchFamily="34" charset="-122"/>
+                <a:cs typeface="Courier New" pitchFamily="34" charset="-120"/>
+              </a:rPr>
+              <a:t>x[1::2]</a:t>
+            </a:r>
+            <a:pPr indent="0" marL="0">
+              <a:buNone/>
+            </a:pPr>
+            <a:endParaRPr lang="en-US" sz="1800" dirty="0"/>
+          </a:p>
+        </p:txBody>
+      </p:sp>
+      <p:sp>
+        <p:nvSpPr>
+          <p:cNvPr id="21" name="Text 19"/>
+          <p:cNvSpPr txBox="1"/>
+          <p:nvPr/>
+        </p:nvSpPr>
+        <p:spPr>
+          <a:xfrm>
+            <a:off x="9784080" y="3611880"/>
+            <a:ext cx="1691640" cy="713232"/>
+          </a:xfrm>
+          <a:prstGeom prst="rect">
+            <a:avLst/>
+          </a:prstGeom>
+          <a:noFill/>
+          <a:ln/>
+        </p:spPr>
+        <p:txBody>
+          <a:bodyPr wrap="square" lIns="0" tIns="0" rIns="0" bIns="0" rtlCol="0" anchor="ctr"/>
+          <a:lstStyle/>
+          <a:p>
+            <a:pPr indent="0" marL="0">
+              <a:buNone/>
+            </a:pPr>
+            <a:r>
+              <a:rPr lang="en-US" sz="1800" dirty="0">
+                <a:solidFill>
+                  <a:srgbClr val="1F2A30"/>
+                </a:solidFill>
+                <a:latin typeface="Courier New" pitchFamily="34" charset="0"/>
+                <a:ea typeface="Courier New" pitchFamily="34" charset="-122"/>
+                <a:cs typeface="Courier New" pitchFamily="34" charset="-120"/>
+              </a:rPr>
+              <a:t>B D F</a:t>
+            </a:r>
+            <a:endParaRPr lang="en-US" sz="1800" dirty="0"/>
+          </a:p>
+        </p:txBody>
+      </p:sp>
+      <p:sp>
+        <p:nvSpPr>
+          <p:cNvPr id="22" name="Shape 20"/>
+          <p:cNvSpPr/>
+          <p:nvPr/>
+        </p:nvSpPr>
+        <p:spPr>
+          <a:xfrm>
+            <a:off x="6217920" y="4480560"/>
+            <a:ext cx="5394960" cy="713232"/>
+          </a:xfrm>
+          <a:prstGeom prst="roundRect">
+            <a:avLst>
+              <a:gd name="adj" fmla="val 12821"/>
+            </a:avLst>
+          </a:prstGeom>
+          <a:solidFill>
+            <a:srgbClr val="EEF3F4"/>
+          </a:solidFill>
+          <a:ln/>
+        </p:spPr>
+      </p:sp>
+      <p:sp>
+        <p:nvSpPr>
+          <p:cNvPr id="23" name="Text 21"/>
+          <p:cNvSpPr txBox="1"/>
+          <p:nvPr/>
+        </p:nvSpPr>
+        <p:spPr>
+          <a:xfrm>
+            <a:off x="6446520" y="4480560"/>
+            <a:ext cx="3291840" cy="713232"/>
+          </a:xfrm>
+          <a:prstGeom prst="rect">
+            <a:avLst/>
+          </a:prstGeom>
+          <a:noFill/>
+          <a:ln/>
+        </p:spPr>
+        <p:txBody>
+          <a:bodyPr wrap="square" lIns="0" tIns="0" rIns="0" bIns="0" rtlCol="0" anchor="ctr"/>
+          <a:lstStyle/>
+          <a:p>
+            <a:pPr indent="0" marL="0">
+              <a:buNone/>
+            </a:pPr>
+            <a:r>
+              <a:rPr lang="en-US" sz="1800" b="1" dirty="0">
+                <a:solidFill>
+                  <a:srgbClr val="0F4C5C"/>
+                </a:solidFill>
+                <a:latin typeface="Courier New" pitchFamily="34" charset="0"/>
+                <a:ea typeface="Courier New" pitchFamily="34" charset="-122"/>
+                <a:cs typeface="Courier New" pitchFamily="34" charset="-120"/>
+              </a:rPr>
+              <a:t>x[::-1]</a:t>
+            </a:r>
+            <a:pPr indent="0" marL="0">
+              <a:buNone/>
+            </a:pPr>
+            <a:endParaRPr lang="en-US" sz="1800" dirty="0"/>
+          </a:p>
+        </p:txBody>
+      </p:sp>
+      <p:sp>
+        <p:nvSpPr>
+          <p:cNvPr id="24" name="Text 22"/>
+          <p:cNvSpPr txBox="1"/>
+          <p:nvPr/>
+        </p:nvSpPr>
+        <p:spPr>
+          <a:xfrm>
+            <a:off x="9784080" y="4480560"/>
+            <a:ext cx="1691640" cy="713232"/>
+          </a:xfrm>
+          <a:prstGeom prst="rect">
+            <a:avLst/>
+          </a:prstGeom>
+          <a:noFill/>
+          <a:ln/>
+        </p:spPr>
+        <p:txBody>
+          <a:bodyPr wrap="square" lIns="0" tIns="0" rIns="0" bIns="0" rtlCol="0" anchor="ctr"/>
+          <a:lstStyle/>
+          <a:p>
+            <a:pPr indent="0" marL="0">
+              <a:buNone/>
+            </a:pPr>
+            <a:r>
+              <a:rPr lang="en-US" sz="1800" dirty="0">
+                <a:solidFill>
+                  <a:srgbClr val="1F2A30"/>
+                </a:solidFill>
+                <a:latin typeface="Courier New" pitchFamily="34" charset="0"/>
+                <a:ea typeface="Courier New" pitchFamily="34" charset="-122"/>
+                <a:cs typeface="Courier New" pitchFamily="34" charset="-120"/>
+              </a:rPr>
+              <a:t>F E D C B A</a:t>
+            </a:r>
+            <a:endParaRPr lang="en-US" sz="1800" dirty="0"/>
+          </a:p>
+        </p:txBody>
+      </p:sp>
+      <p:sp>
+        <p:nvSpPr>
+          <p:cNvPr id="25" name="Text 23"/>
+          <p:cNvSpPr txBox="1"/>
+          <p:nvPr/>
+        </p:nvSpPr>
+        <p:spPr>
+          <a:xfrm>
+            <a:off x="548640" y="5486400"/>
+            <a:ext cx="11064240" cy="457200"/>
+          </a:xfrm>
+          <a:prstGeom prst="rect">
+            <a:avLst/>
+          </a:prstGeom>
+          <a:noFill/>
+          <a:ln/>
+        </p:spPr>
+        <p:txBody>
+          <a:bodyPr wrap="square" lIns="0" tIns="0" rIns="0" bIns="0" rtlCol="0" anchor="ctr"/>
+          <a:lstStyle/>
+          <a:p>
+            <a:pPr indent="0" marL="0">
+              <a:buNone/>
+            </a:pPr>
+            <a:r>
+              <a:rPr lang="en-US" sz="1700" dirty="0">
+                <a:solidFill>
+                  <a:srgbClr val="1F2A30"/>
+                </a:solidFill>
+                <a:latin typeface="Courier New" pitchFamily="34" charset="0"/>
+                <a:ea typeface="Courier New" pitchFamily="34" charset="-122"/>
+                <a:cs typeface="Courier New" pitchFamily="34" charset="-120"/>
+              </a:rPr>
+              <a:t>x = </a:t>
+            </a:r>
+            <a:pPr indent="0" marL="0">
+              <a:buNone/>
+            </a:pPr>
+            <a:r>
+              <a:rPr lang="en-US" sz="1700" b="1" dirty="0">
+                <a:solidFill>
+                  <a:srgbClr val="1F2A30"/>
+                </a:solidFill>
+                <a:latin typeface="Courier New" pitchFamily="34" charset="0"/>
+                <a:ea typeface="Courier New" pitchFamily="34" charset="-122"/>
+                <a:cs typeface="Courier New" pitchFamily="34" charset="-120"/>
+              </a:rPr>
+              <a:t>A B C D E F</a:t>
+            </a:r>
+            <a:pPr indent="0" marL="0">
+              <a:buNone/>
+            </a:pPr>
+            <a:r>
+              <a:rPr lang="en-US" sz="1700" dirty="0">
+                <a:solidFill>
+                  <a:srgbClr val="1F2A30"/>
+                </a:solidFill>
+              </a:rPr>
+              <a:t>    Con il passo negativo si va all'indietro: </a:t>
+            </a:r>
+            <a:pPr indent="0" marL="0">
+              <a:buNone/>
+            </a:pPr>
+            <a:r>
+              <a:rPr lang="en-US" sz="1700" b="1" dirty="0">
+                <a:solidFill>
+                  <a:srgbClr val="1F2A30"/>
+                </a:solidFill>
+                <a:latin typeface="Courier New" pitchFamily="34" charset="0"/>
+                <a:ea typeface="Courier New" pitchFamily="34" charset="-122"/>
+                <a:cs typeface="Courier New" pitchFamily="34" charset="-120"/>
+              </a:rPr>
+              <a:t>[::-1]</a:t>
+            </a:r>
+            <a:pPr indent="0" marL="0">
+              <a:buNone/>
+            </a:pPr>
+            <a:r>
+              <a:rPr lang="en-US" sz="1700" dirty="0">
+                <a:solidFill>
+                  <a:srgbClr val="1F2A30"/>
+                </a:solidFill>
+              </a:rPr>
+              <a:t> inverte.</a:t>
+            </a:r>
+            <a:endParaRPr lang="en-US" sz="1700" dirty="0"/>
+          </a:p>
+        </p:txBody>
+      </p:sp>
+      <p:sp>
+        <p:nvSpPr>
+          <p:cNvPr id="25" name="Slide Number Placeholder 0"/>
+          <p:cNvSpPr>
+            <a:spLocks noGrp="1"/>
+          </p:cNvSpPr>
+          <p:nvPr>
+            <p:ph type="sldNum" sz="quarter" idx="4294967295"/>
+          </p:nvPr>
+        </p:nvSpPr>
+        <p:spPr>
+          <a:xfrm>
+            <a:off x="11155680" y="6400800"/>
+            <a:ext cx="457200" cy="274320"/>
+          </a:xfrm>
+          <a:prstGeom prst="rect">
+            <a:avLst/>
+          </a:prstGeom>
+          <a:extLst>
+            <a:ext uri="{C572A759-6A51-4108-AA02-DFA0A04FC94B}">
+              <ma14:wrappingTextBoxFlag xmlns:ma14="http://schemas.microsoft.com/office/mac/drawingml/2011/main" val="0"/>
+            </a:ext>
+          </a:extLst>
+        </p:spPr>
+        <p:txBody>
+          <a:bodyPr/>
+          <a:lstStyle>
+            <a:lvl1pPr>
+              <a:defRPr sz="1000">
+                <a:solidFill>
+                  <a:srgbClr val="5C6F7B"/>
+                </a:solidFill>
+              </a:defRPr>
+            </a:lvl1pPr>
+          </a:lstStyle>
+          <a:p>
+            <a:pPr algn="r"/>
+            <a:fld id="{F7021451-1387-4CA6-816F-3879F97B5CBC}" type="slidenum">
+              <a:rPr b="0" lang="en-US"/>
+              <a:t>8</a:t>
+            </a:fld>
+            <a:endParaRPr lang="en-US"/>
+          </a:p>
+        </p:txBody>
+      </p:sp>
+    </p:spTree>
+  </p:cSld>
+  <p:clrMapOvr>
+    <a:masterClrMapping/>
+  </p:clrMapOvr>
+</p:sld>
+</file>
+
+<file path=ppt/slides/slide9.xml><?xml version="1.0" encoding="utf-8"?>
+<p:sld xmlns:a="http://schemas.openxmlformats.org/drawingml/2006/main" xmlns:r="http://schemas.openxmlformats.org/officeDocument/2006/relationships" xmlns:p="http://schemas.openxmlformats.org/presentationml/2006/main">
+  <p:cSld name="Slide 9">
+    <p:spTree>
+      <p:nvGrpSpPr>
+        <p:cNvPr id="1" name=""/>
+        <p:cNvGrpSpPr/>
+        <p:nvPr/>
+      </p:nvGrpSpPr>
+      <p:grpSpPr>
+        <a:xfrm>
+          <a:off x="0" y="0"/>
+          <a:ext cx="0" cy="0"/>
+          <a:chOff x="0" y="0"/>
+          <a:chExt cx="0" cy="0"/>
+        </a:xfrm>
+      </p:grpSpPr>
+      <p:sp>
+        <p:nvSpPr>
+          <p:cNvPr id="2" name="Text 0"/>
+          <p:cNvSpPr/>
+          <p:nvPr>
+            <p:ph idx="100" type="title" hasCustomPrompt="1"/>
+          </p:nvPr>
+        </p:nvSpPr>
+        <p:spPr>
+          <a:xfrm>
+            <a:off x="548640" y="365760"/>
+            <a:ext cx="11064240" cy="822960"/>
+          </a:xfrm>
+          <a:prstGeom prst="rect">
+            <a:avLst/>
+          </a:prstGeom>
+          <a:noFill/>
+          <a:ln/>
+        </p:spPr>
+        <p:txBody>
+          <a:bodyPr wrap="square" lIns="0" tIns="0" rIns="0" bIns="0" rtlCol="0" anchor="ctr"/>
+          <a:lstStyle/>
+          <a:p>
+            <a:pPr algn="l" indent="0" marL="0">
+              <a:buNone/>
+            </a:pPr>
+            <a:r>
+              <a:rPr lang="en-US" sz="3600" b="1" dirty="0">
+                <a:solidFill>
+                  <a:srgbClr val="0F4C5C"/>
+                </a:solidFill>
+              </a:rPr>
               <a:t>iloc è come un intervallo di Excel</a:t>
             </a:r>
             <a:endParaRPr lang="en-US" sz="3600" dirty="0"/>
@@ -15176,7 +16934,7 @@
       </p:sp>
       <p:graphicFrame>
         <p:nvGraphicFramePr>
-          <p:cNvPr id="9" name="Table 0"/>
+          <p:cNvPr id="10" name="Table 0"/>
           <p:cNvGraphicFramePr>
             <a:graphicFrameLocks noGrp="1"/>
           </p:cNvGraphicFramePr>
@@ -15837,682 +17595,6 @@
             <a:pPr algn="r"/>
             <a:fld id="{F7021451-1387-4CA6-816F-3879F97B5CBC}" type="slidenum">
               <a:rPr b="0" lang="en-US"/>
-              <a:t>8</a:t>
-            </a:fld>
-            <a:endParaRPr lang="en-US"/>
-          </a:p>
-        </p:txBody>
-      </p:sp>
-    </p:spTree>
-  </p:cSld>
-  <p:clrMapOvr>
-    <a:masterClrMapping/>
-  </p:clrMapOvr>
-</p:sld>
-</file>
-
-<file path=ppt/slides/slide9.xml><?xml version="1.0" encoding="utf-8"?>
-<p:sld xmlns:a="http://schemas.openxmlformats.org/drawingml/2006/main" xmlns:r="http://schemas.openxmlformats.org/officeDocument/2006/relationships" xmlns:p="http://schemas.openxmlformats.org/presentationml/2006/main">
-  <p:cSld name="Slide 9">
-    <p:spTree>
-      <p:nvGrpSpPr>
-        <p:cNvPr id="1" name=""/>
-        <p:cNvGrpSpPr/>
-        <p:nvPr/>
-      </p:nvGrpSpPr>
-      <p:grpSpPr>
-        <a:xfrm>
-          <a:off x="0" y="0"/>
-          <a:ext cx="0" cy="0"/>
-          <a:chOff x="0" y="0"/>
-          <a:chExt cx="0" cy="0"/>
-        </a:xfrm>
-      </p:grpSpPr>
-      <p:sp>
-        <p:nvSpPr>
-          <p:cNvPr id="2" name="Text 0"/>
-          <p:cNvSpPr/>
-          <p:nvPr>
-            <p:ph idx="100" type="title" hasCustomPrompt="1"/>
-          </p:nvPr>
-        </p:nvSpPr>
-        <p:spPr>
-          <a:xfrm>
-            <a:off x="548640" y="365760"/>
-            <a:ext cx="11064240" cy="822960"/>
-          </a:xfrm>
-          <a:prstGeom prst="rect">
-            <a:avLst/>
-          </a:prstGeom>
-          <a:noFill/>
-          <a:ln/>
-        </p:spPr>
-        <p:txBody>
-          <a:bodyPr wrap="square" lIns="0" tIns="0" rIns="0" bIns="0" rtlCol="0" anchor="ctr"/>
-          <a:lstStyle/>
-          <a:p>
-            <a:pPr algn="l" indent="0" marL="0">
-              <a:buNone/>
-            </a:pPr>
-            <a:r>
-              <a:rPr lang="en-US" sz="3600" b="1" dirty="0">
-                <a:solidFill>
-                  <a:srgbClr val="0F4C5C"/>
-                </a:solidFill>
-              </a:rPr>
-              <a:t>Fare domande a un oggetto</a:t>
-            </a:r>
-            <a:endParaRPr lang="en-US" sz="3600" dirty="0"/>
-          </a:p>
-        </p:txBody>
-      </p:sp>
-      <p:sp>
-        <p:nvSpPr>
-          <p:cNvPr id="3" name="Text 1"/>
-          <p:cNvSpPr txBox="1"/>
-          <p:nvPr/>
-        </p:nvSpPr>
-        <p:spPr>
-          <a:xfrm>
-            <a:off x="548640" y="1645920"/>
-            <a:ext cx="5349240" cy="457200"/>
-          </a:xfrm>
-          <a:prstGeom prst="rect">
-            <a:avLst/>
-          </a:prstGeom>
-          <a:noFill/>
-          <a:ln/>
-        </p:spPr>
-        <p:txBody>
-          <a:bodyPr wrap="square" lIns="0" tIns="0" rIns="0" bIns="0" rtlCol="0" anchor="ctr"/>
-          <a:lstStyle/>
-          <a:p>
-            <a:pPr indent="0" marL="0">
-              <a:buNone/>
-            </a:pPr>
-            <a:r>
-              <a:rPr lang="en-US" sz="2600" b="1" dirty="0">
-                <a:solidFill>
-                  <a:srgbClr val="0F4C5C"/>
-                </a:solidFill>
-              </a:rPr>
-              <a:t>Metodo</a:t>
-            </a:r>
-            <a:endParaRPr lang="en-US" sz="2600" dirty="0"/>
-          </a:p>
-        </p:txBody>
-      </p:sp>
-      <p:sp>
-        <p:nvSpPr>
-          <p:cNvPr id="4" name="Text 2"/>
-          <p:cNvSpPr txBox="1"/>
-          <p:nvPr/>
-        </p:nvSpPr>
-        <p:spPr>
-          <a:xfrm>
-            <a:off x="548640" y="2103120"/>
-            <a:ext cx="5349240" cy="411480"/>
-          </a:xfrm>
-          <a:prstGeom prst="rect">
-            <a:avLst/>
-          </a:prstGeom>
-          <a:noFill/>
-          <a:ln/>
-        </p:spPr>
-        <p:txBody>
-          <a:bodyPr wrap="square" lIns="0" tIns="0" rIns="0" bIns="0" rtlCol="0" anchor="ctr"/>
-          <a:lstStyle/>
-          <a:p>
-            <a:pPr indent="0" marL="0">
-              <a:buNone/>
-            </a:pPr>
-            <a:r>
-              <a:rPr lang="en-US" sz="1800" dirty="0">
-                <a:solidFill>
-                  <a:srgbClr val="5C6F7B"/>
-                </a:solidFill>
-              </a:rPr>
-              <a:t>un'azione: ha le parentesi</a:t>
-            </a:r>
-            <a:endParaRPr lang="en-US" sz="1800" dirty="0"/>
-          </a:p>
-        </p:txBody>
-      </p:sp>
-      <p:sp>
-        <p:nvSpPr>
-          <p:cNvPr id="5" name="card-code"/>
-          <p:cNvSpPr/>
-          <p:nvPr/>
-        </p:nvSpPr>
-        <p:spPr>
-          <a:xfrm>
-            <a:off x="548640" y="2697480"/>
-            <a:ext cx="5349240" cy="1188720"/>
-          </a:xfrm>
-          <a:prstGeom prst="roundRect">
-            <a:avLst>
-              <a:gd name="adj" fmla="val 9231"/>
-            </a:avLst>
-          </a:prstGeom>
-          <a:solidFill>
-            <a:srgbClr val="1F2A30"/>
-          </a:solidFill>
-          <a:ln/>
-        </p:spPr>
-      </p:sp>
-      <p:sp>
-        <p:nvSpPr>
-          <p:cNvPr id="6" name="Text 4"/>
-          <p:cNvSpPr txBox="1"/>
-          <p:nvPr/>
-        </p:nvSpPr>
-        <p:spPr>
-          <a:xfrm>
-            <a:off x="777240" y="2834640"/>
-            <a:ext cx="1828800" cy="274320"/>
-          </a:xfrm>
-          <a:prstGeom prst="rect">
-            <a:avLst/>
-          </a:prstGeom>
-          <a:noFill/>
-          <a:ln/>
-        </p:spPr>
-        <p:txBody>
-          <a:bodyPr wrap="square" lIns="0" tIns="0" rIns="0" bIns="0" rtlCol="0" anchor="ctr"/>
-          <a:lstStyle/>
-          <a:p>
-            <a:pPr indent="0" marL="0">
-              <a:buNone/>
-            </a:pPr>
-            <a:r>
-              <a:rPr lang="en-US" sz="1100" b="1" spc="200" kern="0" dirty="0">
-                <a:solidFill>
-                  <a:srgbClr val="E09F3E"/>
-                </a:solidFill>
-              </a:rPr>
-              <a:t>PYTHON</a:t>
-            </a:r>
-            <a:endParaRPr lang="en-US" sz="1100" dirty="0"/>
-          </a:p>
-        </p:txBody>
-      </p:sp>
-      <p:sp>
-        <p:nvSpPr>
-          <p:cNvPr id="7" name="Text 5"/>
-          <p:cNvSpPr txBox="1"/>
-          <p:nvPr/>
-        </p:nvSpPr>
-        <p:spPr>
-          <a:xfrm>
-            <a:off x="777240" y="3154680"/>
-            <a:ext cx="4892040" cy="594360"/>
-          </a:xfrm>
-          <a:prstGeom prst="rect">
-            <a:avLst/>
-          </a:prstGeom>
-          <a:noFill/>
-          <a:ln/>
-        </p:spPr>
-        <p:txBody>
-          <a:bodyPr wrap="square" lIns="0" tIns="0" rIns="0" bIns="0" rtlCol="0" anchor="t"/>
-          <a:lstStyle/>
-          <a:p>
-            <a:pPr indent="0" marL="0">
-              <a:buNone/>
-            </a:pPr>
-            <a:r>
-              <a:rPr lang="en-US" sz="2200" dirty="0">
-                <a:solidFill>
-                  <a:srgbClr val="FFFFFF"/>
-                </a:solidFill>
-                <a:latin typeface="Courier New" pitchFamily="34" charset="0"/>
-                <a:ea typeface="Courier New" pitchFamily="34" charset="-122"/>
-                <a:cs typeface="Courier New" pitchFamily="34" charset="-120"/>
-              </a:rPr>
-              <a:t>df.head(3)</a:t>
-            </a:r>
-            <a:endParaRPr lang="en-US" sz="2200" dirty="0"/>
-          </a:p>
-        </p:txBody>
-      </p:sp>
-      <p:sp>
-        <p:nvSpPr>
-          <p:cNvPr id="8" name="card-out"/>
-          <p:cNvSpPr/>
-          <p:nvPr/>
-        </p:nvSpPr>
-        <p:spPr>
-          <a:xfrm>
-            <a:off x="548640" y="4069080"/>
-            <a:ext cx="5349240" cy="1188720"/>
-          </a:xfrm>
-          <a:prstGeom prst="roundRect">
-            <a:avLst>
-              <a:gd name="adj" fmla="val 9231"/>
-            </a:avLst>
-          </a:prstGeom>
-          <a:solidFill>
-            <a:srgbClr val="EEF3F4"/>
-          </a:solidFill>
-          <a:ln/>
-        </p:spPr>
-      </p:sp>
-      <p:sp>
-        <p:nvSpPr>
-          <p:cNvPr id="9" name="Text 7"/>
-          <p:cNvSpPr txBox="1"/>
-          <p:nvPr/>
-        </p:nvSpPr>
-        <p:spPr>
-          <a:xfrm>
-            <a:off x="777240" y="4206240"/>
-            <a:ext cx="1828800" cy="274320"/>
-          </a:xfrm>
-          <a:prstGeom prst="rect">
-            <a:avLst/>
-          </a:prstGeom>
-          <a:noFill/>
-          <a:ln/>
-        </p:spPr>
-        <p:txBody>
-          <a:bodyPr wrap="square" lIns="0" tIns="0" rIns="0" bIns="0" rtlCol="0" anchor="ctr"/>
-          <a:lstStyle/>
-          <a:p>
-            <a:pPr indent="0" marL="0">
-              <a:buNone/>
-            </a:pPr>
-            <a:r>
-              <a:rPr lang="en-US" sz="1100" b="1" spc="200" kern="0" dirty="0">
-                <a:solidFill>
-                  <a:srgbClr val="5C6F7B"/>
-                </a:solidFill>
-              </a:rPr>
-              <a:t>OUTPUT</a:t>
-            </a:r>
-            <a:endParaRPr lang="en-US" sz="1100" dirty="0"/>
-          </a:p>
-        </p:txBody>
-      </p:sp>
-      <p:sp>
-        <p:nvSpPr>
-          <p:cNvPr id="10" name="Text 8"/>
-          <p:cNvSpPr txBox="1"/>
-          <p:nvPr/>
-        </p:nvSpPr>
-        <p:spPr>
-          <a:xfrm>
-            <a:off x="777240" y="4526280"/>
-            <a:ext cx="4892040" cy="594360"/>
-          </a:xfrm>
-          <a:prstGeom prst="rect">
-            <a:avLst/>
-          </a:prstGeom>
-          <a:noFill/>
-          <a:ln/>
-        </p:spPr>
-        <p:txBody>
-          <a:bodyPr wrap="square" lIns="0" tIns="0" rIns="0" bIns="0" rtlCol="0" anchor="t"/>
-          <a:lstStyle/>
-          <a:p>
-            <a:pPr indent="0" marL="0">
-              <a:buNone/>
-            </a:pPr>
-            <a:r>
-              <a:rPr lang="en-US" sz="2000" dirty="0">
-                <a:solidFill>
-                  <a:srgbClr val="1F2A30"/>
-                </a:solidFill>
-                <a:latin typeface="Courier New" pitchFamily="34" charset="0"/>
-                <a:ea typeface="Courier New" pitchFamily="34" charset="-122"/>
-                <a:cs typeface="Courier New" pitchFamily="34" charset="-120"/>
-              </a:rPr>
-              <a:t>le prime 3 righe</a:t>
-            </a:r>
-            <a:endParaRPr lang="en-US" sz="2000" dirty="0"/>
-          </a:p>
-        </p:txBody>
-      </p:sp>
-      <p:sp>
-        <p:nvSpPr>
-          <p:cNvPr id="11" name="Text 9"/>
-          <p:cNvSpPr txBox="1"/>
-          <p:nvPr/>
-        </p:nvSpPr>
-        <p:spPr>
-          <a:xfrm>
-            <a:off x="6263640" y="1645920"/>
-            <a:ext cx="5349240" cy="457200"/>
-          </a:xfrm>
-          <a:prstGeom prst="rect">
-            <a:avLst/>
-          </a:prstGeom>
-          <a:noFill/>
-          <a:ln/>
-        </p:spPr>
-        <p:txBody>
-          <a:bodyPr wrap="square" lIns="0" tIns="0" rIns="0" bIns="0" rtlCol="0" anchor="ctr"/>
-          <a:lstStyle/>
-          <a:p>
-            <a:pPr indent="0" marL="0">
-              <a:buNone/>
-            </a:pPr>
-            <a:r>
-              <a:rPr lang="en-US" sz="2600" b="1" dirty="0">
-                <a:solidFill>
-                  <a:srgbClr val="0F4C5C"/>
-                </a:solidFill>
-              </a:rPr>
-              <a:t>Attributo</a:t>
-            </a:r>
-            <a:endParaRPr lang="en-US" sz="2600" dirty="0"/>
-          </a:p>
-        </p:txBody>
-      </p:sp>
-      <p:sp>
-        <p:nvSpPr>
-          <p:cNvPr id="12" name="Text 10"/>
-          <p:cNvSpPr txBox="1"/>
-          <p:nvPr/>
-        </p:nvSpPr>
-        <p:spPr>
-          <a:xfrm>
-            <a:off x="6263640" y="2103120"/>
-            <a:ext cx="5349240" cy="411480"/>
-          </a:xfrm>
-          <a:prstGeom prst="rect">
-            <a:avLst/>
-          </a:prstGeom>
-          <a:noFill/>
-          <a:ln/>
-        </p:spPr>
-        <p:txBody>
-          <a:bodyPr wrap="square" lIns="0" tIns="0" rIns="0" bIns="0" rtlCol="0" anchor="ctr"/>
-          <a:lstStyle/>
-          <a:p>
-            <a:pPr indent="0" marL="0">
-              <a:buNone/>
-            </a:pPr>
-            <a:r>
-              <a:rPr lang="en-US" sz="1800" dirty="0">
-                <a:solidFill>
-                  <a:srgbClr val="5C6F7B"/>
-                </a:solidFill>
-              </a:rPr>
-              <a:t>un'informazione: niente parentesi</a:t>
-            </a:r>
-            <a:endParaRPr lang="en-US" sz="1800" dirty="0"/>
-          </a:p>
-        </p:txBody>
-      </p:sp>
-      <p:sp>
-        <p:nvSpPr>
-          <p:cNvPr id="13" name="card-code"/>
-          <p:cNvSpPr/>
-          <p:nvPr/>
-        </p:nvSpPr>
-        <p:spPr>
-          <a:xfrm>
-            <a:off x="6263640" y="2697480"/>
-            <a:ext cx="5349240" cy="1188720"/>
-          </a:xfrm>
-          <a:prstGeom prst="roundRect">
-            <a:avLst>
-              <a:gd name="adj" fmla="val 9231"/>
-            </a:avLst>
-          </a:prstGeom>
-          <a:solidFill>
-            <a:srgbClr val="1F2A30"/>
-          </a:solidFill>
-          <a:ln/>
-        </p:spPr>
-      </p:sp>
-      <p:sp>
-        <p:nvSpPr>
-          <p:cNvPr id="14" name="Text 12"/>
-          <p:cNvSpPr txBox="1"/>
-          <p:nvPr/>
-        </p:nvSpPr>
-        <p:spPr>
-          <a:xfrm>
-            <a:off x="6492240" y="2834640"/>
-            <a:ext cx="1828800" cy="274320"/>
-          </a:xfrm>
-          <a:prstGeom prst="rect">
-            <a:avLst/>
-          </a:prstGeom>
-          <a:noFill/>
-          <a:ln/>
-        </p:spPr>
-        <p:txBody>
-          <a:bodyPr wrap="square" lIns="0" tIns="0" rIns="0" bIns="0" rtlCol="0" anchor="ctr"/>
-          <a:lstStyle/>
-          <a:p>
-            <a:pPr indent="0" marL="0">
-              <a:buNone/>
-            </a:pPr>
-            <a:r>
-              <a:rPr lang="en-US" sz="1100" b="1" spc="200" kern="0" dirty="0">
-                <a:solidFill>
-                  <a:srgbClr val="E09F3E"/>
-                </a:solidFill>
-              </a:rPr>
-              <a:t>PYTHON</a:t>
-            </a:r>
-            <a:endParaRPr lang="en-US" sz="1100" dirty="0"/>
-          </a:p>
-        </p:txBody>
-      </p:sp>
-      <p:sp>
-        <p:nvSpPr>
-          <p:cNvPr id="15" name="Text 13"/>
-          <p:cNvSpPr txBox="1"/>
-          <p:nvPr/>
-        </p:nvSpPr>
-        <p:spPr>
-          <a:xfrm>
-            <a:off x="6492240" y="3154680"/>
-            <a:ext cx="4892040" cy="594360"/>
-          </a:xfrm>
-          <a:prstGeom prst="rect">
-            <a:avLst/>
-          </a:prstGeom>
-          <a:noFill/>
-          <a:ln/>
-        </p:spPr>
-        <p:txBody>
-          <a:bodyPr wrap="square" lIns="0" tIns="0" rIns="0" bIns="0" rtlCol="0" anchor="t"/>
-          <a:lstStyle/>
-          <a:p>
-            <a:pPr indent="0" marL="0">
-              <a:buNone/>
-            </a:pPr>
-            <a:r>
-              <a:rPr lang="en-US" sz="2200" dirty="0">
-                <a:solidFill>
-                  <a:srgbClr val="FFFFFF"/>
-                </a:solidFill>
-                <a:latin typeface="Courier New" pitchFamily="34" charset="0"/>
-                <a:ea typeface="Courier New" pitchFamily="34" charset="-122"/>
-                <a:cs typeface="Courier New" pitchFamily="34" charset="-120"/>
-              </a:rPr>
-              <a:t>df.shape</a:t>
-            </a:r>
-            <a:endParaRPr lang="en-US" sz="2200" dirty="0"/>
-          </a:p>
-        </p:txBody>
-      </p:sp>
-      <p:sp>
-        <p:nvSpPr>
-          <p:cNvPr id="16" name="card-out"/>
-          <p:cNvSpPr/>
-          <p:nvPr/>
-        </p:nvSpPr>
-        <p:spPr>
-          <a:xfrm>
-            <a:off x="6263640" y="4069080"/>
-            <a:ext cx="5349240" cy="1188720"/>
-          </a:xfrm>
-          <a:prstGeom prst="roundRect">
-            <a:avLst>
-              <a:gd name="adj" fmla="val 9231"/>
-            </a:avLst>
-          </a:prstGeom>
-          <a:solidFill>
-            <a:srgbClr val="EEF3F4"/>
-          </a:solidFill>
-          <a:ln/>
-        </p:spPr>
-      </p:sp>
-      <p:sp>
-        <p:nvSpPr>
-          <p:cNvPr id="17" name="Text 15"/>
-          <p:cNvSpPr txBox="1"/>
-          <p:nvPr/>
-        </p:nvSpPr>
-        <p:spPr>
-          <a:xfrm>
-            <a:off x="6492240" y="4206240"/>
-            <a:ext cx="1828800" cy="274320"/>
-          </a:xfrm>
-          <a:prstGeom prst="rect">
-            <a:avLst/>
-          </a:prstGeom>
-          <a:noFill/>
-          <a:ln/>
-        </p:spPr>
-        <p:txBody>
-          <a:bodyPr wrap="square" lIns="0" tIns="0" rIns="0" bIns="0" rtlCol="0" anchor="ctr"/>
-          <a:lstStyle/>
-          <a:p>
-            <a:pPr indent="0" marL="0">
-              <a:buNone/>
-            </a:pPr>
-            <a:r>
-              <a:rPr lang="en-US" sz="1100" b="1" spc="200" kern="0" dirty="0">
-                <a:solidFill>
-                  <a:srgbClr val="5C6F7B"/>
-                </a:solidFill>
-              </a:rPr>
-              <a:t>OUTPUT</a:t>
-            </a:r>
-            <a:endParaRPr lang="en-US" sz="1100" dirty="0"/>
-          </a:p>
-        </p:txBody>
-      </p:sp>
-      <p:sp>
-        <p:nvSpPr>
-          <p:cNvPr id="18" name="Text 16"/>
-          <p:cNvSpPr txBox="1"/>
-          <p:nvPr/>
-        </p:nvSpPr>
-        <p:spPr>
-          <a:xfrm>
-            <a:off x="6492240" y="4526280"/>
-            <a:ext cx="4892040" cy="594360"/>
-          </a:xfrm>
-          <a:prstGeom prst="rect">
-            <a:avLst/>
-          </a:prstGeom>
-          <a:noFill/>
-          <a:ln/>
-        </p:spPr>
-        <p:txBody>
-          <a:bodyPr wrap="square" lIns="0" tIns="0" rIns="0" bIns="0" rtlCol="0" anchor="t"/>
-          <a:lstStyle/>
-          <a:p>
-            <a:pPr indent="0" marL="0">
-              <a:buNone/>
-            </a:pPr>
-            <a:r>
-              <a:rPr lang="en-US" sz="2000" dirty="0">
-                <a:solidFill>
-                  <a:srgbClr val="1F2A30"/>
-                </a:solidFill>
-                <a:latin typeface="Courier New" pitchFamily="34" charset="0"/>
-                <a:ea typeface="Courier New" pitchFamily="34" charset="-122"/>
-                <a:cs typeface="Courier New" pitchFamily="34" charset="-120"/>
-              </a:rPr>
-              <a:t>(2515, 9)</a:t>
-            </a:r>
-            <a:endParaRPr lang="en-US" sz="2000" dirty="0"/>
-          </a:p>
-        </p:txBody>
-      </p:sp>
-      <p:sp>
-        <p:nvSpPr>
-          <p:cNvPr id="19" name="Text 17"/>
-          <p:cNvSpPr txBox="1"/>
-          <p:nvPr/>
-        </p:nvSpPr>
-        <p:spPr>
-          <a:xfrm>
-            <a:off x="548640" y="5532120"/>
-            <a:ext cx="11064240" cy="457200"/>
-          </a:xfrm>
-          <a:prstGeom prst="rect">
-            <a:avLst/>
-          </a:prstGeom>
-          <a:noFill/>
-          <a:ln/>
-        </p:spPr>
-        <p:txBody>
-          <a:bodyPr wrap="square" lIns="0" tIns="0" rIns="0" bIns="0" rtlCol="0" anchor="ctr"/>
-          <a:lstStyle/>
-          <a:p>
-            <a:pPr indent="0" marL="0">
-              <a:buNone/>
-            </a:pPr>
-            <a:r>
-              <a:rPr lang="en-US" sz="1800" i="1" dirty="0">
-                <a:solidFill>
-                  <a:srgbClr val="0F4C5C"/>
-                </a:solidFill>
-              </a:rPr>
-              <a:t>df è un oggetto: dati, più tutte le cose che puoi chiedergli. Il punto le collega.</a:t>
-            </a:r>
-            <a:endParaRPr lang="en-US" sz="1800" dirty="0"/>
-          </a:p>
-        </p:txBody>
-      </p:sp>
-      <p:sp>
-        <p:nvSpPr>
-          <p:cNvPr id="25" name="Slide Number Placeholder 0"/>
-          <p:cNvSpPr>
-            <a:spLocks noGrp="1"/>
-          </p:cNvSpPr>
-          <p:nvPr>
-            <p:ph type="sldNum" sz="quarter" idx="4294967295"/>
-          </p:nvPr>
-        </p:nvSpPr>
-        <p:spPr>
-          <a:xfrm>
-            <a:off x="11155680" y="6400800"/>
-            <a:ext cx="457200" cy="274320"/>
-          </a:xfrm>
-          <a:prstGeom prst="rect">
-            <a:avLst/>
-          </a:prstGeom>
-          <a:extLst>
-            <a:ext uri="{C572A759-6A51-4108-AA02-DFA0A04FC94B}">
-              <ma14:wrappingTextBoxFlag xmlns:ma14="http://schemas.microsoft.com/office/mac/drawingml/2011/main" val="0"/>
-            </a:ext>
-          </a:extLst>
-        </p:spPr>
-        <p:txBody>
-          <a:bodyPr/>
-          <a:lstStyle>
-            <a:lvl1pPr>
-              <a:defRPr sz="1000">
-                <a:solidFill>
-                  <a:srgbClr val="5C6F7B"/>
-                </a:solidFill>
-              </a:defRPr>
-            </a:lvl1pPr>
-          </a:lstStyle>
-          <a:p>
-            <a:pPr algn="r"/>
-            <a:fld id="{F7021451-1387-4CA6-816F-3879F97B5CBC}" type="slidenum">
-              <a:rPr b="0" lang="en-US"/>
               <a:t>9</a:t>
             </a:fld>
             <a:endParaRPr lang="en-US"/>

--- a/L02_conosci_il_dataset/slide_complete.pptx
+++ b/L02_conosci_il_dataset/slide_complete.pptx
@@ -125,13 +125,13 @@
   <p:extLst>
     <p:ext uri="{521415D9-36F7-43E2-AB2F-B90AF26B5E84}">
       <p14:sectionLst xmlns:p14="http://schemas.microsoft.com/office/powerpoint/2010/main">
-        <p14:section name="Apertura" id="{ffa0a288-c9ab-7dec-69fa-0972b26fb171}">
+        <p14:section name="Apertura" id="{3cf99f9e-69dd-a0fd-1c47-c3384697c75d}">
           <p14:sldIdLst>
             <p14:sldId id="256"/>
             <p14:sldId id="257"/>
           </p14:sldIdLst>
         </p14:section>
-        <p14:section name="Spiegazione" id="{9f570319-bba4-5be0-22dc-21a99c46e000}">
+        <p14:section name="Spiegazione" id="{a556594c-fbc1-a869-7601-3edd353c1fef}">
           <p14:sldIdLst>
             <p14:sldId id="258"/>
             <p14:sldId id="259"/>
@@ -145,12 +145,12 @@
             <p14:sldId id="267"/>
           </p14:sldIdLst>
         </p14:section>
-        <p14:section name="Task" id="{393cbcac-07b1-ac06-b38b-49f60c3a06e7}">
+        <p14:section name="Task" id="{84755450-a6af-c8ca-8049-462b41517b85}">
           <p14:sldIdLst>
             <p14:sldId id="268"/>
           </p14:sldIdLst>
         </p14:section>
-        <p14:section name="Debrief" id="{392fc6ec-b699-50be-d7cc-e45e579be821}">
+        <p14:section name="Debrief" id="{5e91026d-7ea4-20c2-c2bd-1553fb39a354}">
           <p14:sldIdLst>
             <p14:sldId id="269"/>
             <p14:sldId id="270"/>
@@ -159,7 +159,7 @@
             <p14:sldId id="273"/>
           </p14:sldIdLst>
         </p14:section>
-        <p14:section name="Chiusura" id="{5a3de7f2-f75d-a972-2052-e1d01158e8d6}">
+        <p14:section name="Chiusura" id="{cb50e36a-5c55-0f8e-dee1-a58230b9f767}">
           <p14:sldIdLst>
             <p14:sldId id="274"/>
           </p14:sldIdLst>
@@ -11049,7 +11049,7 @@
                   <a:srgbClr val="1F2A30"/>
                 </a:solidFill>
               </a:rPr>
-              <a:t>righe che rispettano una condizione</a:t>
+              <a:t>righe che rispettano una condizione: == chiede «è uguale?»</a:t>
             </a:r>
             <a:endParaRPr lang="en-US" sz="1900" dirty="0"/>
           </a:p>

--- a/L02_conosci_il_dataset/slide_complete.pptx
+++ b/L02_conosci_il_dataset/slide_complete.pptx
@@ -125,13 +125,13 @@
   <p:extLst>
     <p:ext uri="{521415D9-36F7-43E2-AB2F-B90AF26B5E84}">
       <p14:sectionLst xmlns:p14="http://schemas.microsoft.com/office/powerpoint/2010/main">
-        <p14:section name="Apertura" id="{3cf99f9e-69dd-a0fd-1c47-c3384697c75d}">
+        <p14:section name="Apertura" id="{01d474aa-5b19-2265-e90c-a36a159fa745}">
           <p14:sldIdLst>
             <p14:sldId id="256"/>
             <p14:sldId id="257"/>
           </p14:sldIdLst>
         </p14:section>
-        <p14:section name="Spiegazione" id="{a556594c-fbc1-a869-7601-3edd353c1fef}">
+        <p14:section name="Spiegazione" id="{d24a71de-de20-6ce0-6e64-9a17eb21299d}">
           <p14:sldIdLst>
             <p14:sldId id="258"/>
             <p14:sldId id="259"/>
@@ -145,12 +145,12 @@
             <p14:sldId id="267"/>
           </p14:sldIdLst>
         </p14:section>
-        <p14:section name="Task" id="{84755450-a6af-c8ca-8049-462b41517b85}">
+        <p14:section name="Task" id="{a844baff-e031-95bc-ead6-ed752577f4a0}">
           <p14:sldIdLst>
             <p14:sldId id="268"/>
           </p14:sldIdLst>
         </p14:section>
-        <p14:section name="Debrief" id="{5e91026d-7ea4-20c2-c2bd-1553fb39a354}">
+        <p14:section name="Debrief" id="{a11a11a6-679d-3749-75d4-f251e159d24b}">
           <p14:sldIdLst>
             <p14:sldId id="269"/>
             <p14:sldId id="270"/>
@@ -159,7 +159,7 @@
             <p14:sldId id="273"/>
           </p14:sldIdLst>
         </p14:section>
-        <p14:section name="Chiusura" id="{cb50e36a-5c55-0f8e-dee1-a58230b9f767}">
+        <p14:section name="Chiusura" id="{1ca042a9-f819-61c5-98b9-fe8405ae139e}">
           <p14:sldIdLst>
             <p14:sldId id="274"/>
           </p14:sldIdLst>
@@ -7449,7 +7449,7 @@
                   <a:srgbClr val="F4C06E"/>
                 </a:solidFill>
               </a:rPr>
-              <a:t>Compito: Kaggle Learn – Pandas, prime due lezioni (~40 min)</a:t>
+              <a:t>Compito: Kaggle Learn – Pandas, prime due lezioni, ed esercizi C1-C2 del notebook</a:t>
             </a:r>
             <a:endParaRPr lang="en-US" sz="2200" dirty="0"/>
           </a:p>

--- a/L02_conosci_il_dataset/slide_complete.pptx
+++ b/L02_conosci_il_dataset/slide_complete.pptx
@@ -126,13 +126,13 @@
   <p:extLst>
     <p:ext uri="{521415D9-36F7-43E2-AB2F-B90AF26B5E84}">
       <p14:sectionLst xmlns:p14="http://schemas.microsoft.com/office/powerpoint/2010/main">
-        <p14:section name="Apertura" id="{0a85fb9b-ec94-f837-9b0d-095679fb0caf}">
+        <p14:section name="Apertura" id="{6392ed43-452f-cf76-6b38-94f06709862e}">
           <p14:sldIdLst>
             <p14:sldId id="256"/>
             <p14:sldId id="257"/>
           </p14:sldIdLst>
         </p14:section>
-        <p14:section name="Spiegazione" id="{43a22243-a45f-7de9-23e5-e1251e7ea7ee}">
+        <p14:section name="Spiegazione" id="{08c2ed68-f14f-127a-9ba1-2c4756115473}">
           <p14:sldIdLst>
             <p14:sldId id="258"/>
             <p14:sldId id="259"/>
@@ -147,12 +147,12 @@
             <p14:sldId id="268"/>
           </p14:sldIdLst>
         </p14:section>
-        <p14:section name="Task" id="{2ac3e6a0-8c2e-e47f-c2d0-019485fb2ca9}">
+        <p14:section name="Task" id="{05012141-fccd-5a20-6aa4-418f5dd5f751}">
           <p14:sldIdLst>
             <p14:sldId id="269"/>
           </p14:sldIdLst>
         </p14:section>
-        <p14:section name="Debrief" id="{1236cd91-68a7-8805-06f5-405cf753bebc}">
+        <p14:section name="Debrief" id="{fad29967-b157-41cd-3657-ce73aac1515b}">
           <p14:sldIdLst>
             <p14:sldId id="270"/>
             <p14:sldId id="271"/>
@@ -161,7 +161,7 @@
             <p14:sldId id="274"/>
           </p14:sldIdLst>
         </p14:section>
-        <p14:section name="Chiusura" id="{f9702dbd-d790-68a3-10e3-b234f63cb1fb}">
+        <p14:section name="Chiusura" id="{e43670dd-be29-15ed-f4cc-be755ae6da50}">
           <p14:sldIdLst>
             <p14:sldId id="275"/>
           </p14:sldIdLst>
@@ -2154,7 +2154,7 @@
           <a:p>
             <a:r>
               <a:rPr lang="en-US" dirty="0"/>
-              <a:t>Disegnare alla lavagna la riga di caselle con i tagli. Funziona uguale per liste, testi ("Milano"[0:3] = "Mil") e righe di un DataFrame con iloc. Il numero tra parentesi quadre senza i due punti è invece una casella: x[2] è la terza.</a:t>
+              <a:t>Disegnare la riga di caselle con la lavagna di Zoom (Condividi → Lavagna) con i tagli. Funziona uguale per liste, testi ("Milano"[0:3] = "Mil") e righe di un DataFrame con iloc. Il numero tra parentesi quadre senza i due punti è invece una casella: x[2] è la terza.</a:t>
             </a:r>
             <a:endParaRPr lang="en-US" dirty="0"/>
           </a:p>

--- a/L02_conosci_il_dataset/slide_complete.pptx
+++ b/L02_conosci_il_dataset/slide_complete.pptx
@@ -126,13 +126,13 @@
   <p:extLst>
     <p:ext uri="{521415D9-36F7-43E2-AB2F-B90AF26B5E84}">
       <p14:sectionLst xmlns:p14="http://schemas.microsoft.com/office/powerpoint/2010/main">
-        <p14:section name="Apertura" id="{6392ed43-452f-cf76-6b38-94f06709862e}">
+        <p14:section name="Apertura" id="{7d7e8f2c-4547-16c8-4bb9-ca42eebcb557}">
           <p14:sldIdLst>
             <p14:sldId id="256"/>
             <p14:sldId id="257"/>
           </p14:sldIdLst>
         </p14:section>
-        <p14:section name="Spiegazione" id="{08c2ed68-f14f-127a-9ba1-2c4756115473}">
+        <p14:section name="Spiegazione" id="{a51ff9be-3a18-e473-e6e8-91de1643b5f1}">
           <p14:sldIdLst>
             <p14:sldId id="258"/>
             <p14:sldId id="259"/>
@@ -147,12 +147,12 @@
             <p14:sldId id="268"/>
           </p14:sldIdLst>
         </p14:section>
-        <p14:section name="Task" id="{05012141-fccd-5a20-6aa4-418f5dd5f751}">
+        <p14:section name="Task" id="{5ea2db50-7142-9e38-8095-b70ca43f1473}">
           <p14:sldIdLst>
             <p14:sldId id="269"/>
           </p14:sldIdLst>
         </p14:section>
-        <p14:section name="Debrief" id="{fad29967-b157-41cd-3657-ce73aac1515b}">
+        <p14:section name="Debrief" id="{b2c3a0b0-8865-9fdd-6fd4-be27f53605cf}">
           <p14:sldIdLst>
             <p14:sldId id="270"/>
             <p14:sldId id="271"/>
@@ -161,7 +161,7 @@
             <p14:sldId id="274"/>
           </p14:sldIdLst>
         </p14:section>
-        <p14:section name="Chiusura" id="{e43670dd-be29-15ed-f4cc-be755ae6da50}">
+        <p14:section name="Chiusura" id="{6c35ec94-f5e9-cb89-3385-ffb31ae05d6b}">
           <p14:sldIdLst>
             <p14:sldId id="275"/>
           </p14:sldIdLst>
@@ -1362,7 +1362,7 @@
           <a:p>
             <a:r>
               <a:rPr lang="en-US" dirty="0"/>
-              <a:t>Chiedere: quante imprese lombarde ci sono davvero? Non lo sappiamo finché non puliamo. Anticipa L3 e L5 (merge).</a:t>
+              <a:t>Chiedere: quante imprese lombarde ci sono davvero? Non lo sappiamo finché non puliamo. Anticipa L3 e L6 (merge).</a:t>
             </a:r>
             <a:endParaRPr lang="en-US" dirty="0"/>
           </a:p>
@@ -1978,7 +1978,7 @@
           <a:p>
             <a:r>
               <a:rPr lang="en-US" dirty="0"/>
-              <a:t>Le liste torneranno di continuo: più colonne (subito, nella prossima slide), i risultati di un ciclo e l'elenco dei file (L6). DEMO: regioni[0:2] e len dopo append.</a:t>
+              <a:t>Le liste torneranno di continuo: più colonne (subito, nella prossima slide), i risultati di un ciclo e l'elenco dei file (L8). DEMO: regioni[0:2] e len dopo append.</a:t>
             </a:r>
             <a:endParaRPr lang="en-US" dirty="0"/>
           </a:p>
